--- a/skillhub-insight.pptx
+++ b/skillhub-insight.pptx
@@ -3143,7 +3143,7 @@
         <p:spPr>
           <a:xfrm>
             <a:off x="0" y="0"/>
-            <a:ext cx="12191695" cy="1417320"/>
+            <a:ext cx="12191695" cy="1024128"/>
           </a:xfrm>
           <a:prstGeom prst="rect">
             <a:avLst/>
@@ -3186,7 +3186,7 @@
         </p:nvSpPr>
         <p:spPr>
           <a:xfrm>
-            <a:off x="0" y="1417320"/>
+            <a:off x="0" y="1024128"/>
             <a:ext cx="12191695" cy="50800"/>
           </a:xfrm>
           <a:prstGeom prst="rect">
@@ -3230,8 +3230,8 @@
         </p:nvSpPr>
         <p:spPr>
           <a:xfrm>
-            <a:off x="548640" y="164592"/>
-            <a:ext cx="10972800" cy="320040"/>
+            <a:off x="548640" y="109728"/>
+            <a:ext cx="10972800" cy="274320"/>
           </a:xfrm>
           <a:prstGeom prst="rect">
             <a:avLst/>
@@ -3239,7 +3239,7 @@
           <a:noFill/>
         </p:spPr>
         <p:txBody>
-          <a:bodyPr wrap="square" anchor="t" lIns="25400" rIns="25400" tIns="25400" bIns="25400">
+          <a:bodyPr wrap="square" anchor="t" lIns="25400" rIns="25400" tIns="12700" bIns="12700">
             <a:spAutoFit/>
           </a:bodyPr>
           <a:lstStyle/>
@@ -3249,11 +3249,11 @@
                 <a:spcPct val="100000"/>
               </a:lnSpc>
               <a:spcAft>
-                <a:spcPts val="400"/>
+                <a:spcPts val="300"/>
               </a:spcAft>
             </a:pPr>
             <a:r>
-              <a:rPr sz="1300" b="1">
+              <a:rPr sz="1250" b="1">
                 <a:solidFill>
                   <a:srgbClr val="D89B2A"/>
                 </a:solidFill>
@@ -3261,7 +3261,7 @@
                 <a:ea typeface="微软雅黑"/>
                 <a:cs typeface="微软雅黑"/>
               </a:rPr>
-              <a:t>洞 察 · INSIGHT</a:t>
+              <a:t>① 痛点与方案 · PRACTICE</a:t>
             </a:r>
           </a:p>
         </p:txBody>
@@ -3274,8 +3274,8 @@
         </p:nvSpPr>
         <p:spPr>
           <a:xfrm>
-            <a:off x="548640" y="420624"/>
-            <a:ext cx="11064240" cy="566928"/>
+            <a:off x="548640" y="384048"/>
+            <a:ext cx="8869680" cy="548640"/>
           </a:xfrm>
           <a:prstGeom prst="rect">
             <a:avLst/>
@@ -3283,7 +3283,7 @@
           <a:noFill/>
         </p:spPr>
         <p:txBody>
-          <a:bodyPr wrap="square" anchor="t" lIns="25400" rIns="25400" tIns="25400" bIns="25400">
+          <a:bodyPr wrap="square" anchor="t" lIns="25400" rIns="25400" tIns="12700" bIns="12700">
             <a:spAutoFit/>
           </a:bodyPr>
           <a:lstStyle/>
@@ -3293,11 +3293,11 @@
                 <a:spcPct val="100000"/>
               </a:lnSpc>
               <a:spcAft>
-                <a:spcPts val="400"/>
+                <a:spcPts val="300"/>
               </a:spcAft>
             </a:pPr>
             <a:r>
-              <a:rPr sz="3000" b="1">
+              <a:rPr sz="2500" b="1">
                 <a:solidFill>
                   <a:srgbClr val="FFFFFF"/>
                 </a:solidFill>
@@ -3305,7 +3305,7 @@
                 <a:ea typeface="微软雅黑"/>
                 <a:cs typeface="微软雅黑"/>
               </a:rPr>
-              <a:t>模型是租来的,技能是攒下来的</a:t>
+              <a:t>Skill 驱动的测试用例生成与执行闭环</a:t>
             </a:r>
           </a:p>
         </p:txBody>
@@ -3318,8 +3318,8 @@
         </p:nvSpPr>
         <p:spPr>
           <a:xfrm>
-            <a:off x="548640" y="1024128"/>
-            <a:ext cx="11064240" cy="365760"/>
+            <a:off x="9098280" y="310896"/>
+            <a:ext cx="2880360" cy="640080"/>
           </a:xfrm>
           <a:prstGeom prst="rect">
             <a:avLst/>
@@ -3327,7 +3327,72 @@
           <a:noFill/>
         </p:spPr>
         <p:txBody>
-          <a:bodyPr wrap="square" anchor="t" lIns="25400" rIns="25400" tIns="25400" bIns="25400">
+          <a:bodyPr wrap="square" anchor="t" lIns="25400" rIns="25400" tIns="12700" bIns="12700">
+            <a:spAutoFit/>
+          </a:bodyPr>
+          <a:lstStyle/>
+          <a:p>
+            <a:pPr algn="r">
+              <a:lnSpc>
+                <a:spcPct val="105000"/>
+              </a:lnSpc>
+              <a:spcAft>
+                <a:spcPts val="300"/>
+              </a:spcAft>
+            </a:pPr>
+            <a:r>
+              <a:rPr sz="1300" b="1">
+                <a:solidFill>
+                  <a:srgbClr val="FFFFFF"/>
+                </a:solidFill>
+                <a:latin typeface="微软雅黑"/>
+                <a:ea typeface="微软雅黑"/>
+                <a:cs typeface="微软雅黑"/>
+              </a:rPr>
+              <a:t>测试场景</a:t>
+            </a:r>
+          </a:p>
+          <a:p>
+            <a:pPr algn="r">
+              <a:lnSpc>
+                <a:spcPct val="105000"/>
+              </a:lnSpc>
+              <a:spcAft>
+                <a:spcPts val="300"/>
+              </a:spcAft>
+            </a:pPr>
+            <a:r>
+              <a:rPr sz="1300" b="1">
+                <a:solidFill>
+                  <a:srgbClr val="D89B2A"/>
+                </a:solidFill>
+                <a:latin typeface="微软雅黑"/>
+                <a:ea typeface="微软雅黑"/>
+                <a:cs typeface="微软雅黑"/>
+              </a:rPr>
+              <a:t>先行落地</a:t>
+            </a:r>
+          </a:p>
+        </p:txBody>
+      </p:sp>
+      <p:sp>
+        <p:nvSpPr>
+          <p:cNvPr id="8" name="TextBox 7"/>
+          <p:cNvSpPr txBox="1"/>
+          <p:nvPr/>
+        </p:nvSpPr>
+        <p:spPr>
+          <a:xfrm>
+            <a:off x="548640" y="1115568"/>
+            <a:ext cx="11430000" cy="274320"/>
+          </a:xfrm>
+          <a:prstGeom prst="rect">
+            <a:avLst/>
+          </a:prstGeom>
+          <a:noFill/>
+        </p:spPr>
+        <p:txBody>
+          <a:bodyPr wrap="square" anchor="t" lIns="25400" rIns="25400" tIns="12700" bIns="12700">
             <a:spAutoFit/>
           </a:bodyPr>
           <a:lstStyle/>
@@ -3337,39 +3402,96 @@
                 <a:spcPct val="100000"/>
               </a:lnSpc>
               <a:spcAft>
-                <a:spcPts val="400"/>
+                <a:spcPts val="300"/>
               </a:spcAft>
             </a:pPr>
             <a:r>
-              <a:rPr sz="1400" b="0">
-                <a:solidFill>
-                  <a:srgbClr val="CFDDEA"/>
+              <a:rPr sz="1400" b="1">
+                <a:solidFill>
+                  <a:srgbClr val="C0392B"/>
                 </a:solidFill>
                 <a:latin typeface="微软雅黑"/>
                 <a:ea typeface="微软雅黑"/>
                 <a:cs typeface="微软雅黑"/>
               </a:rPr>
-              <a:t>Skill × SkillHub × Harness —— 把 AI 能力变成可复利的集团资产</a:t>
-            </a:r>
-          </a:p>
-        </p:txBody>
-      </p:sp>
-      <p:sp>
-        <p:nvSpPr>
-          <p:cNvPr id="8" name="Rectangle 7"/>
+              <a:t>测试现状：</a:t>
+            </a:r>
+            <a:r>
+              <a:rPr sz="1300" b="1">
+                <a:solidFill>
+                  <a:srgbClr val="1E262E"/>
+                </a:solidFill>
+                <a:latin typeface="微软雅黑"/>
+                <a:ea typeface="微软雅黑"/>
+                <a:cs typeface="微软雅黑"/>
+              </a:rPr>
+              <a:t>测试人员在用例构造与多版本重复执行上耗费大量人力</a:t>
+            </a:r>
+          </a:p>
+        </p:txBody>
+      </p:sp>
+      <p:sp>
+        <p:nvSpPr>
+          <p:cNvPr id="9" name="Rounded Rectangle 8"/>
           <p:cNvSpPr/>
           <p:nvPr/>
         </p:nvSpPr>
         <p:spPr>
           <a:xfrm>
-            <a:off x="822960" y="1783080"/>
-            <a:ext cx="10543032" cy="1078992"/>
-          </a:xfrm>
-          <a:prstGeom prst="rect">
+            <a:off x="502920" y="1426464"/>
+            <a:ext cx="11521440" cy="749808"/>
+          </a:xfrm>
+          <a:prstGeom prst="roundRect">
             <a:avLst/>
           </a:prstGeom>
           <a:solidFill>
-            <a:srgbClr val="EEF2F6"/>
+            <a:srgbClr val="FFFFFF"/>
+          </a:solidFill>
+          <a:ln w="12700">
+            <a:solidFill>
+              <a:srgbClr val="E6C9C5"/>
+            </a:solidFill>
+          </a:ln>
+          <a:effectLst/>
+        </p:spPr>
+        <p:style>
+          <a:lnRef idx="1">
+            <a:schemeClr val="accent1"/>
+          </a:lnRef>
+          <a:fillRef idx="3">
+            <a:schemeClr val="accent1"/>
+          </a:fillRef>
+          <a:effectRef idx="2">
+            <a:schemeClr val="accent1"/>
+          </a:effectRef>
+          <a:fontRef idx="minor">
+            <a:schemeClr val="lt1"/>
+          </a:fontRef>
+        </p:style>
+        <p:txBody>
+          <a:bodyPr rtlCol="0" anchor="ctr"/>
+          <a:lstStyle/>
+          <a:p>
+            <a:pPr algn="ctr"/>
+          </a:p>
+        </p:txBody>
+      </p:sp>
+      <p:sp>
+        <p:nvSpPr>
+          <p:cNvPr id="10" name="Rounded Rectangle 9"/>
+          <p:cNvSpPr/>
+          <p:nvPr/>
+        </p:nvSpPr>
+        <p:spPr>
+          <a:xfrm>
+            <a:off x="502920" y="1426464"/>
+            <a:ext cx="2697480" cy="749808"/>
+          </a:xfrm>
+          <a:prstGeom prst="roundRect">
+            <a:avLst/>
+          </a:prstGeom>
+          <a:solidFill>
+            <a:srgbClr val="C0392B"/>
           </a:solidFill>
           <a:ln>
             <a:noFill/>
@@ -3400,14 +3522,14 @@
       </p:sp>
       <p:sp>
         <p:nvSpPr>
-          <p:cNvPr id="9" name="TextBox 8"/>
+          <p:cNvPr id="11" name="TextBox 10"/>
           <p:cNvSpPr txBox="1"/>
           <p:nvPr/>
         </p:nvSpPr>
         <p:spPr>
           <a:xfrm>
-            <a:off x="822960" y="1865376"/>
-            <a:ext cx="10543032" cy="457200"/>
+            <a:off x="548640" y="1426464"/>
+            <a:ext cx="2606040" cy="749808"/>
           </a:xfrm>
           <a:prstGeom prst="rect">
             <a:avLst/>
@@ -3415,43 +3537,43 @@
           <a:noFill/>
         </p:spPr>
         <p:txBody>
-          <a:bodyPr wrap="square" anchor="t" lIns="25400" rIns="25400" tIns="25400" bIns="25400">
+          <a:bodyPr wrap="square" anchor="ctr" lIns="25400" rIns="25400" tIns="12700" bIns="12700">
             <a:spAutoFit/>
           </a:bodyPr>
           <a:lstStyle/>
           <a:p>
             <a:pPr algn="ctr">
               <a:lnSpc>
-                <a:spcPct val="100000"/>
+                <a:spcPct val="110000"/>
               </a:lnSpc>
               <a:spcAft>
-                <a:spcPts val="400"/>
+                <a:spcPts val="300"/>
               </a:spcAft>
             </a:pPr>
             <a:r>
-              <a:rPr sz="2200" b="1">
-                <a:solidFill>
-                  <a:srgbClr val="0B2A4A"/>
+              <a:rPr sz="1250" b="1">
+                <a:solidFill>
+                  <a:srgbClr val="FFFFFF"/>
                 </a:solidFill>
                 <a:latin typeface="微软雅黑"/>
                 <a:ea typeface="微软雅黑"/>
                 <a:cs typeface="微软雅黑"/>
               </a:rPr>
-              <a:t>AI 生产力  =  模型能力  ×  技能资产 (Skill)  ×  运行框架 (Harness)</a:t>
-            </a:r>
-          </a:p>
-        </p:txBody>
-      </p:sp>
-      <p:sp>
-        <p:nvSpPr>
-          <p:cNvPr id="10" name="TextBox 9"/>
+              <a:t>① 构造测试用例耗时</a:t>
+            </a:r>
+          </a:p>
+        </p:txBody>
+      </p:sp>
+      <p:sp>
+        <p:nvSpPr>
+          <p:cNvPr id="12" name="TextBox 11"/>
           <p:cNvSpPr txBox="1"/>
           <p:nvPr/>
         </p:nvSpPr>
         <p:spPr>
           <a:xfrm>
-            <a:off x="822960" y="2377440"/>
-            <a:ext cx="10543032" cy="411480"/>
+            <a:off x="3383280" y="1517904"/>
+            <a:ext cx="5577840" cy="585216"/>
           </a:xfrm>
           <a:prstGeom prst="rect">
             <a:avLst/>
@@ -3459,43 +3581,173 @@
           <a:noFill/>
         </p:spPr>
         <p:txBody>
-          <a:bodyPr wrap="square" anchor="t" lIns="25400" rIns="25400" tIns="25400" bIns="25400">
+          <a:bodyPr wrap="square" anchor="t" lIns="25400" rIns="25400" tIns="12700" bIns="12700">
             <a:spAutoFit/>
           </a:bodyPr>
           <a:lstStyle/>
           <a:p>
-            <a:pPr algn="ctr">
+            <a:pPr algn="l">
               <a:lnSpc>
-                <a:spcPct val="100000"/>
+                <a:spcPct val="120000"/>
               </a:lnSpc>
               <a:spcAft>
-                <a:spcPts val="400"/>
+                <a:spcPts val="300"/>
               </a:spcAft>
             </a:pPr>
             <a:r>
-              <a:rPr sz="1300" b="0">
-                <a:solidFill>
-                  <a:srgbClr val="5A6672"/>
+              <a:rPr sz="1150" b="1">
+                <a:solidFill>
+                  <a:srgbClr val="1E262E"/>
                 </a:solidFill>
                 <a:latin typeface="微软雅黑"/>
                 <a:ea typeface="微软雅黑"/>
                 <a:cs typeface="微软雅黑"/>
               </a:rPr>
-              <a:t>租得到 · 商品化            攒得出 · 会复利            组装成产出 · 生产线</a:t>
-            </a:r>
-          </a:p>
-        </p:txBody>
-      </p:sp>
-      <p:sp>
-        <p:nvSpPr>
-          <p:cNvPr id="11" name="Rounded Rectangle 10"/>
+              <a:t>1) 测试因子分析    2) 文本用例生成    3) 脚本执行</a:t>
+            </a:r>
+          </a:p>
+          <a:p>
+            <a:pPr algn="l">
+              <a:lnSpc>
+                <a:spcPct val="120000"/>
+              </a:lnSpc>
+              <a:spcAft>
+                <a:spcPts val="300"/>
+              </a:spcAft>
+            </a:pPr>
+            <a:r>
+              <a:rPr sz="1100" b="0">
+                <a:solidFill>
+                  <a:srgbClr val="5A6672"/>
+                </a:solidFill>
+                <a:latin typeface="微软雅黑"/>
+                <a:ea typeface="微软雅黑"/>
+                <a:cs typeface="微软雅黑"/>
+              </a:rPr>
+              <a:t>均依赖人工经验与业务知识，投入大</a:t>
+            </a:r>
+          </a:p>
+        </p:txBody>
+      </p:sp>
+      <p:sp>
+        <p:nvSpPr>
+          <p:cNvPr id="13" name="Rounded Rectangle 12"/>
           <p:cNvSpPr/>
           <p:nvPr/>
         </p:nvSpPr>
         <p:spPr>
           <a:xfrm>
-            <a:off x="822960" y="3154680"/>
-            <a:ext cx="3392424" cy="1828800"/>
+            <a:off x="9098280" y="1554480"/>
+            <a:ext cx="2880360" cy="493776"/>
+          </a:xfrm>
+          <a:prstGeom prst="roundRect">
+            <a:avLst/>
+          </a:prstGeom>
+          <a:solidFill>
+            <a:srgbClr val="F7ECEA"/>
+          </a:solidFill>
+          <a:ln>
+            <a:noFill/>
+          </a:ln>
+          <a:effectLst/>
+        </p:spPr>
+        <p:style>
+          <a:lnRef idx="1">
+            <a:schemeClr val="accent1"/>
+          </a:lnRef>
+          <a:fillRef idx="3">
+            <a:schemeClr val="accent1"/>
+          </a:fillRef>
+          <a:effectRef idx="2">
+            <a:schemeClr val="accent1"/>
+          </a:effectRef>
+          <a:fontRef idx="minor">
+            <a:schemeClr val="lt1"/>
+          </a:fontRef>
+        </p:style>
+        <p:txBody>
+          <a:bodyPr rtlCol="0" anchor="ctr"/>
+          <a:lstStyle/>
+          <a:p>
+            <a:pPr algn="ctr"/>
+          </a:p>
+        </p:txBody>
+      </p:sp>
+      <p:sp>
+        <p:nvSpPr>
+          <p:cNvPr id="14" name="TextBox 13"/>
+          <p:cNvSpPr txBox="1"/>
+          <p:nvPr/>
+        </p:nvSpPr>
+        <p:spPr>
+          <a:xfrm>
+            <a:off x="9098280" y="1554480"/>
+            <a:ext cx="2880360" cy="493776"/>
+          </a:xfrm>
+          <a:prstGeom prst="rect">
+            <a:avLst/>
+          </a:prstGeom>
+          <a:noFill/>
+        </p:spPr>
+        <p:txBody>
+          <a:bodyPr wrap="square" anchor="ctr" lIns="25400" rIns="25400" tIns="12700" bIns="12700">
+            <a:spAutoFit/>
+          </a:bodyPr>
+          <a:lstStyle/>
+          <a:p>
+            <a:pPr algn="ctr">
+              <a:lnSpc>
+                <a:spcPct val="105000"/>
+              </a:lnSpc>
+              <a:spcAft>
+                <a:spcPts val="300"/>
+              </a:spcAft>
+            </a:pPr>
+            <a:r>
+              <a:rPr sz="1150" b="1">
+                <a:solidFill>
+                  <a:srgbClr val="C0392B"/>
+                </a:solidFill>
+                <a:latin typeface="微软雅黑"/>
+                <a:ea typeface="微软雅黑"/>
+                <a:cs typeface="微软雅黑"/>
+              </a:rPr>
+              <a:t>构造周期长</a:t>
+            </a:r>
+          </a:p>
+          <a:p>
+            <a:pPr algn="ctr">
+              <a:lnSpc>
+                <a:spcPct val="105000"/>
+              </a:lnSpc>
+              <a:spcAft>
+                <a:spcPts val="300"/>
+              </a:spcAft>
+            </a:pPr>
+            <a:r>
+              <a:rPr sz="1050" b="0">
+                <a:solidFill>
+                  <a:srgbClr val="C0392B"/>
+                </a:solidFill>
+                <a:latin typeface="微软雅黑"/>
+                <a:ea typeface="微软雅黑"/>
+                <a:cs typeface="微软雅黑"/>
+              </a:rPr>
+              <a:t>效率受限于人力</a:t>
+            </a:r>
+          </a:p>
+        </p:txBody>
+      </p:sp>
+      <p:sp>
+        <p:nvSpPr>
+          <p:cNvPr id="15" name="Rounded Rectangle 14"/>
+          <p:cNvSpPr/>
+          <p:nvPr/>
+        </p:nvSpPr>
+        <p:spPr>
+          <a:xfrm>
+            <a:off x="502920" y="2249424"/>
+            <a:ext cx="11521440" cy="749808"/>
           </a:xfrm>
           <a:prstGeom prst="roundRect">
             <a:avLst/>
@@ -3505,7 +3757,7 @@
           </a:solidFill>
           <a:ln w="12700">
             <a:solidFill>
-              <a:srgbClr val="D6DEE6"/>
+              <a:srgbClr val="E6C9C5"/>
             </a:solidFill>
           </a:ln>
           <a:effectLst/>
@@ -3534,16 +3786,443 @@
       </p:sp>
       <p:sp>
         <p:nvSpPr>
-          <p:cNvPr id="12" name="Rectangle 11"/>
+          <p:cNvPr id="16" name="Rounded Rectangle 15"/>
           <p:cNvSpPr/>
           <p:nvPr/>
         </p:nvSpPr>
         <p:spPr>
           <a:xfrm>
-            <a:off x="822960" y="3154680"/>
-            <a:ext cx="3392424" cy="101600"/>
-          </a:xfrm>
-          <a:prstGeom prst="rect">
+            <a:off x="502920" y="2249424"/>
+            <a:ext cx="2697480" cy="749808"/>
+          </a:xfrm>
+          <a:prstGeom prst="roundRect">
+            <a:avLst/>
+          </a:prstGeom>
+          <a:solidFill>
+            <a:srgbClr val="C0392B"/>
+          </a:solidFill>
+          <a:ln>
+            <a:noFill/>
+          </a:ln>
+          <a:effectLst/>
+        </p:spPr>
+        <p:style>
+          <a:lnRef idx="1">
+            <a:schemeClr val="accent1"/>
+          </a:lnRef>
+          <a:fillRef idx="3">
+            <a:schemeClr val="accent1"/>
+          </a:fillRef>
+          <a:effectRef idx="2">
+            <a:schemeClr val="accent1"/>
+          </a:effectRef>
+          <a:fontRef idx="minor">
+            <a:schemeClr val="lt1"/>
+          </a:fontRef>
+        </p:style>
+        <p:txBody>
+          <a:bodyPr rtlCol="0" anchor="ctr"/>
+          <a:lstStyle/>
+          <a:p>
+            <a:pPr algn="ctr"/>
+          </a:p>
+        </p:txBody>
+      </p:sp>
+      <p:sp>
+        <p:nvSpPr>
+          <p:cNvPr id="17" name="TextBox 16"/>
+          <p:cNvSpPr txBox="1"/>
+          <p:nvPr/>
+        </p:nvSpPr>
+        <p:spPr>
+          <a:xfrm>
+            <a:off x="548640" y="2249424"/>
+            <a:ext cx="2606040" cy="749808"/>
+          </a:xfrm>
+          <a:prstGeom prst="rect">
+            <a:avLst/>
+          </a:prstGeom>
+          <a:noFill/>
+        </p:spPr>
+        <p:txBody>
+          <a:bodyPr wrap="square" anchor="ctr" lIns="25400" rIns="25400" tIns="12700" bIns="12700">
+            <a:spAutoFit/>
+          </a:bodyPr>
+          <a:lstStyle/>
+          <a:p>
+            <a:pPr algn="ctr">
+              <a:lnSpc>
+                <a:spcPct val="110000"/>
+              </a:lnSpc>
+              <a:spcAft>
+                <a:spcPts val="300"/>
+              </a:spcAft>
+            </a:pPr>
+            <a:r>
+              <a:rPr sz="1250" b="1">
+                <a:solidFill>
+                  <a:srgbClr val="FFFFFF"/>
+                </a:solidFill>
+                <a:latin typeface="微软雅黑"/>
+                <a:ea typeface="微软雅黑"/>
+                <a:cs typeface="微软雅黑"/>
+              </a:rPr>
+              <a:t>② 多版本重复执行用例耗时</a:t>
+            </a:r>
+          </a:p>
+        </p:txBody>
+      </p:sp>
+      <p:sp>
+        <p:nvSpPr>
+          <p:cNvPr id="18" name="TextBox 17"/>
+          <p:cNvSpPr txBox="1"/>
+          <p:nvPr/>
+        </p:nvSpPr>
+        <p:spPr>
+          <a:xfrm>
+            <a:off x="3383280" y="2340864"/>
+            <a:ext cx="5577840" cy="585216"/>
+          </a:xfrm>
+          <a:prstGeom prst="rect">
+            <a:avLst/>
+          </a:prstGeom>
+          <a:noFill/>
+        </p:spPr>
+        <p:txBody>
+          <a:bodyPr wrap="square" anchor="t" lIns="25400" rIns="25400" tIns="12700" bIns="12700">
+            <a:spAutoFit/>
+          </a:bodyPr>
+          <a:lstStyle/>
+          <a:p>
+            <a:pPr algn="l">
+              <a:lnSpc>
+                <a:spcPct val="120000"/>
+              </a:lnSpc>
+              <a:spcAft>
+                <a:spcPts val="300"/>
+              </a:spcAft>
+            </a:pPr>
+            <a:r>
+              <a:rPr sz="1150" b="1">
+                <a:solidFill>
+                  <a:srgbClr val="1E262E"/>
+                </a:solidFill>
+                <a:latin typeface="微软雅黑"/>
+                <a:ea typeface="微软雅黑"/>
+                <a:cs typeface="微软雅黑"/>
+              </a:rPr>
+              <a:t>主干 + 多个 Release + 补丁 多版本并行</a:t>
+            </a:r>
+          </a:p>
+          <a:p>
+            <a:pPr algn="l">
+              <a:lnSpc>
+                <a:spcPct val="120000"/>
+              </a:lnSpc>
+              <a:spcAft>
+                <a:spcPts val="300"/>
+              </a:spcAft>
+            </a:pPr>
+            <a:r>
+              <a:rPr sz="1100" b="0">
+                <a:solidFill>
+                  <a:srgbClr val="5A6672"/>
+                </a:solidFill>
+                <a:latin typeface="微软雅黑"/>
+                <a:ea typeface="微软雅黑"/>
+                <a:cs typeface="微软雅黑"/>
+              </a:rPr>
+              <a:t>同一批用例需逐版本重复回归执行</a:t>
+            </a:r>
+          </a:p>
+        </p:txBody>
+      </p:sp>
+      <p:sp>
+        <p:nvSpPr>
+          <p:cNvPr id="19" name="Rounded Rectangle 18"/>
+          <p:cNvSpPr/>
+          <p:nvPr/>
+        </p:nvSpPr>
+        <p:spPr>
+          <a:xfrm>
+            <a:off x="9098280" y="2377440"/>
+            <a:ext cx="2880360" cy="493776"/>
+          </a:xfrm>
+          <a:prstGeom prst="roundRect">
+            <a:avLst/>
+          </a:prstGeom>
+          <a:solidFill>
+            <a:srgbClr val="C0392B"/>
+          </a:solidFill>
+          <a:ln>
+            <a:noFill/>
+          </a:ln>
+          <a:effectLst/>
+        </p:spPr>
+        <p:style>
+          <a:lnRef idx="1">
+            <a:schemeClr val="accent1"/>
+          </a:lnRef>
+          <a:fillRef idx="3">
+            <a:schemeClr val="accent1"/>
+          </a:fillRef>
+          <a:effectRef idx="2">
+            <a:schemeClr val="accent1"/>
+          </a:effectRef>
+          <a:fontRef idx="minor">
+            <a:schemeClr val="lt1"/>
+          </a:fontRef>
+        </p:style>
+        <p:txBody>
+          <a:bodyPr rtlCol="0" anchor="ctr"/>
+          <a:lstStyle/>
+          <a:p>
+            <a:pPr algn="ctr"/>
+          </a:p>
+        </p:txBody>
+      </p:sp>
+      <p:sp>
+        <p:nvSpPr>
+          <p:cNvPr id="20" name="TextBox 19"/>
+          <p:cNvSpPr txBox="1"/>
+          <p:nvPr/>
+        </p:nvSpPr>
+        <p:spPr>
+          <a:xfrm>
+            <a:off x="9098280" y="2377440"/>
+            <a:ext cx="2880360" cy="493776"/>
+          </a:xfrm>
+          <a:prstGeom prst="rect">
+            <a:avLst/>
+          </a:prstGeom>
+          <a:noFill/>
+        </p:spPr>
+        <p:txBody>
+          <a:bodyPr wrap="square" anchor="ctr" lIns="25400" rIns="25400" tIns="12700" bIns="12700">
+            <a:spAutoFit/>
+          </a:bodyPr>
+          <a:lstStyle/>
+          <a:p>
+            <a:pPr algn="ctr">
+              <a:lnSpc>
+                <a:spcPct val="105000"/>
+              </a:lnSpc>
+              <a:spcAft>
+                <a:spcPts val="300"/>
+              </a:spcAft>
+            </a:pPr>
+            <a:r>
+              <a:rPr sz="1050" b="0">
+                <a:solidFill>
+                  <a:srgbClr val="FFFFFF"/>
+                </a:solidFill>
+                <a:latin typeface="微软雅黑"/>
+                <a:ea typeface="微软雅黑"/>
+                <a:cs typeface="微软雅黑"/>
+              </a:rPr>
+              <a:t>20+ 用例/天 × 20 min</a:t>
+            </a:r>
+          </a:p>
+          <a:p>
+            <a:pPr algn="ctr">
+              <a:lnSpc>
+                <a:spcPct val="105000"/>
+              </a:lnSpc>
+              <a:spcAft>
+                <a:spcPts val="300"/>
+              </a:spcAft>
+            </a:pPr>
+            <a:r>
+              <a:rPr sz="1300" b="1">
+                <a:solidFill>
+                  <a:srgbClr val="FFFFFF"/>
+                </a:solidFill>
+                <a:latin typeface="微软雅黑"/>
+                <a:ea typeface="微软雅黑"/>
+                <a:cs typeface="微软雅黑"/>
+              </a:rPr>
+              <a:t>≈ 每天 5–8 h</a:t>
+            </a:r>
+          </a:p>
+        </p:txBody>
+      </p:sp>
+      <p:sp>
+        <p:nvSpPr>
+          <p:cNvPr id="21" name="Rounded Rectangle 20"/>
+          <p:cNvSpPr/>
+          <p:nvPr/>
+        </p:nvSpPr>
+        <p:spPr>
+          <a:xfrm>
+            <a:off x="502920" y="3127248"/>
+            <a:ext cx="11521440" cy="475488"/>
+          </a:xfrm>
+          <a:prstGeom prst="roundRect">
+            <a:avLst/>
+          </a:prstGeom>
+          <a:solidFill>
+            <a:srgbClr val="0B2A4A"/>
+          </a:solidFill>
+          <a:ln>
+            <a:noFill/>
+          </a:ln>
+          <a:effectLst/>
+        </p:spPr>
+        <p:style>
+          <a:lnRef idx="1">
+            <a:schemeClr val="accent1"/>
+          </a:lnRef>
+          <a:fillRef idx="3">
+            <a:schemeClr val="accent1"/>
+          </a:fillRef>
+          <a:effectRef idx="2">
+            <a:schemeClr val="accent1"/>
+          </a:effectRef>
+          <a:fontRef idx="minor">
+            <a:schemeClr val="lt1"/>
+          </a:fontRef>
+        </p:style>
+        <p:txBody>
+          <a:bodyPr rtlCol="0" anchor="ctr"/>
+          <a:lstStyle/>
+          <a:p>
+            <a:pPr algn="ctr"/>
+          </a:p>
+        </p:txBody>
+      </p:sp>
+      <p:sp>
+        <p:nvSpPr>
+          <p:cNvPr id="22" name="TextBox 21"/>
+          <p:cNvSpPr txBox="1"/>
+          <p:nvPr/>
+        </p:nvSpPr>
+        <p:spPr>
+          <a:xfrm>
+            <a:off x="731520" y="3127248"/>
+            <a:ext cx="11155680" cy="475488"/>
+          </a:xfrm>
+          <a:prstGeom prst="rect">
+            <a:avLst/>
+          </a:prstGeom>
+          <a:noFill/>
+        </p:spPr>
+        <p:txBody>
+          <a:bodyPr wrap="square" anchor="ctr" lIns="25400" rIns="25400" tIns="12700" bIns="12700">
+            <a:spAutoFit/>
+          </a:bodyPr>
+          <a:lstStyle/>
+          <a:p>
+            <a:pPr algn="l">
+              <a:lnSpc>
+                <a:spcPct val="100000"/>
+              </a:lnSpc>
+              <a:spcAft>
+                <a:spcPts val="300"/>
+              </a:spcAft>
+            </a:pPr>
+            <a:r>
+              <a:rPr sz="1300" b="1">
+                <a:solidFill>
+                  <a:srgbClr val="FFFFFF"/>
+                </a:solidFill>
+                <a:latin typeface="微软雅黑"/>
+                <a:ea typeface="微软雅黑"/>
+                <a:cs typeface="微软雅黑"/>
+              </a:rPr>
+              <a:t>解决方案：将业务知识沉淀为 </a:t>
+            </a:r>
+            <a:r>
+              <a:rPr sz="1500" b="1">
+                <a:solidFill>
+                  <a:srgbClr val="D89B2A"/>
+                </a:solidFill>
+                <a:latin typeface="微软雅黑"/>
+                <a:ea typeface="微软雅黑"/>
+                <a:cs typeface="微软雅黑"/>
+              </a:rPr>
+              <a:t>Skill</a:t>
+            </a:r>
+            <a:r>
+              <a:rPr sz="1300" b="1">
+                <a:solidFill>
+                  <a:srgbClr val="FFFFFF"/>
+                </a:solidFill>
+                <a:latin typeface="微软雅黑"/>
+                <a:ea typeface="微软雅黑"/>
+                <a:cs typeface="微软雅黑"/>
+              </a:rPr>
+              <a:t>，实现测试因子分析、用例生成与执行定位的端到端自动化</a:t>
+            </a:r>
+          </a:p>
+        </p:txBody>
+      </p:sp>
+      <p:sp>
+        <p:nvSpPr>
+          <p:cNvPr id="23" name="TextBox 22"/>
+          <p:cNvSpPr txBox="1"/>
+          <p:nvPr/>
+        </p:nvSpPr>
+        <p:spPr>
+          <a:xfrm>
+            <a:off x="548640" y="3712463"/>
+            <a:ext cx="10972800" cy="274320"/>
+          </a:xfrm>
+          <a:prstGeom prst="rect">
+            <a:avLst/>
+          </a:prstGeom>
+          <a:noFill/>
+        </p:spPr>
+        <p:txBody>
+          <a:bodyPr wrap="square" anchor="t" lIns="25400" rIns="25400" tIns="12700" bIns="12700">
+            <a:spAutoFit/>
+          </a:bodyPr>
+          <a:lstStyle/>
+          <a:p>
+            <a:pPr algn="l">
+              <a:lnSpc>
+                <a:spcPct val="100000"/>
+              </a:lnSpc>
+              <a:spcAft>
+                <a:spcPts val="300"/>
+              </a:spcAft>
+            </a:pPr>
+            <a:r>
+              <a:rPr sz="1400" b="1">
+                <a:solidFill>
+                  <a:srgbClr val="0B2A4A"/>
+                </a:solidFill>
+                <a:latin typeface="微软雅黑"/>
+                <a:ea typeface="微软雅黑"/>
+                <a:cs typeface="微软雅黑"/>
+              </a:rPr>
+              <a:t>Skill 驱动的测试全流程闭环</a:t>
+            </a:r>
+            <a:r>
+              <a:rPr sz="1150" b="0">
+                <a:solidFill>
+                  <a:srgbClr val="5A6672"/>
+                </a:solidFill>
+                <a:latin typeface="微软雅黑"/>
+                <a:ea typeface="微软雅黑"/>
+                <a:cs typeface="微软雅黑"/>
+              </a:rPr>
+              <a:t>   逐项应对上述痛点，并支撑测试前移</a:t>
+            </a:r>
+          </a:p>
+        </p:txBody>
+      </p:sp>
+      <p:sp>
+        <p:nvSpPr>
+          <p:cNvPr id="24" name="Rounded Rectangle 23"/>
+          <p:cNvSpPr/>
+          <p:nvPr/>
+        </p:nvSpPr>
+        <p:spPr>
+          <a:xfrm>
+            <a:off x="548640" y="4005072"/>
+            <a:ext cx="2286000" cy="713232"/>
+          </a:xfrm>
+          <a:prstGeom prst="roundRect">
             <a:avLst/>
           </a:prstGeom>
           <a:solidFill>
@@ -3578,14 +4257,14 @@
       </p:sp>
       <p:sp>
         <p:nvSpPr>
-          <p:cNvPr id="13" name="TextBox 12"/>
+          <p:cNvPr id="25" name="TextBox 24"/>
           <p:cNvSpPr txBox="1"/>
           <p:nvPr/>
         </p:nvSpPr>
         <p:spPr>
           <a:xfrm>
-            <a:off x="1024128" y="3355848"/>
-            <a:ext cx="2990088" cy="365760"/>
+            <a:off x="548640" y="4078224"/>
+            <a:ext cx="2286000" cy="365760"/>
           </a:xfrm>
           <a:prstGeom prst="rect">
             <a:avLst/>
@@ -3593,43 +4272,43 @@
           <a:noFill/>
         </p:spPr>
         <p:txBody>
-          <a:bodyPr wrap="square" anchor="t" lIns="25400" rIns="25400" tIns="25400" bIns="25400">
+          <a:bodyPr wrap="square" anchor="ctr" lIns="25400" rIns="25400" tIns="12700" bIns="12700">
             <a:spAutoFit/>
           </a:bodyPr>
           <a:lstStyle/>
           <a:p>
-            <a:pPr algn="l">
+            <a:pPr algn="ctr">
               <a:lnSpc>
                 <a:spcPct val="100000"/>
               </a:lnSpc>
               <a:spcAft>
-                <a:spcPts val="400"/>
+                <a:spcPts val="300"/>
               </a:spcAft>
             </a:pPr>
             <a:r>
-              <a:rPr sz="1500" b="1">
-                <a:solidFill>
-                  <a:srgbClr val="108A8A"/>
+              <a:rPr sz="1400" b="1">
+                <a:solidFill>
+                  <a:srgbClr val="FFFFFF"/>
                 </a:solidFill>
                 <a:latin typeface="微软雅黑"/>
                 <a:ea typeface="微软雅黑"/>
                 <a:cs typeface="微软雅黑"/>
               </a:rPr>
-              <a:t>Harness  运行框架</a:t>
-            </a:r>
-          </a:p>
-        </p:txBody>
-      </p:sp>
-      <p:sp>
-        <p:nvSpPr>
-          <p:cNvPr id="14" name="TextBox 13"/>
+              <a:t>业务知识 Skill</a:t>
+            </a:r>
+          </a:p>
+        </p:txBody>
+      </p:sp>
+      <p:sp>
+        <p:nvSpPr>
+          <p:cNvPr id="26" name="TextBox 25"/>
           <p:cNvSpPr txBox="1"/>
           <p:nvPr/>
         </p:nvSpPr>
         <p:spPr>
           <a:xfrm>
-            <a:off x="1024128" y="3813048"/>
-            <a:ext cx="2990088" cy="365760"/>
+            <a:off x="548640" y="4425696"/>
+            <a:ext cx="2286000" cy="256032"/>
           </a:xfrm>
           <a:prstGeom prst="rect">
             <a:avLst/>
@@ -3637,98 +4316,52 @@
           <a:noFill/>
         </p:spPr>
         <p:txBody>
-          <a:bodyPr wrap="square" anchor="t" lIns="25400" rIns="25400" tIns="25400" bIns="25400">
+          <a:bodyPr wrap="square" anchor="ctr" lIns="25400" rIns="25400" tIns="12700" bIns="12700">
             <a:spAutoFit/>
           </a:bodyPr>
           <a:lstStyle/>
           <a:p>
-            <a:pPr algn="l">
+            <a:pPr algn="ctr">
               <a:lnSpc>
                 <a:spcPct val="100000"/>
               </a:lnSpc>
               <a:spcAft>
-                <a:spcPts val="400"/>
+                <a:spcPts val="300"/>
               </a:spcAft>
             </a:pPr>
             <a:r>
-              <a:rPr sz="1900" b="1">
-                <a:solidFill>
-                  <a:srgbClr val="1E262E"/>
+              <a:rPr sz="1000" b="0">
+                <a:solidFill>
+                  <a:srgbClr val="FFFFFF"/>
                 </a:solidFill>
                 <a:latin typeface="微软雅黑"/>
                 <a:ea typeface="微软雅黑"/>
                 <a:cs typeface="微软雅黑"/>
               </a:rPr>
-              <a:t>生产线</a:t>
-            </a:r>
-          </a:p>
-        </p:txBody>
-      </p:sp>
-      <p:sp>
-        <p:nvSpPr>
-          <p:cNvPr id="15" name="TextBox 14"/>
-          <p:cNvSpPr txBox="1"/>
-          <p:nvPr/>
-        </p:nvSpPr>
-        <p:spPr>
-          <a:xfrm>
-            <a:off x="1024128" y="4251960"/>
-            <a:ext cx="2990088" cy="640080"/>
-          </a:xfrm>
-          <a:prstGeom prst="rect">
-            <a:avLst/>
-          </a:prstGeom>
-          <a:noFill/>
-        </p:spPr>
-        <p:txBody>
-          <a:bodyPr wrap="square" anchor="t" lIns="25400" rIns="25400" tIns="25400" bIns="25400">
-            <a:spAutoFit/>
-          </a:bodyPr>
-          <a:lstStyle/>
-          <a:p>
-            <a:pPr algn="l">
-              <a:lnSpc>
-                <a:spcPct val="110000"/>
-              </a:lnSpc>
-              <a:spcAft>
-                <a:spcPts val="400"/>
-              </a:spcAft>
-            </a:pPr>
-            <a:r>
-              <a:rPr sz="1250" b="0">
-                <a:solidFill>
-                  <a:srgbClr val="5A6672"/>
-                </a:solidFill>
-                <a:latin typeface="微软雅黑"/>
-                <a:ea typeface="微软雅黑"/>
-                <a:cs typeface="微软雅黑"/>
-              </a:rPr>
-              <a:t>把模型与技能组装成真正的业务产出</a:t>
-            </a:r>
-          </a:p>
-        </p:txBody>
-      </p:sp>
-      <p:sp>
-        <p:nvSpPr>
-          <p:cNvPr id="16" name="Rounded Rectangle 15"/>
+              <a:t>沉淀因子与规则</a:t>
+            </a:r>
+          </a:p>
+        </p:txBody>
+      </p:sp>
+      <p:sp>
+        <p:nvSpPr>
+          <p:cNvPr id="27" name="Rounded Rectangle 26"/>
           <p:cNvSpPr/>
           <p:nvPr/>
         </p:nvSpPr>
         <p:spPr>
           <a:xfrm>
-            <a:off x="4398264" y="3154680"/>
-            <a:ext cx="3392424" cy="1828800"/>
+            <a:off x="3337560" y="4005072"/>
+            <a:ext cx="2286000" cy="713232"/>
           </a:xfrm>
           <a:prstGeom prst="roundRect">
             <a:avLst/>
           </a:prstGeom>
           <a:solidFill>
-            <a:srgbClr val="FFFFFF"/>
+            <a:srgbClr val="0B2A4A"/>
           </a:solidFill>
-          <a:ln w="12700">
-            <a:solidFill>
-              <a:srgbClr val="D6DEE6"/>
-            </a:solidFill>
+          <a:ln>
+            <a:noFill/>
           </a:ln>
           <a:effectLst/>
         </p:spPr>
@@ -3756,16 +4389,500 @@
       </p:sp>
       <p:sp>
         <p:nvSpPr>
-          <p:cNvPr id="17" name="Rectangle 16"/>
+          <p:cNvPr id="28" name="TextBox 27"/>
+          <p:cNvSpPr txBox="1"/>
+          <p:nvPr/>
+        </p:nvSpPr>
+        <p:spPr>
+          <a:xfrm>
+            <a:off x="3337560" y="4078224"/>
+            <a:ext cx="2286000" cy="365760"/>
+          </a:xfrm>
+          <a:prstGeom prst="rect">
+            <a:avLst/>
+          </a:prstGeom>
+          <a:noFill/>
+        </p:spPr>
+        <p:txBody>
+          <a:bodyPr wrap="square" anchor="ctr" lIns="25400" rIns="25400" tIns="12700" bIns="12700">
+            <a:spAutoFit/>
+          </a:bodyPr>
+          <a:lstStyle/>
+          <a:p>
+            <a:pPr algn="ctr">
+              <a:lnSpc>
+                <a:spcPct val="100000"/>
+              </a:lnSpc>
+              <a:spcAft>
+                <a:spcPts val="300"/>
+              </a:spcAft>
+            </a:pPr>
+            <a:r>
+              <a:rPr sz="1400" b="1">
+                <a:solidFill>
+                  <a:srgbClr val="FFFFFF"/>
+                </a:solidFill>
+                <a:latin typeface="微软雅黑"/>
+                <a:ea typeface="微软雅黑"/>
+                <a:cs typeface="微软雅黑"/>
+              </a:rPr>
+              <a:t>自动生成文本用例</a:t>
+            </a:r>
+          </a:p>
+        </p:txBody>
+      </p:sp>
+      <p:sp>
+        <p:nvSpPr>
+          <p:cNvPr id="29" name="TextBox 28"/>
+          <p:cNvSpPr txBox="1"/>
+          <p:nvPr/>
+        </p:nvSpPr>
+        <p:spPr>
+          <a:xfrm>
+            <a:off x="3337560" y="4425696"/>
+            <a:ext cx="2286000" cy="256032"/>
+          </a:xfrm>
+          <a:prstGeom prst="rect">
+            <a:avLst/>
+          </a:prstGeom>
+          <a:noFill/>
+        </p:spPr>
+        <p:txBody>
+          <a:bodyPr wrap="square" anchor="ctr" lIns="25400" rIns="25400" tIns="12700" bIns="12700">
+            <a:spAutoFit/>
+          </a:bodyPr>
+          <a:lstStyle/>
+          <a:p>
+            <a:pPr algn="ctr">
+              <a:lnSpc>
+                <a:spcPct val="100000"/>
+              </a:lnSpc>
+              <a:spcAft>
+                <a:spcPts val="300"/>
+              </a:spcAft>
+            </a:pPr>
+            <a:r>
+              <a:rPr sz="1000" b="0">
+                <a:solidFill>
+                  <a:srgbClr val="FFFFFF"/>
+                </a:solidFill>
+                <a:latin typeface="微软雅黑"/>
+                <a:ea typeface="微软雅黑"/>
+                <a:cs typeface="微软雅黑"/>
+              </a:rPr>
+              <a:t>替代人工编写</a:t>
+            </a:r>
+          </a:p>
+        </p:txBody>
+      </p:sp>
+      <p:sp>
+        <p:nvSpPr>
+          <p:cNvPr id="30" name="Rounded Rectangle 29"/>
           <p:cNvSpPr/>
           <p:nvPr/>
         </p:nvSpPr>
         <p:spPr>
           <a:xfrm>
-            <a:off x="4398264" y="3154680"/>
-            <a:ext cx="3392424" cy="101600"/>
-          </a:xfrm>
-          <a:prstGeom prst="rect">
+            <a:off x="6126480" y="4005072"/>
+            <a:ext cx="2286000" cy="713232"/>
+          </a:xfrm>
+          <a:prstGeom prst="roundRect">
+            <a:avLst/>
+          </a:prstGeom>
+          <a:solidFill>
+            <a:srgbClr val="0B2A4A"/>
+          </a:solidFill>
+          <a:ln>
+            <a:noFill/>
+          </a:ln>
+          <a:effectLst/>
+        </p:spPr>
+        <p:style>
+          <a:lnRef idx="1">
+            <a:schemeClr val="accent1"/>
+          </a:lnRef>
+          <a:fillRef idx="3">
+            <a:schemeClr val="accent1"/>
+          </a:fillRef>
+          <a:effectRef idx="2">
+            <a:schemeClr val="accent1"/>
+          </a:effectRef>
+          <a:fontRef idx="minor">
+            <a:schemeClr val="lt1"/>
+          </a:fontRef>
+        </p:style>
+        <p:txBody>
+          <a:bodyPr rtlCol="0" anchor="ctr"/>
+          <a:lstStyle/>
+          <a:p>
+            <a:pPr algn="ctr"/>
+          </a:p>
+        </p:txBody>
+      </p:sp>
+      <p:sp>
+        <p:nvSpPr>
+          <p:cNvPr id="31" name="TextBox 30"/>
+          <p:cNvSpPr txBox="1"/>
+          <p:nvPr/>
+        </p:nvSpPr>
+        <p:spPr>
+          <a:xfrm>
+            <a:off x="6126480" y="4078224"/>
+            <a:ext cx="2286000" cy="365760"/>
+          </a:xfrm>
+          <a:prstGeom prst="rect">
+            <a:avLst/>
+          </a:prstGeom>
+          <a:noFill/>
+        </p:spPr>
+        <p:txBody>
+          <a:bodyPr wrap="square" anchor="ctr" lIns="25400" rIns="25400" tIns="12700" bIns="12700">
+            <a:spAutoFit/>
+          </a:bodyPr>
+          <a:lstStyle/>
+          <a:p>
+            <a:pPr algn="ctr">
+              <a:lnSpc>
+                <a:spcPct val="100000"/>
+              </a:lnSpc>
+              <a:spcAft>
+                <a:spcPts val="300"/>
+              </a:spcAft>
+            </a:pPr>
+            <a:r>
+              <a:rPr sz="1400" b="1">
+                <a:solidFill>
+                  <a:srgbClr val="FFFFFF"/>
+                </a:solidFill>
+                <a:latin typeface="微软雅黑"/>
+                <a:ea typeface="微软雅黑"/>
+                <a:cs typeface="微软雅黑"/>
+              </a:rPr>
+              <a:t>自动执行测试</a:t>
+            </a:r>
+          </a:p>
+        </p:txBody>
+      </p:sp>
+      <p:sp>
+        <p:nvSpPr>
+          <p:cNvPr id="32" name="TextBox 31"/>
+          <p:cNvSpPr txBox="1"/>
+          <p:nvPr/>
+        </p:nvSpPr>
+        <p:spPr>
+          <a:xfrm>
+            <a:off x="6126480" y="4425696"/>
+            <a:ext cx="2286000" cy="256032"/>
+          </a:xfrm>
+          <a:prstGeom prst="rect">
+            <a:avLst/>
+          </a:prstGeom>
+          <a:noFill/>
+        </p:spPr>
+        <p:txBody>
+          <a:bodyPr wrap="square" anchor="ctr" lIns="25400" rIns="25400" tIns="12700" bIns="12700">
+            <a:spAutoFit/>
+          </a:bodyPr>
+          <a:lstStyle/>
+          <a:p>
+            <a:pPr algn="ctr">
+              <a:lnSpc>
+                <a:spcPct val="100000"/>
+              </a:lnSpc>
+              <a:spcAft>
+                <a:spcPts val="300"/>
+              </a:spcAft>
+            </a:pPr>
+            <a:r>
+              <a:rPr sz="1000" b="0">
+                <a:solidFill>
+                  <a:srgbClr val="FFFFFF"/>
+                </a:solidFill>
+                <a:latin typeface="微软雅黑"/>
+                <a:ea typeface="微软雅黑"/>
+                <a:cs typeface="微软雅黑"/>
+              </a:rPr>
+              <a:t>多版本自动回归</a:t>
+            </a:r>
+          </a:p>
+        </p:txBody>
+      </p:sp>
+      <p:sp>
+        <p:nvSpPr>
+          <p:cNvPr id="33" name="Rounded Rectangle 32"/>
+          <p:cNvSpPr/>
+          <p:nvPr/>
+        </p:nvSpPr>
+        <p:spPr>
+          <a:xfrm>
+            <a:off x="8915400" y="4005072"/>
+            <a:ext cx="2286000" cy="713232"/>
+          </a:xfrm>
+          <a:prstGeom prst="roundRect">
+            <a:avLst/>
+          </a:prstGeom>
+          <a:solidFill>
+            <a:srgbClr val="3C5A78"/>
+          </a:solidFill>
+          <a:ln>
+            <a:noFill/>
+          </a:ln>
+          <a:effectLst/>
+        </p:spPr>
+        <p:style>
+          <a:lnRef idx="1">
+            <a:schemeClr val="accent1"/>
+          </a:lnRef>
+          <a:fillRef idx="3">
+            <a:schemeClr val="accent1"/>
+          </a:fillRef>
+          <a:effectRef idx="2">
+            <a:schemeClr val="accent1"/>
+          </a:effectRef>
+          <a:fontRef idx="minor">
+            <a:schemeClr val="lt1"/>
+          </a:fontRef>
+        </p:style>
+        <p:txBody>
+          <a:bodyPr rtlCol="0" anchor="ctr"/>
+          <a:lstStyle/>
+          <a:p>
+            <a:pPr algn="ctr"/>
+          </a:p>
+        </p:txBody>
+      </p:sp>
+      <p:sp>
+        <p:nvSpPr>
+          <p:cNvPr id="34" name="TextBox 33"/>
+          <p:cNvSpPr txBox="1"/>
+          <p:nvPr/>
+        </p:nvSpPr>
+        <p:spPr>
+          <a:xfrm>
+            <a:off x="8915400" y="4078224"/>
+            <a:ext cx="2286000" cy="365760"/>
+          </a:xfrm>
+          <a:prstGeom prst="rect">
+            <a:avLst/>
+          </a:prstGeom>
+          <a:noFill/>
+        </p:spPr>
+        <p:txBody>
+          <a:bodyPr wrap="square" anchor="ctr" lIns="25400" rIns="25400" tIns="12700" bIns="12700">
+            <a:spAutoFit/>
+          </a:bodyPr>
+          <a:lstStyle/>
+          <a:p>
+            <a:pPr algn="ctr">
+              <a:lnSpc>
+                <a:spcPct val="100000"/>
+              </a:lnSpc>
+              <a:spcAft>
+                <a:spcPts val="300"/>
+              </a:spcAft>
+            </a:pPr>
+            <a:r>
+              <a:rPr sz="1400" b="1">
+                <a:solidFill>
+                  <a:srgbClr val="FFFFFF"/>
+                </a:solidFill>
+                <a:latin typeface="微软雅黑"/>
+                <a:ea typeface="微软雅黑"/>
+                <a:cs typeface="微软雅黑"/>
+              </a:rPr>
+              <a:t>缺陷定位 / 反馈</a:t>
+            </a:r>
+          </a:p>
+        </p:txBody>
+      </p:sp>
+      <p:sp>
+        <p:nvSpPr>
+          <p:cNvPr id="35" name="TextBox 34"/>
+          <p:cNvSpPr txBox="1"/>
+          <p:nvPr/>
+        </p:nvSpPr>
+        <p:spPr>
+          <a:xfrm>
+            <a:off x="8915400" y="4425696"/>
+            <a:ext cx="2286000" cy="256032"/>
+          </a:xfrm>
+          <a:prstGeom prst="rect">
+            <a:avLst/>
+          </a:prstGeom>
+          <a:noFill/>
+        </p:spPr>
+        <p:txBody>
+          <a:bodyPr wrap="square" anchor="ctr" lIns="25400" rIns="25400" tIns="12700" bIns="12700">
+            <a:spAutoFit/>
+          </a:bodyPr>
+          <a:lstStyle/>
+          <a:p>
+            <a:pPr algn="ctr">
+              <a:lnSpc>
+                <a:spcPct val="100000"/>
+              </a:lnSpc>
+              <a:spcAft>
+                <a:spcPts val="300"/>
+              </a:spcAft>
+            </a:pPr>
+            <a:r>
+              <a:rPr sz="1000" b="0">
+                <a:solidFill>
+                  <a:srgbClr val="FFFFFF"/>
+                </a:solidFill>
+                <a:latin typeface="微软雅黑"/>
+                <a:ea typeface="微软雅黑"/>
+                <a:cs typeface="微软雅黑"/>
+              </a:rPr>
+              <a:t>快速定位问题</a:t>
+            </a:r>
+          </a:p>
+        </p:txBody>
+      </p:sp>
+      <p:sp>
+        <p:nvSpPr>
+          <p:cNvPr id="36" name="Right Arrow 35"/>
+          <p:cNvSpPr/>
+          <p:nvPr/>
+        </p:nvSpPr>
+        <p:spPr>
+          <a:xfrm>
+            <a:off x="2889504" y="4224528"/>
+            <a:ext cx="384048" cy="274320"/>
+          </a:xfrm>
+          <a:prstGeom prst="rightArrow">
+            <a:avLst/>
+          </a:prstGeom>
+          <a:solidFill>
+            <a:srgbClr val="5A6672"/>
+          </a:solidFill>
+          <a:ln>
+            <a:noFill/>
+          </a:ln>
+          <a:effectLst/>
+        </p:spPr>
+        <p:style>
+          <a:lnRef idx="1">
+            <a:schemeClr val="accent1"/>
+          </a:lnRef>
+          <a:fillRef idx="3">
+            <a:schemeClr val="accent1"/>
+          </a:fillRef>
+          <a:effectRef idx="2">
+            <a:schemeClr val="accent1"/>
+          </a:effectRef>
+          <a:fontRef idx="minor">
+            <a:schemeClr val="lt1"/>
+          </a:fontRef>
+        </p:style>
+        <p:txBody>
+          <a:bodyPr rtlCol="0" anchor="ctr"/>
+          <a:lstStyle/>
+          <a:p>
+            <a:pPr algn="ctr"/>
+          </a:p>
+        </p:txBody>
+      </p:sp>
+      <p:sp>
+        <p:nvSpPr>
+          <p:cNvPr id="37" name="Right Arrow 36"/>
+          <p:cNvSpPr/>
+          <p:nvPr/>
+        </p:nvSpPr>
+        <p:spPr>
+          <a:xfrm>
+            <a:off x="5678424" y="4224528"/>
+            <a:ext cx="384048" cy="274320"/>
+          </a:xfrm>
+          <a:prstGeom prst="rightArrow">
+            <a:avLst/>
+          </a:prstGeom>
+          <a:solidFill>
+            <a:srgbClr val="5A6672"/>
+          </a:solidFill>
+          <a:ln>
+            <a:noFill/>
+          </a:ln>
+          <a:effectLst/>
+        </p:spPr>
+        <p:style>
+          <a:lnRef idx="1">
+            <a:schemeClr val="accent1"/>
+          </a:lnRef>
+          <a:fillRef idx="3">
+            <a:schemeClr val="accent1"/>
+          </a:fillRef>
+          <a:effectRef idx="2">
+            <a:schemeClr val="accent1"/>
+          </a:effectRef>
+          <a:fontRef idx="minor">
+            <a:schemeClr val="lt1"/>
+          </a:fontRef>
+        </p:style>
+        <p:txBody>
+          <a:bodyPr rtlCol="0" anchor="ctr"/>
+          <a:lstStyle/>
+          <a:p>
+            <a:pPr algn="ctr"/>
+          </a:p>
+        </p:txBody>
+      </p:sp>
+      <p:sp>
+        <p:nvSpPr>
+          <p:cNvPr id="38" name="Right Arrow 37"/>
+          <p:cNvSpPr/>
+          <p:nvPr/>
+        </p:nvSpPr>
+        <p:spPr>
+          <a:xfrm>
+            <a:off x="8467344" y="4224528"/>
+            <a:ext cx="384048" cy="274320"/>
+          </a:xfrm>
+          <a:prstGeom prst="rightArrow">
+            <a:avLst/>
+          </a:prstGeom>
+          <a:solidFill>
+            <a:srgbClr val="5A6672"/>
+          </a:solidFill>
+          <a:ln>
+            <a:noFill/>
+          </a:ln>
+          <a:effectLst/>
+        </p:spPr>
+        <p:style>
+          <a:lnRef idx="1">
+            <a:schemeClr val="accent1"/>
+          </a:lnRef>
+          <a:fillRef idx="3">
+            <a:schemeClr val="accent1"/>
+          </a:fillRef>
+          <a:effectRef idx="2">
+            <a:schemeClr val="accent1"/>
+          </a:effectRef>
+          <a:fontRef idx="minor">
+            <a:schemeClr val="lt1"/>
+          </a:fontRef>
+        </p:style>
+        <p:txBody>
+          <a:bodyPr rtlCol="0" anchor="ctr"/>
+          <a:lstStyle/>
+          <a:p>
+            <a:pPr algn="ctr"/>
+          </a:p>
+        </p:txBody>
+      </p:sp>
+      <p:sp>
+        <p:nvSpPr>
+          <p:cNvPr id="39" name="Down Arrow 38"/>
+          <p:cNvSpPr/>
+          <p:nvPr/>
+        </p:nvSpPr>
+        <p:spPr>
+          <a:xfrm>
+            <a:off x="4315968" y="4773168"/>
+            <a:ext cx="310896" cy="310896"/>
+          </a:xfrm>
+          <a:prstGeom prst="downArrow">
             <a:avLst/>
           </a:prstGeom>
           <a:solidFill>
@@ -3800,157 +4917,23 @@
       </p:sp>
       <p:sp>
         <p:nvSpPr>
-          <p:cNvPr id="18" name="TextBox 17"/>
-          <p:cNvSpPr txBox="1"/>
-          <p:nvPr/>
-        </p:nvSpPr>
-        <p:spPr>
-          <a:xfrm>
-            <a:off x="4599432" y="3355848"/>
-            <a:ext cx="2990088" cy="365760"/>
-          </a:xfrm>
-          <a:prstGeom prst="rect">
-            <a:avLst/>
-          </a:prstGeom>
-          <a:noFill/>
-        </p:spPr>
-        <p:txBody>
-          <a:bodyPr wrap="square" anchor="t" lIns="25400" rIns="25400" tIns="25400" bIns="25400">
-            <a:spAutoFit/>
-          </a:bodyPr>
-          <a:lstStyle/>
-          <a:p>
-            <a:pPr algn="l">
-              <a:lnSpc>
-                <a:spcPct val="100000"/>
-              </a:lnSpc>
-              <a:spcAft>
-                <a:spcPts val="400"/>
-              </a:spcAft>
-            </a:pPr>
-            <a:r>
-              <a:rPr sz="1500" b="1">
-                <a:solidFill>
-                  <a:srgbClr val="D89B2A"/>
-                </a:solidFill>
-                <a:latin typeface="微软雅黑"/>
-                <a:ea typeface="微软雅黑"/>
-                <a:cs typeface="微软雅黑"/>
-              </a:rPr>
-              <a:t>Skill  技能</a:t>
-            </a:r>
-          </a:p>
-        </p:txBody>
-      </p:sp>
-      <p:sp>
-        <p:nvSpPr>
-          <p:cNvPr id="19" name="TextBox 18"/>
-          <p:cNvSpPr txBox="1"/>
-          <p:nvPr/>
-        </p:nvSpPr>
-        <p:spPr>
-          <a:xfrm>
-            <a:off x="4599432" y="3813048"/>
-            <a:ext cx="2990088" cy="365760"/>
-          </a:xfrm>
-          <a:prstGeom prst="rect">
-            <a:avLst/>
-          </a:prstGeom>
-          <a:noFill/>
-        </p:spPr>
-        <p:txBody>
-          <a:bodyPr wrap="square" anchor="t" lIns="25400" rIns="25400" tIns="25400" bIns="25400">
-            <a:spAutoFit/>
-          </a:bodyPr>
-          <a:lstStyle/>
-          <a:p>
-            <a:pPr algn="l">
-              <a:lnSpc>
-                <a:spcPct val="100000"/>
-              </a:lnSpc>
-              <a:spcAft>
-                <a:spcPts val="400"/>
-              </a:spcAft>
-            </a:pPr>
-            <a:r>
-              <a:rPr sz="1900" b="1">
-                <a:solidFill>
-                  <a:srgbClr val="1E262E"/>
-                </a:solidFill>
-                <a:latin typeface="微软雅黑"/>
-                <a:ea typeface="微软雅黑"/>
-                <a:cs typeface="微软雅黑"/>
-              </a:rPr>
-              <a:t>标准化专家经验</a:t>
-            </a:r>
-          </a:p>
-        </p:txBody>
-      </p:sp>
-      <p:sp>
-        <p:nvSpPr>
-          <p:cNvPr id="20" name="TextBox 19"/>
-          <p:cNvSpPr txBox="1"/>
-          <p:nvPr/>
-        </p:nvSpPr>
-        <p:spPr>
-          <a:xfrm>
-            <a:off x="4599432" y="4251960"/>
-            <a:ext cx="2990088" cy="640080"/>
-          </a:xfrm>
-          <a:prstGeom prst="rect">
-            <a:avLst/>
-          </a:prstGeom>
-          <a:noFill/>
-        </p:spPr>
-        <p:txBody>
-          <a:bodyPr wrap="square" anchor="t" lIns="25400" rIns="25400" tIns="25400" bIns="25400">
-            <a:spAutoFit/>
-          </a:bodyPr>
-          <a:lstStyle/>
-          <a:p>
-            <a:pPr algn="l">
-              <a:lnSpc>
-                <a:spcPct val="110000"/>
-              </a:lnSpc>
-              <a:spcAft>
-                <a:spcPts val="400"/>
-              </a:spcAft>
-            </a:pPr>
-            <a:r>
-              <a:rPr sz="1250" b="0">
-                <a:solidFill>
-                  <a:srgbClr val="5A6672"/>
-                </a:solidFill>
-                <a:latin typeface="微软雅黑"/>
-                <a:ea typeface="微软雅黑"/>
-                <a:cs typeface="微软雅黑"/>
-              </a:rPr>
-              <a:t>把老师傅的隐性经验,打包成可复用的数据资产</a:t>
-            </a:r>
-          </a:p>
-        </p:txBody>
-      </p:sp>
-      <p:sp>
-        <p:nvSpPr>
-          <p:cNvPr id="21" name="Rounded Rectangle 20"/>
+          <p:cNvPr id="40" name="Rounded Rectangle 39"/>
           <p:cNvSpPr/>
           <p:nvPr/>
         </p:nvSpPr>
         <p:spPr>
           <a:xfrm>
-            <a:off x="7973568" y="3154680"/>
-            <a:ext cx="3392424" cy="1828800"/>
+            <a:off x="3337560" y="5120640"/>
+            <a:ext cx="2286000" cy="713232"/>
           </a:xfrm>
           <a:prstGeom prst="roundRect">
             <a:avLst/>
           </a:prstGeom>
           <a:solidFill>
-            <a:srgbClr val="FFFFFF"/>
+            <a:srgbClr val="D89B2A"/>
           </a:solidFill>
-          <a:ln w="12700">
-            <a:solidFill>
-              <a:srgbClr val="D6DEE6"/>
-            </a:solidFill>
+          <a:ln>
+            <a:noFill/>
           </a:ln>
           <a:effectLst/>
         </p:spPr>
@@ -3978,16 +4961,104 @@
       </p:sp>
       <p:sp>
         <p:nvSpPr>
-          <p:cNvPr id="22" name="Rectangle 21"/>
+          <p:cNvPr id="41" name="TextBox 40"/>
+          <p:cNvSpPr txBox="1"/>
+          <p:nvPr/>
+        </p:nvSpPr>
+        <p:spPr>
+          <a:xfrm>
+            <a:off x="3337560" y="5120640"/>
+            <a:ext cx="2286000" cy="713232"/>
+          </a:xfrm>
+          <a:prstGeom prst="rect">
+            <a:avLst/>
+          </a:prstGeom>
+          <a:noFill/>
+        </p:spPr>
+        <p:txBody>
+          <a:bodyPr wrap="square" anchor="ctr" lIns="25400" rIns="25400" tIns="12700" bIns="12700">
+            <a:spAutoFit/>
+          </a:bodyPr>
+          <a:lstStyle/>
+          <a:p>
+            <a:pPr algn="ctr">
+              <a:lnSpc>
+                <a:spcPct val="100000"/>
+              </a:lnSpc>
+              <a:spcAft>
+                <a:spcPts val="300"/>
+              </a:spcAft>
+            </a:pPr>
+            <a:r>
+              <a:rPr sz="1400" b="1">
+                <a:solidFill>
+                  <a:srgbClr val="0B2A4A"/>
+                </a:solidFill>
+                <a:latin typeface="微软雅黑"/>
+                <a:ea typeface="微软雅黑"/>
+                <a:cs typeface="微软雅黑"/>
+              </a:rPr>
+              <a:t>交付开发自验证</a:t>
+            </a:r>
+          </a:p>
+        </p:txBody>
+      </p:sp>
+      <p:sp>
+        <p:nvSpPr>
+          <p:cNvPr id="42" name="Right Arrow 41"/>
           <p:cNvSpPr/>
           <p:nvPr/>
         </p:nvSpPr>
         <p:spPr>
           <a:xfrm>
-            <a:off x="7973568" y="3154680"/>
-            <a:ext cx="3392424" cy="101600"/>
-          </a:xfrm>
-          <a:prstGeom prst="rect">
+            <a:off x="5678424" y="5340096"/>
+            <a:ext cx="384048" cy="274320"/>
+          </a:xfrm>
+          <a:prstGeom prst="rightArrow">
+            <a:avLst/>
+          </a:prstGeom>
+          <a:solidFill>
+            <a:srgbClr val="D89B2A"/>
+          </a:solidFill>
+          <a:ln>
+            <a:noFill/>
+          </a:ln>
+          <a:effectLst/>
+        </p:spPr>
+        <p:style>
+          <a:lnRef idx="1">
+            <a:schemeClr val="accent1"/>
+          </a:lnRef>
+          <a:fillRef idx="3">
+            <a:schemeClr val="accent1"/>
+          </a:fillRef>
+          <a:effectRef idx="2">
+            <a:schemeClr val="accent1"/>
+          </a:effectRef>
+          <a:fontRef idx="minor">
+            <a:schemeClr val="lt1"/>
+          </a:fontRef>
+        </p:style>
+        <p:txBody>
+          <a:bodyPr rtlCol="0" anchor="ctr"/>
+          <a:lstStyle/>
+          <a:p>
+            <a:pPr algn="ctr"/>
+          </a:p>
+        </p:txBody>
+      </p:sp>
+      <p:sp>
+        <p:nvSpPr>
+          <p:cNvPr id="43" name="Rounded Rectangle 42"/>
+          <p:cNvSpPr/>
+          <p:nvPr/>
+        </p:nvSpPr>
+        <p:spPr>
+          <a:xfrm>
+            <a:off x="6126480" y="5120640"/>
+            <a:ext cx="2286000" cy="713232"/>
+          </a:xfrm>
+          <a:prstGeom prst="roundRect">
             <a:avLst/>
           </a:prstGeom>
           <a:solidFill>
@@ -4022,14 +5093,14 @@
       </p:sp>
       <p:sp>
         <p:nvSpPr>
-          <p:cNvPr id="23" name="TextBox 22"/>
+          <p:cNvPr id="44" name="TextBox 43"/>
           <p:cNvSpPr txBox="1"/>
           <p:nvPr/>
         </p:nvSpPr>
         <p:spPr>
           <a:xfrm>
-            <a:off x="8174736" y="3355848"/>
-            <a:ext cx="2990088" cy="365760"/>
+            <a:off x="6126480" y="5193792"/>
+            <a:ext cx="2286000" cy="365760"/>
           </a:xfrm>
           <a:prstGeom prst="rect">
             <a:avLst/>
@@ -4037,43 +5108,43 @@
           <a:noFill/>
         </p:spPr>
         <p:txBody>
-          <a:bodyPr wrap="square" anchor="t" lIns="25400" rIns="25400" tIns="25400" bIns="25400">
+          <a:bodyPr wrap="square" anchor="ctr" lIns="25400" rIns="25400" tIns="12700" bIns="12700">
             <a:spAutoFit/>
           </a:bodyPr>
           <a:lstStyle/>
           <a:p>
-            <a:pPr algn="l">
+            <a:pPr algn="ctr">
               <a:lnSpc>
                 <a:spcPct val="100000"/>
               </a:lnSpc>
               <a:spcAft>
-                <a:spcPts val="400"/>
+                <a:spcPts val="300"/>
               </a:spcAft>
             </a:pPr>
             <a:r>
               <a:rPr sz="1500" b="1">
                 <a:solidFill>
-                  <a:srgbClr val="0B2A4A"/>
+                  <a:srgbClr val="FFFFFF"/>
                 </a:solidFill>
                 <a:latin typeface="微软雅黑"/>
                 <a:ea typeface="微软雅黑"/>
                 <a:cs typeface="微软雅黑"/>
               </a:rPr>
-              <a:t>SkillHub  技能仓</a:t>
-            </a:r>
-          </a:p>
-        </p:txBody>
-      </p:sp>
-      <p:sp>
-        <p:nvSpPr>
-          <p:cNvPr id="24" name="TextBox 23"/>
+              <a:t>测试前移</a:t>
+            </a:r>
+          </a:p>
+        </p:txBody>
+      </p:sp>
+      <p:sp>
+        <p:nvSpPr>
+          <p:cNvPr id="45" name="TextBox 44"/>
           <p:cNvSpPr txBox="1"/>
           <p:nvPr/>
         </p:nvSpPr>
         <p:spPr>
           <a:xfrm>
-            <a:off x="8174736" y="3813048"/>
-            <a:ext cx="2990088" cy="365760"/>
+            <a:off x="6126480" y="5541264"/>
+            <a:ext cx="2286000" cy="256032"/>
           </a:xfrm>
           <a:prstGeom prst="rect">
             <a:avLst/>
@@ -4081,43 +5152,43 @@
           <a:noFill/>
         </p:spPr>
         <p:txBody>
-          <a:bodyPr wrap="square" anchor="t" lIns="25400" rIns="25400" tIns="25400" bIns="25400">
+          <a:bodyPr wrap="square" anchor="ctr" lIns="25400" rIns="25400" tIns="12700" bIns="12700">
             <a:spAutoFit/>
           </a:bodyPr>
           <a:lstStyle/>
           <a:p>
-            <a:pPr algn="l">
+            <a:pPr algn="ctr">
               <a:lnSpc>
                 <a:spcPct val="100000"/>
               </a:lnSpc>
               <a:spcAft>
-                <a:spcPts val="400"/>
+                <a:spcPts val="300"/>
               </a:spcAft>
             </a:pPr>
             <a:r>
-              <a:rPr sz="1900" b="1">
-                <a:solidFill>
-                  <a:srgbClr val="1E262E"/>
+              <a:rPr sz="1000" b="0">
+                <a:solidFill>
+                  <a:srgbClr val="FFFFFF"/>
                 </a:solidFill>
                 <a:latin typeface="微软雅黑"/>
                 <a:ea typeface="微软雅黑"/>
                 <a:cs typeface="微软雅黑"/>
               </a:rPr>
-              <a:t>资产的银行</a:t>
-            </a:r>
-          </a:p>
-        </p:txBody>
-      </p:sp>
-      <p:sp>
-        <p:nvSpPr>
-          <p:cNvPr id="25" name="TextBox 24"/>
+              <a:t>Shift-Left</a:t>
+            </a:r>
+          </a:p>
+        </p:txBody>
+      </p:sp>
+      <p:sp>
+        <p:nvSpPr>
+          <p:cNvPr id="46" name="TextBox 45"/>
           <p:cNvSpPr txBox="1"/>
           <p:nvPr/>
         </p:nvSpPr>
         <p:spPr>
           <a:xfrm>
-            <a:off x="8174736" y="4251960"/>
-            <a:ext cx="2990088" cy="640080"/>
+            <a:off x="548640" y="5157216"/>
+            <a:ext cx="2651760" cy="658368"/>
           </a:xfrm>
           <a:prstGeom prst="rect">
             <a:avLst/>
@@ -4125,43 +5196,129 @@
           <a:noFill/>
         </p:spPr>
         <p:txBody>
-          <a:bodyPr wrap="square" anchor="t" lIns="25400" rIns="25400" tIns="25400" bIns="25400">
+          <a:bodyPr wrap="square" anchor="t" lIns="25400" rIns="25400" tIns="12700" bIns="12700">
             <a:spAutoFit/>
           </a:bodyPr>
           <a:lstStyle/>
           <a:p>
             <a:pPr algn="l">
               <a:lnSpc>
-                <a:spcPct val="110000"/>
+                <a:spcPct val="115000"/>
               </a:lnSpc>
               <a:spcAft>
-                <a:spcPts val="400"/>
+                <a:spcPts val="300"/>
               </a:spcAft>
             </a:pPr>
             <a:r>
-              <a:rPr sz="1250" b="0">
-                <a:solidFill>
-                  <a:srgbClr val="5A6672"/>
+              <a:rPr sz="1200" b="1">
+                <a:solidFill>
+                  <a:srgbClr val="D89B2A"/>
                 </a:solidFill>
                 <a:latin typeface="微软雅黑"/>
                 <a:ea typeface="微软雅黑"/>
                 <a:cs typeface="微软雅黑"/>
               </a:rPr>
-              <a:t>托管 · 检索 · 复用 · 治理 这些资产</a:t>
-            </a:r>
-          </a:p>
-        </p:txBody>
-      </p:sp>
-      <p:sp>
-        <p:nvSpPr>
-          <p:cNvPr id="26" name="Rectangle 25"/>
+              <a:t>测试前移：</a:t>
+            </a:r>
+          </a:p>
+          <a:p>
+            <a:pPr algn="l">
+              <a:lnSpc>
+                <a:spcPct val="115000"/>
+              </a:lnSpc>
+              <a:spcAft>
+                <a:spcPts val="300"/>
+              </a:spcAft>
+            </a:pPr>
+            <a:r>
+              <a:rPr sz="1100" b="0">
+                <a:solidFill>
+                  <a:srgbClr val="5A6672"/>
+                </a:solidFill>
+                <a:latin typeface="微软雅黑"/>
+                <a:ea typeface="微软雅黑"/>
+                <a:cs typeface="微软雅黑"/>
+              </a:rPr>
+              <a:t>基于自动生成用例，开发提前自验证</a:t>
+            </a:r>
+          </a:p>
+        </p:txBody>
+      </p:sp>
+      <p:sp>
+        <p:nvSpPr>
+          <p:cNvPr id="47" name="TextBox 46"/>
+          <p:cNvSpPr txBox="1"/>
+          <p:nvPr/>
+        </p:nvSpPr>
+        <p:spPr>
+          <a:xfrm>
+            <a:off x="8915400" y="5157216"/>
+            <a:ext cx="2286000" cy="658368"/>
+          </a:xfrm>
+          <a:prstGeom prst="rect">
+            <a:avLst/>
+          </a:prstGeom>
+          <a:noFill/>
+        </p:spPr>
+        <p:txBody>
+          <a:bodyPr wrap="square" anchor="t" lIns="25400" rIns="25400" tIns="12700" bIns="12700">
+            <a:spAutoFit/>
+          </a:bodyPr>
+          <a:lstStyle/>
+          <a:p>
+            <a:pPr algn="l">
+              <a:lnSpc>
+                <a:spcPct val="115000"/>
+              </a:lnSpc>
+              <a:spcAft>
+                <a:spcPts val="300"/>
+              </a:spcAft>
+            </a:pPr>
+            <a:r>
+              <a:rPr sz="1150" b="1">
+                <a:solidFill>
+                  <a:srgbClr val="0B2A4A"/>
+                </a:solidFill>
+                <a:latin typeface="微软雅黑"/>
+                <a:ea typeface="微软雅黑"/>
+                <a:cs typeface="微软雅黑"/>
+              </a:rPr>
+              <a:t>缺陷更早暴露</a:t>
+            </a:r>
+          </a:p>
+          <a:p>
+            <a:pPr algn="l">
+              <a:lnSpc>
+                <a:spcPct val="115000"/>
+              </a:lnSpc>
+              <a:spcAft>
+                <a:spcPts val="300"/>
+              </a:spcAft>
+            </a:pPr>
+            <a:r>
+              <a:rPr sz="1050" b="0">
+                <a:solidFill>
+                  <a:srgbClr val="5A6672"/>
+                </a:solidFill>
+                <a:latin typeface="微软雅黑"/>
+                <a:ea typeface="微软雅黑"/>
+                <a:cs typeface="微软雅黑"/>
+              </a:rPr>
+              <a:t>成本更低、质量更稳</a:t>
+            </a:r>
+          </a:p>
+        </p:txBody>
+      </p:sp>
+      <p:sp>
+        <p:nvSpPr>
+          <p:cNvPr id="48" name="Rectangle 47"/>
           <p:cNvSpPr/>
           <p:nvPr/>
         </p:nvSpPr>
         <p:spPr>
           <a:xfrm>
-            <a:off x="822960" y="5230368"/>
-            <a:ext cx="10543032" cy="1143000"/>
+            <a:off x="0" y="6053328"/>
+            <a:ext cx="12191695" cy="457200"/>
           </a:xfrm>
           <a:prstGeom prst="rect">
             <a:avLst/>
@@ -4198,58 +5355,14 @@
       </p:sp>
       <p:sp>
         <p:nvSpPr>
-          <p:cNvPr id="27" name="Rectangle 26"/>
-          <p:cNvSpPr/>
-          <p:nvPr/>
-        </p:nvSpPr>
-        <p:spPr>
-          <a:xfrm>
-            <a:off x="822960" y="5230368"/>
-            <a:ext cx="101600" cy="1143000"/>
-          </a:xfrm>
-          <a:prstGeom prst="rect">
-            <a:avLst/>
-          </a:prstGeom>
-          <a:solidFill>
-            <a:srgbClr val="D89B2A"/>
-          </a:solidFill>
-          <a:ln>
-            <a:noFill/>
-          </a:ln>
-          <a:effectLst/>
-        </p:spPr>
-        <p:style>
-          <a:lnRef idx="1">
-            <a:schemeClr val="accent1"/>
-          </a:lnRef>
-          <a:fillRef idx="3">
-            <a:schemeClr val="accent1"/>
-          </a:fillRef>
-          <a:effectRef idx="2">
-            <a:schemeClr val="accent1"/>
-          </a:effectRef>
-          <a:fontRef idx="minor">
-            <a:schemeClr val="lt1"/>
-          </a:fontRef>
-        </p:style>
-        <p:txBody>
-          <a:bodyPr rtlCol="0" anchor="ctr"/>
-          <a:lstStyle/>
-          <a:p>
-            <a:pPr algn="ctr"/>
-          </a:p>
-        </p:txBody>
-      </p:sp>
-      <p:sp>
-        <p:nvSpPr>
-          <p:cNvPr id="28" name="TextBox 27"/>
+          <p:cNvPr id="49" name="TextBox 48"/>
           <p:cNvSpPr txBox="1"/>
           <p:nvPr/>
         </p:nvSpPr>
         <p:spPr>
           <a:xfrm>
-            <a:off x="1097280" y="5358384"/>
-            <a:ext cx="10058400" cy="914400"/>
+            <a:off x="548640" y="6053328"/>
+            <a:ext cx="11064240" cy="457200"/>
           </a:xfrm>
           <a:prstGeom prst="rect">
             <a:avLst/>
@@ -4257,61 +5370,62 @@
           <a:noFill/>
         </p:spPr>
         <p:txBody>
-          <a:bodyPr wrap="square" anchor="t" lIns="25400" rIns="25400" tIns="25400" bIns="25400">
+          <a:bodyPr wrap="square" anchor="ctr" lIns="25400" rIns="25400" tIns="12700" bIns="12700">
             <a:spAutoFit/>
           </a:bodyPr>
           <a:lstStyle/>
           <a:p>
-            <a:pPr algn="l">
+            <a:pPr algn="ctr">
               <a:lnSpc>
-                <a:spcPct val="115000"/>
+                <a:spcPct val="100000"/>
               </a:lnSpc>
               <a:spcAft>
-                <a:spcPts val="400"/>
+                <a:spcPts val="300"/>
               </a:spcAft>
             </a:pPr>
             <a:r>
-              <a:rPr sz="1500" b="1">
-                <a:solidFill>
-                  <a:srgbClr val="D89B2A"/>
+              <a:rPr sz="1300" b="1">
+                <a:solidFill>
+                  <a:srgbClr val="FFFFFF"/>
                 </a:solidFill>
                 <a:latin typeface="微软雅黑"/>
                 <a:ea typeface="微软雅黑"/>
                 <a:cs typeface="微软雅黑"/>
               </a:rPr>
-              <a:t>关键洞察:</a:t>
-            </a:r>
-            <a:r>
-              <a:rPr sz="1500" b="0">
-                <a:solidFill>
-                  <a:srgbClr val="FFFFFF"/>
+              <a:t>业务知识沉淀为可复用 </a:t>
+            </a:r>
+            <a:r>
+              <a:rPr sz="1300" b="1">
+                <a:solidFill>
+                  <a:srgbClr val="D89B2A"/>
                 </a:solidFill>
                 <a:latin typeface="微软雅黑"/>
                 <a:ea typeface="微软雅黑"/>
                 <a:cs typeface="微软雅黑"/>
               </a:rPr>
-              <a:t>模型正在快速商品化,谁都买得到;真正拉开差距、且随使用复利增值的,是沉淀下来的技能资产。</a:t>
-            </a:r>
-          </a:p>
-          <a:p>
-            <a:pPr algn="l">
-              <a:lnSpc>
-                <a:spcPct val="115000"/>
-              </a:lnSpc>
-              <a:spcAft>
-                <a:spcPts val="400"/>
-              </a:spcAft>
-            </a:pPr>
-            <a:r>
-              <a:rPr sz="1400" b="0">
-                <a:solidFill>
-                  <a:srgbClr val="CFDDEA"/>
+              <a:t>Skill</a:t>
+            </a:r>
+            <a:r>
+              <a:rPr sz="1300" b="1">
+                <a:solidFill>
+                  <a:srgbClr val="FFFFFF"/>
                 </a:solidFill>
                 <a:latin typeface="微软雅黑"/>
                 <a:ea typeface="微软雅黑"/>
                 <a:cs typeface="微软雅黑"/>
               </a:rPr>
-              <a:t>技能仓,就是把这份资产从“个人脑子里”搬到“集团资产负债表上”的基础设施。</a:t>
+              <a:t>，用例构造与多版本执行全流程自动化，释放重复人力、支撑测试前移，成为可复用、可增值的</a:t>
+            </a:r>
+            <a:r>
+              <a:rPr sz="1300" b="1">
+                <a:solidFill>
+                  <a:srgbClr val="D89B2A"/>
+                </a:solidFill>
+                <a:latin typeface="微软雅黑"/>
+                <a:ea typeface="微软雅黑"/>
+                <a:cs typeface="微软雅黑"/>
+              </a:rPr>
+              <a:t>核心数字资产</a:t>
             </a:r>
           </a:p>
         </p:txBody>
@@ -4387,7 +5501,7 @@
         <p:spPr>
           <a:xfrm>
             <a:off x="0" y="0"/>
-            <a:ext cx="12191695" cy="1417320"/>
+            <a:ext cx="12191695" cy="1024128"/>
           </a:xfrm>
           <a:prstGeom prst="rect">
             <a:avLst/>
@@ -4430,7 +5544,7 @@
         </p:nvSpPr>
         <p:spPr>
           <a:xfrm>
-            <a:off x="0" y="1417320"/>
+            <a:off x="0" y="1024128"/>
             <a:ext cx="12191695" cy="50800"/>
           </a:xfrm>
           <a:prstGeom prst="rect">
@@ -4474,8 +5588,8 @@
         </p:nvSpPr>
         <p:spPr>
           <a:xfrm>
-            <a:off x="548640" y="164592"/>
-            <a:ext cx="10972800" cy="320040"/>
+            <a:off x="548640" y="109728"/>
+            <a:ext cx="10972800" cy="274320"/>
           </a:xfrm>
           <a:prstGeom prst="rect">
             <a:avLst/>
@@ -4483,7 +5597,7 @@
           <a:noFill/>
         </p:spPr>
         <p:txBody>
-          <a:bodyPr wrap="square" anchor="t" lIns="25400" rIns="25400" tIns="25400" bIns="25400">
+          <a:bodyPr wrap="square" anchor="t" lIns="25400" rIns="25400" tIns="12700" bIns="12700">
             <a:spAutoFit/>
           </a:bodyPr>
           <a:lstStyle/>
@@ -4493,11 +5607,11 @@
                 <a:spcPct val="100000"/>
               </a:lnSpc>
               <a:spcAft>
-                <a:spcPts val="400"/>
+                <a:spcPts val="300"/>
               </a:spcAft>
             </a:pPr>
             <a:r>
-              <a:rPr sz="1300" b="1">
+              <a:rPr sz="1250" b="1">
                 <a:solidFill>
                   <a:srgbClr val="D89B2A"/>
                 </a:solidFill>
@@ -4505,7 +5619,7 @@
                 <a:ea typeface="微软雅黑"/>
                 <a:cs typeface="微软雅黑"/>
               </a:rPr>
-              <a:t>威 力 · POWER</a:t>
+              <a:t>② 数字资产与架构 · ARCHITECTURE</a:t>
             </a:r>
           </a:p>
         </p:txBody>
@@ -4518,8 +5632,8 @@
         </p:nvSpPr>
         <p:spPr>
           <a:xfrm>
-            <a:off x="548640" y="420624"/>
-            <a:ext cx="11064240" cy="566928"/>
+            <a:off x="548640" y="384048"/>
+            <a:ext cx="8869680" cy="548640"/>
           </a:xfrm>
           <a:prstGeom prst="rect">
             <a:avLst/>
@@ -4527,7 +5641,7 @@
           <a:noFill/>
         </p:spPr>
         <p:txBody>
-          <a:bodyPr wrap="square" anchor="t" lIns="25400" rIns="25400" tIns="25400" bIns="25400">
+          <a:bodyPr wrap="square" anchor="t" lIns="25400" rIns="25400" tIns="12700" bIns="12700">
             <a:spAutoFit/>
           </a:bodyPr>
           <a:lstStyle/>
@@ -4537,11 +5651,11 @@
                 <a:spcPct val="100000"/>
               </a:lnSpc>
               <a:spcAft>
-                <a:spcPts val="400"/>
+                <a:spcPts val="300"/>
               </a:spcAft>
             </a:pPr>
             <a:r>
-              <a:rPr sz="3000" b="1">
+              <a:rPr sz="2300" b="1">
                 <a:solidFill>
                   <a:srgbClr val="FFFFFF"/>
                 </a:solidFill>
@@ -4549,7 +5663,7 @@
                 <a:ea typeface="微软雅黑"/>
                 <a:cs typeface="微软雅黑"/>
               </a:rPr>
-              <a:t>越用越强的能力飞轮</a:t>
+              <a:t>Skill 是数字资产核心,SkillHub 是管理中枢</a:t>
             </a:r>
           </a:p>
         </p:txBody>
@@ -4562,8 +5676,8 @@
         </p:nvSpPr>
         <p:spPr>
           <a:xfrm>
-            <a:off x="548640" y="1024128"/>
-            <a:ext cx="11064240" cy="365760"/>
+            <a:off x="9098280" y="310896"/>
+            <a:ext cx="2880360" cy="640080"/>
           </a:xfrm>
           <a:prstGeom prst="rect">
             <a:avLst/>
@@ -4571,7 +5685,72 @@
           <a:noFill/>
         </p:spPr>
         <p:txBody>
-          <a:bodyPr wrap="square" anchor="t" lIns="25400" rIns="25400" tIns="25400" bIns="25400">
+          <a:bodyPr wrap="square" anchor="t" lIns="25400" rIns="25400" tIns="12700" bIns="12700">
+            <a:spAutoFit/>
+          </a:bodyPr>
+          <a:lstStyle/>
+          <a:p>
+            <a:pPr algn="r">
+              <a:lnSpc>
+                <a:spcPct val="105000"/>
+              </a:lnSpc>
+              <a:spcAft>
+                <a:spcPts val="300"/>
+              </a:spcAft>
+            </a:pPr>
+            <a:r>
+              <a:rPr sz="1300" b="1">
+                <a:solidFill>
+                  <a:srgbClr val="FFFFFF"/>
+                </a:solidFill>
+                <a:latin typeface="微软雅黑"/>
+                <a:ea typeface="微软雅黑"/>
+                <a:cs typeface="微软雅黑"/>
+              </a:rPr>
+              <a:t>重点</a:t>
+            </a:r>
+          </a:p>
+          <a:p>
+            <a:pPr algn="r">
+              <a:lnSpc>
+                <a:spcPct val="105000"/>
+              </a:lnSpc>
+              <a:spcAft>
+                <a:spcPts val="300"/>
+              </a:spcAft>
+            </a:pPr>
+            <a:r>
+              <a:rPr sz="1300" b="1">
+                <a:solidFill>
+                  <a:srgbClr val="D89B2A"/>
+                </a:solidFill>
+                <a:latin typeface="微软雅黑"/>
+                <a:ea typeface="微软雅黑"/>
+                <a:cs typeface="微软雅黑"/>
+              </a:rPr>
+              <a:t>SkillHub</a:t>
+            </a:r>
+          </a:p>
+        </p:txBody>
+      </p:sp>
+      <p:sp>
+        <p:nvSpPr>
+          <p:cNvPr id="8" name="TextBox 7"/>
+          <p:cNvSpPr txBox="1"/>
+          <p:nvPr/>
+        </p:nvSpPr>
+        <p:spPr>
+          <a:xfrm>
+            <a:off x="548640" y="1152144"/>
+            <a:ext cx="11338560" cy="310896"/>
+          </a:xfrm>
+          <a:prstGeom prst="rect">
+            <a:avLst/>
+          </a:prstGeom>
+          <a:noFill/>
+        </p:spPr>
+        <p:txBody>
+          <a:bodyPr wrap="square" anchor="t" lIns="25400" rIns="25400" tIns="12700" bIns="12700">
             <a:spAutoFit/>
           </a:bodyPr>
           <a:lstStyle/>
@@ -4581,55 +5760,22 @@
                 <a:spcPct val="100000"/>
               </a:lnSpc>
               <a:spcAft>
-                <a:spcPts val="400"/>
+                <a:spcPts val="300"/>
               </a:spcAft>
             </a:pPr>
             <a:r>
-              <a:rPr sz="1400" b="0">
-                <a:solidFill>
-                  <a:srgbClr val="CFDDEA"/>
+              <a:rPr sz="1250" b="0">
+                <a:solidFill>
+                  <a:srgbClr val="5A6672"/>
                 </a:solidFill>
                 <a:latin typeface="微软雅黑"/>
                 <a:ea typeface="微软雅黑"/>
                 <a:cs typeface="微软雅黑"/>
               </a:rPr>
-              <a:t>原子技能像乐高,组合出无限业务场景</a:t>
-            </a:r>
-          </a:p>
-        </p:txBody>
-      </p:sp>
-      <p:sp>
-        <p:nvSpPr>
-          <p:cNvPr id="8" name="TextBox 7"/>
-          <p:cNvSpPr txBox="1"/>
-          <p:nvPr/>
-        </p:nvSpPr>
-        <p:spPr>
-          <a:xfrm>
-            <a:off x="640080" y="1691640"/>
-            <a:ext cx="4846320" cy="365760"/>
-          </a:xfrm>
-          <a:prstGeom prst="rect">
-            <a:avLst/>
-          </a:prstGeom>
-          <a:noFill/>
-        </p:spPr>
-        <p:txBody>
-          <a:bodyPr wrap="square" anchor="t" lIns="25400" rIns="25400" tIns="25400" bIns="25400">
-            <a:spAutoFit/>
-          </a:bodyPr>
-          <a:lstStyle/>
-          <a:p>
-            <a:pPr algn="l">
-              <a:lnSpc>
-                <a:spcPct val="100000"/>
-              </a:lnSpc>
-              <a:spcAft>
-                <a:spcPts val="400"/>
-              </a:spcAft>
-            </a:pPr>
-            <a:r>
-              <a:rPr sz="1500" b="1">
+              <a:t>实践证明 Skill 的价值 → </a:t>
+            </a:r>
+            <a:r>
+              <a:rPr sz="1250" b="1">
                 <a:solidFill>
                   <a:srgbClr val="0B2A4A"/>
                 </a:solidFill>
@@ -4637,23 +5783,34 @@
                 <a:ea typeface="微软雅黑"/>
                 <a:cs typeface="微软雅黑"/>
               </a:rPr>
-              <a:t>复利飞轮:用的人越多 → 资产越厚 → 能力越强</a:t>
-            </a:r>
-          </a:p>
-        </p:txBody>
-      </p:sp>
-      <p:sp>
-        <p:nvSpPr>
-          <p:cNvPr id="9" name="Pentagon 8"/>
+              <a:t>作为公司数字资产核心，如何最大化利用、管理、维护？</a:t>
+            </a:r>
+            <a:r>
+              <a:rPr sz="1250" b="0">
+                <a:solidFill>
+                  <a:srgbClr val="5A6672"/>
+                </a:solidFill>
+                <a:latin typeface="微软雅黑"/>
+                <a:ea typeface="微软雅黑"/>
+                <a:cs typeface="微软雅黑"/>
+              </a:rPr>
+              <a:t>  这正是 Harness ⇄ SkillHub ⇄ Skill 架构要回答的。</a:t>
+            </a:r>
+          </a:p>
+        </p:txBody>
+      </p:sp>
+      <p:sp>
+        <p:nvSpPr>
+          <p:cNvPr id="9" name="Rounded Rectangle 8"/>
           <p:cNvSpPr/>
           <p:nvPr/>
         </p:nvSpPr>
         <p:spPr>
           <a:xfrm>
-            <a:off x="822960" y="2148840"/>
-            <a:ext cx="4297680" cy="566928"/>
-          </a:xfrm>
-          <a:prstGeom prst="homePlate">
+            <a:off x="914400" y="1499616"/>
+            <a:ext cx="10360152" cy="530352"/>
+          </a:xfrm>
+          <a:prstGeom prst="roundRect">
             <a:avLst/>
           </a:prstGeom>
           <a:solidFill>
@@ -4694,8 +5851,8 @@
         </p:nvSpPr>
         <p:spPr>
           <a:xfrm>
-            <a:off x="822960" y="2148840"/>
-            <a:ext cx="3931920" cy="566928"/>
+            <a:off x="914400" y="1499616"/>
+            <a:ext cx="10360152" cy="530352"/>
           </a:xfrm>
           <a:prstGeom prst="rect">
             <a:avLst/>
@@ -4703,7 +5860,106 @@
           <a:noFill/>
         </p:spPr>
         <p:txBody>
-          <a:bodyPr wrap="square" anchor="ctr" lIns="25400" rIns="25400" tIns="25400" bIns="25400">
+          <a:bodyPr wrap="square" anchor="ctr" lIns="25400" rIns="25400" tIns="12700" bIns="12700">
+            <a:spAutoFit/>
+          </a:bodyPr>
+          <a:lstStyle/>
+          <a:p>
+            <a:pPr algn="ctr">
+              <a:lnSpc>
+                <a:spcPct val="100000"/>
+              </a:lnSpc>
+              <a:spcAft>
+                <a:spcPts val="300"/>
+              </a:spcAft>
+            </a:pPr>
+            <a:r>
+              <a:rPr sz="1500" b="1">
+                <a:solidFill>
+                  <a:srgbClr val="FFFFFF"/>
+                </a:solidFill>
+                <a:latin typeface="微软雅黑"/>
+                <a:ea typeface="微软雅黑"/>
+                <a:cs typeface="微软雅黑"/>
+              </a:rPr>
+              <a:t>Harness · 运行时　</a:t>
+            </a:r>
+            <a:r>
+              <a:rPr sz="1150" b="0">
+                <a:solidFill>
+                  <a:srgbClr val="FFFFFF"/>
+                </a:solidFill>
+                <a:latin typeface="微软雅黑"/>
+                <a:ea typeface="微软雅黑"/>
+                <a:cs typeface="微软雅黑"/>
+              </a:rPr>
+              <a:t>任务编排 · 工具调用 · 技能装配 · 权限管控</a:t>
+            </a:r>
+          </a:p>
+        </p:txBody>
+      </p:sp>
+      <p:sp>
+        <p:nvSpPr>
+          <p:cNvPr id="11" name="Up Arrow 10"/>
+          <p:cNvSpPr/>
+          <p:nvPr/>
+        </p:nvSpPr>
+        <p:spPr>
+          <a:xfrm>
+            <a:off x="2468880" y="2066543"/>
+            <a:ext cx="292608" cy="274320"/>
+          </a:xfrm>
+          <a:prstGeom prst="upArrow">
+            <a:avLst/>
+          </a:prstGeom>
+          <a:solidFill>
+            <a:srgbClr val="108A8A"/>
+          </a:solidFill>
+          <a:ln>
+            <a:noFill/>
+          </a:ln>
+          <a:effectLst/>
+        </p:spPr>
+        <p:style>
+          <a:lnRef idx="1">
+            <a:schemeClr val="accent1"/>
+          </a:lnRef>
+          <a:fillRef idx="3">
+            <a:schemeClr val="accent1"/>
+          </a:fillRef>
+          <a:effectRef idx="2">
+            <a:schemeClr val="accent1"/>
+          </a:effectRef>
+          <a:fontRef idx="minor">
+            <a:schemeClr val="lt1"/>
+          </a:fontRef>
+        </p:style>
+        <p:txBody>
+          <a:bodyPr rtlCol="0" anchor="ctr"/>
+          <a:lstStyle/>
+          <a:p>
+            <a:pPr algn="ctr"/>
+          </a:p>
+        </p:txBody>
+      </p:sp>
+      <p:sp>
+        <p:nvSpPr>
+          <p:cNvPr id="12" name="TextBox 11"/>
+          <p:cNvSpPr txBox="1"/>
+          <p:nvPr/>
+        </p:nvSpPr>
+        <p:spPr>
+          <a:xfrm>
+            <a:off x="2880360" y="2075688"/>
+            <a:ext cx="3840480" cy="256032"/>
+          </a:xfrm>
+          <a:prstGeom prst="rect">
+            <a:avLst/>
+          </a:prstGeom>
+          <a:noFill/>
+        </p:spPr>
+        <p:txBody>
+          <a:bodyPr wrap="square" anchor="ctr" lIns="25400" rIns="25400" tIns="12700" bIns="12700">
             <a:spAutoFit/>
           </a:bodyPr>
           <a:lstStyle/>
@@ -4713,35 +5969,687 @@
                 <a:spcPct val="100000"/>
               </a:lnSpc>
               <a:spcAft>
-                <a:spcPts val="400"/>
+                <a:spcPts val="300"/>
               </a:spcAft>
             </a:pPr>
             <a:r>
-              <a:rPr sz="1350" b="1">
-                <a:solidFill>
-                  <a:srgbClr val="FFFFFF"/>
+              <a:rPr sz="1100" b="1">
+                <a:solidFill>
+                  <a:srgbClr val="108A8A"/>
                 </a:solidFill>
                 <a:latin typeface="微软雅黑"/>
                 <a:ea typeface="微软雅黑"/>
                 <a:cs typeface="微软雅黑"/>
               </a:rPr>
-              <a:t>个人沉淀一个 Skill</a:t>
-            </a:r>
-          </a:p>
-        </p:txBody>
-      </p:sp>
-      <p:sp>
-        <p:nvSpPr>
-          <p:cNvPr id="11" name="Pentagon 10"/>
+              <a:t>按需加载 · 交付技能</a:t>
+            </a:r>
+          </a:p>
+        </p:txBody>
+      </p:sp>
+      <p:sp>
+        <p:nvSpPr>
+          <p:cNvPr id="13" name="Down Arrow 12"/>
           <p:cNvSpPr/>
           <p:nvPr/>
         </p:nvSpPr>
         <p:spPr>
           <a:xfrm>
-            <a:off x="822960" y="2862072"/>
-            <a:ext cx="4297680" cy="566928"/>
-          </a:xfrm>
-          <a:prstGeom prst="homePlate">
+            <a:off x="8686800" y="2066543"/>
+            <a:ext cx="292608" cy="274320"/>
+          </a:xfrm>
+          <a:prstGeom prst="downArrow">
+            <a:avLst/>
+          </a:prstGeom>
+          <a:solidFill>
+            <a:srgbClr val="5A6672"/>
+          </a:solidFill>
+          <a:ln>
+            <a:noFill/>
+          </a:ln>
+          <a:effectLst/>
+        </p:spPr>
+        <p:style>
+          <a:lnRef idx="1">
+            <a:schemeClr val="accent1"/>
+          </a:lnRef>
+          <a:fillRef idx="3">
+            <a:schemeClr val="accent1"/>
+          </a:fillRef>
+          <a:effectRef idx="2">
+            <a:schemeClr val="accent1"/>
+          </a:effectRef>
+          <a:fontRef idx="minor">
+            <a:schemeClr val="lt1"/>
+          </a:fontRef>
+        </p:style>
+        <p:txBody>
+          <a:bodyPr rtlCol="0" anchor="ctr"/>
+          <a:lstStyle/>
+          <a:p>
+            <a:pPr algn="ctr"/>
+          </a:p>
+        </p:txBody>
+      </p:sp>
+      <p:sp>
+        <p:nvSpPr>
+          <p:cNvPr id="14" name="TextBox 13"/>
+          <p:cNvSpPr txBox="1"/>
+          <p:nvPr/>
+        </p:nvSpPr>
+        <p:spPr>
+          <a:xfrm>
+            <a:off x="6309360" y="2075688"/>
+            <a:ext cx="2194560" cy="256032"/>
+          </a:xfrm>
+          <a:prstGeom prst="rect">
+            <a:avLst/>
+          </a:prstGeom>
+          <a:noFill/>
+        </p:spPr>
+        <p:txBody>
+          <a:bodyPr wrap="square" anchor="ctr" lIns="25400" rIns="25400" tIns="12700" bIns="12700">
+            <a:spAutoFit/>
+          </a:bodyPr>
+          <a:lstStyle/>
+          <a:p>
+            <a:pPr algn="r">
+              <a:lnSpc>
+                <a:spcPct val="100000"/>
+              </a:lnSpc>
+              <a:spcAft>
+                <a:spcPts val="300"/>
+              </a:spcAft>
+            </a:pPr>
+            <a:r>
+              <a:rPr sz="1100" b="1">
+                <a:solidFill>
+                  <a:srgbClr val="5A6672"/>
+                </a:solidFill>
+                <a:latin typeface="微软雅黑"/>
+                <a:ea typeface="微软雅黑"/>
+                <a:cs typeface="微软雅黑"/>
+              </a:rPr>
+              <a:t>调用遥测回流</a:t>
+            </a:r>
+          </a:p>
+        </p:txBody>
+      </p:sp>
+      <p:sp>
+        <p:nvSpPr>
+          <p:cNvPr id="15" name="Rounded Rectangle 14"/>
+          <p:cNvSpPr/>
+          <p:nvPr/>
+        </p:nvSpPr>
+        <p:spPr>
+          <a:xfrm>
+            <a:off x="914400" y="2377440"/>
+            <a:ext cx="10360152" cy="932688"/>
+          </a:xfrm>
+          <a:prstGeom prst="roundRect">
+            <a:avLst/>
+          </a:prstGeom>
+          <a:solidFill>
+            <a:srgbClr val="0B2A4A"/>
+          </a:solidFill>
+          <a:ln w="28575">
+            <a:solidFill>
+              <a:srgbClr val="D89B2A"/>
+            </a:solidFill>
+          </a:ln>
+          <a:effectLst/>
+        </p:spPr>
+        <p:style>
+          <a:lnRef idx="1">
+            <a:schemeClr val="accent1"/>
+          </a:lnRef>
+          <a:fillRef idx="3">
+            <a:schemeClr val="accent1"/>
+          </a:fillRef>
+          <a:effectRef idx="2">
+            <a:schemeClr val="accent1"/>
+          </a:effectRef>
+          <a:fontRef idx="minor">
+            <a:schemeClr val="lt1"/>
+          </a:fontRef>
+        </p:style>
+        <p:txBody>
+          <a:bodyPr rtlCol="0" anchor="ctr"/>
+          <a:lstStyle/>
+          <a:p>
+            <a:pPr algn="ctr"/>
+          </a:p>
+        </p:txBody>
+      </p:sp>
+      <p:sp>
+        <p:nvSpPr>
+          <p:cNvPr id="16" name="TextBox 15"/>
+          <p:cNvSpPr txBox="1"/>
+          <p:nvPr/>
+        </p:nvSpPr>
+        <p:spPr>
+          <a:xfrm>
+            <a:off x="1188720" y="2432304"/>
+            <a:ext cx="9811512" cy="310896"/>
+          </a:xfrm>
+          <a:prstGeom prst="rect">
+            <a:avLst/>
+          </a:prstGeom>
+          <a:noFill/>
+        </p:spPr>
+        <p:txBody>
+          <a:bodyPr wrap="square" anchor="ctr" lIns="25400" rIns="25400" tIns="12700" bIns="12700">
+            <a:spAutoFit/>
+          </a:bodyPr>
+          <a:lstStyle/>
+          <a:p>
+            <a:pPr algn="l">
+              <a:lnSpc>
+                <a:spcPct val="100000"/>
+              </a:lnSpc>
+              <a:spcAft>
+                <a:spcPts val="300"/>
+              </a:spcAft>
+            </a:pPr>
+            <a:r>
+              <a:rPr sz="1500" b="1">
+                <a:solidFill>
+                  <a:srgbClr val="FFFFFF"/>
+                </a:solidFill>
+                <a:latin typeface="微软雅黑"/>
+                <a:ea typeface="微软雅黑"/>
+                <a:cs typeface="微软雅黑"/>
+              </a:rPr>
+              <a:t>SkillHub · 技能仓 · 治理中枢</a:t>
+            </a:r>
+            <a:r>
+              <a:rPr sz="1050" b="0">
+                <a:solidFill>
+                  <a:srgbClr val="CFDDEA"/>
+                </a:solidFill>
+                <a:latin typeface="微软雅黑"/>
+                <a:ea typeface="微软雅黑"/>
+                <a:cs typeface="微软雅黑"/>
+              </a:rPr>
+              <a:t>　注册 · 版本 · 检索 · 分发 · 治理 · 审计</a:t>
+            </a:r>
+          </a:p>
+        </p:txBody>
+      </p:sp>
+      <p:sp>
+        <p:nvSpPr>
+          <p:cNvPr id="17" name="Rounded Rectangle 16"/>
+          <p:cNvSpPr/>
+          <p:nvPr/>
+        </p:nvSpPr>
+        <p:spPr>
+          <a:xfrm>
+            <a:off x="1188720" y="2816352"/>
+            <a:ext cx="1783080" cy="402336"/>
+          </a:xfrm>
+          <a:prstGeom prst="roundRect">
+            <a:avLst/>
+          </a:prstGeom>
+          <a:solidFill>
+            <a:srgbClr val="D89B2A"/>
+          </a:solidFill>
+          <a:ln>
+            <a:noFill/>
+          </a:ln>
+          <a:effectLst/>
+        </p:spPr>
+        <p:style>
+          <a:lnRef idx="1">
+            <a:schemeClr val="accent1"/>
+          </a:lnRef>
+          <a:fillRef idx="3">
+            <a:schemeClr val="accent1"/>
+          </a:fillRef>
+          <a:effectRef idx="2">
+            <a:schemeClr val="accent1"/>
+          </a:effectRef>
+          <a:fontRef idx="minor">
+            <a:schemeClr val="lt1"/>
+          </a:fontRef>
+        </p:style>
+        <p:txBody>
+          <a:bodyPr rtlCol="0" anchor="ctr"/>
+          <a:lstStyle/>
+          <a:p>
+            <a:pPr algn="ctr"/>
+          </a:p>
+        </p:txBody>
+      </p:sp>
+      <p:sp>
+        <p:nvSpPr>
+          <p:cNvPr id="18" name="TextBox 17"/>
+          <p:cNvSpPr txBox="1"/>
+          <p:nvPr/>
+        </p:nvSpPr>
+        <p:spPr>
+          <a:xfrm>
+            <a:off x="1188720" y="2816352"/>
+            <a:ext cx="1783080" cy="402336"/>
+          </a:xfrm>
+          <a:prstGeom prst="rect">
+            <a:avLst/>
+          </a:prstGeom>
+          <a:noFill/>
+        </p:spPr>
+        <p:txBody>
+          <a:bodyPr wrap="square" anchor="ctr" lIns="25400" rIns="25400" tIns="12700" bIns="12700">
+            <a:spAutoFit/>
+          </a:bodyPr>
+          <a:lstStyle/>
+          <a:p>
+            <a:pPr algn="ctr">
+              <a:lnSpc>
+                <a:spcPct val="100000"/>
+              </a:lnSpc>
+              <a:spcAft>
+                <a:spcPts val="300"/>
+              </a:spcAft>
+            </a:pPr>
+            <a:r>
+              <a:rPr sz="1100" b="1">
+                <a:solidFill>
+                  <a:srgbClr val="0B2A4A"/>
+                </a:solidFill>
+                <a:latin typeface="微软雅黑"/>
+                <a:ea typeface="微软雅黑"/>
+                <a:cs typeface="微软雅黑"/>
+              </a:rPr>
+              <a:t>Skill · 原子</a:t>
+            </a:r>
+          </a:p>
+        </p:txBody>
+      </p:sp>
+      <p:sp>
+        <p:nvSpPr>
+          <p:cNvPr id="19" name="Rounded Rectangle 18"/>
+          <p:cNvSpPr/>
+          <p:nvPr/>
+        </p:nvSpPr>
+        <p:spPr>
+          <a:xfrm>
+            <a:off x="3099815" y="2816352"/>
+            <a:ext cx="1783080" cy="402336"/>
+          </a:xfrm>
+          <a:prstGeom prst="roundRect">
+            <a:avLst/>
+          </a:prstGeom>
+          <a:solidFill>
+            <a:srgbClr val="D89B2A"/>
+          </a:solidFill>
+          <a:ln>
+            <a:noFill/>
+          </a:ln>
+          <a:effectLst/>
+        </p:spPr>
+        <p:style>
+          <a:lnRef idx="1">
+            <a:schemeClr val="accent1"/>
+          </a:lnRef>
+          <a:fillRef idx="3">
+            <a:schemeClr val="accent1"/>
+          </a:fillRef>
+          <a:effectRef idx="2">
+            <a:schemeClr val="accent1"/>
+          </a:effectRef>
+          <a:fontRef idx="minor">
+            <a:schemeClr val="lt1"/>
+          </a:fontRef>
+        </p:style>
+        <p:txBody>
+          <a:bodyPr rtlCol="0" anchor="ctr"/>
+          <a:lstStyle/>
+          <a:p>
+            <a:pPr algn="ctr"/>
+          </a:p>
+        </p:txBody>
+      </p:sp>
+      <p:sp>
+        <p:nvSpPr>
+          <p:cNvPr id="20" name="TextBox 19"/>
+          <p:cNvSpPr txBox="1"/>
+          <p:nvPr/>
+        </p:nvSpPr>
+        <p:spPr>
+          <a:xfrm>
+            <a:off x="3099815" y="2816352"/>
+            <a:ext cx="1783080" cy="402336"/>
+          </a:xfrm>
+          <a:prstGeom prst="rect">
+            <a:avLst/>
+          </a:prstGeom>
+          <a:noFill/>
+        </p:spPr>
+        <p:txBody>
+          <a:bodyPr wrap="square" anchor="ctr" lIns="25400" rIns="25400" tIns="12700" bIns="12700">
+            <a:spAutoFit/>
+          </a:bodyPr>
+          <a:lstStyle/>
+          <a:p>
+            <a:pPr algn="ctr">
+              <a:lnSpc>
+                <a:spcPct val="100000"/>
+              </a:lnSpc>
+              <a:spcAft>
+                <a:spcPts val="300"/>
+              </a:spcAft>
+            </a:pPr>
+            <a:r>
+              <a:rPr sz="1100" b="1">
+                <a:solidFill>
+                  <a:srgbClr val="0B2A4A"/>
+                </a:solidFill>
+                <a:latin typeface="微软雅黑"/>
+                <a:ea typeface="微软雅黑"/>
+                <a:cs typeface="微软雅黑"/>
+              </a:rPr>
+              <a:t>Skill · 原子</a:t>
+            </a:r>
+          </a:p>
+        </p:txBody>
+      </p:sp>
+      <p:sp>
+        <p:nvSpPr>
+          <p:cNvPr id="21" name="Rounded Rectangle 20"/>
+          <p:cNvSpPr/>
+          <p:nvPr/>
+        </p:nvSpPr>
+        <p:spPr>
+          <a:xfrm>
+            <a:off x="5010910" y="2816352"/>
+            <a:ext cx="1783080" cy="402336"/>
+          </a:xfrm>
+          <a:prstGeom prst="roundRect">
+            <a:avLst/>
+          </a:prstGeom>
+          <a:solidFill>
+            <a:srgbClr val="D89B2A"/>
+          </a:solidFill>
+          <a:ln>
+            <a:noFill/>
+          </a:ln>
+          <a:effectLst/>
+        </p:spPr>
+        <p:style>
+          <a:lnRef idx="1">
+            <a:schemeClr val="accent1"/>
+          </a:lnRef>
+          <a:fillRef idx="3">
+            <a:schemeClr val="accent1"/>
+          </a:fillRef>
+          <a:effectRef idx="2">
+            <a:schemeClr val="accent1"/>
+          </a:effectRef>
+          <a:fontRef idx="minor">
+            <a:schemeClr val="lt1"/>
+          </a:fontRef>
+        </p:style>
+        <p:txBody>
+          <a:bodyPr rtlCol="0" anchor="ctr"/>
+          <a:lstStyle/>
+          <a:p>
+            <a:pPr algn="ctr"/>
+          </a:p>
+        </p:txBody>
+      </p:sp>
+      <p:sp>
+        <p:nvSpPr>
+          <p:cNvPr id="22" name="TextBox 21"/>
+          <p:cNvSpPr txBox="1"/>
+          <p:nvPr/>
+        </p:nvSpPr>
+        <p:spPr>
+          <a:xfrm>
+            <a:off x="5010910" y="2816352"/>
+            <a:ext cx="1783080" cy="402336"/>
+          </a:xfrm>
+          <a:prstGeom prst="rect">
+            <a:avLst/>
+          </a:prstGeom>
+          <a:noFill/>
+        </p:spPr>
+        <p:txBody>
+          <a:bodyPr wrap="square" anchor="ctr" lIns="25400" rIns="25400" tIns="12700" bIns="12700">
+            <a:spAutoFit/>
+          </a:bodyPr>
+          <a:lstStyle/>
+          <a:p>
+            <a:pPr algn="ctr">
+              <a:lnSpc>
+                <a:spcPct val="100000"/>
+              </a:lnSpc>
+              <a:spcAft>
+                <a:spcPts val="300"/>
+              </a:spcAft>
+            </a:pPr>
+            <a:r>
+              <a:rPr sz="1100" b="1">
+                <a:solidFill>
+                  <a:srgbClr val="0B2A4A"/>
+                </a:solidFill>
+                <a:latin typeface="微软雅黑"/>
+                <a:ea typeface="微软雅黑"/>
+                <a:cs typeface="微软雅黑"/>
+              </a:rPr>
+              <a:t>Skill · 合成</a:t>
+            </a:r>
+          </a:p>
+        </p:txBody>
+      </p:sp>
+      <p:sp>
+        <p:nvSpPr>
+          <p:cNvPr id="23" name="Rounded Rectangle 22"/>
+          <p:cNvSpPr/>
+          <p:nvPr/>
+        </p:nvSpPr>
+        <p:spPr>
+          <a:xfrm>
+            <a:off x="6922005" y="2816352"/>
+            <a:ext cx="1783080" cy="402336"/>
+          </a:xfrm>
+          <a:prstGeom prst="roundRect">
+            <a:avLst/>
+          </a:prstGeom>
+          <a:solidFill>
+            <a:srgbClr val="D89B2A"/>
+          </a:solidFill>
+          <a:ln>
+            <a:noFill/>
+          </a:ln>
+          <a:effectLst/>
+        </p:spPr>
+        <p:style>
+          <a:lnRef idx="1">
+            <a:schemeClr val="accent1"/>
+          </a:lnRef>
+          <a:fillRef idx="3">
+            <a:schemeClr val="accent1"/>
+          </a:fillRef>
+          <a:effectRef idx="2">
+            <a:schemeClr val="accent1"/>
+          </a:effectRef>
+          <a:fontRef idx="minor">
+            <a:schemeClr val="lt1"/>
+          </a:fontRef>
+        </p:style>
+        <p:txBody>
+          <a:bodyPr rtlCol="0" anchor="ctr"/>
+          <a:lstStyle/>
+          <a:p>
+            <a:pPr algn="ctr"/>
+          </a:p>
+        </p:txBody>
+      </p:sp>
+      <p:sp>
+        <p:nvSpPr>
+          <p:cNvPr id="24" name="TextBox 23"/>
+          <p:cNvSpPr txBox="1"/>
+          <p:nvPr/>
+        </p:nvSpPr>
+        <p:spPr>
+          <a:xfrm>
+            <a:off x="6922005" y="2816352"/>
+            <a:ext cx="1783080" cy="402336"/>
+          </a:xfrm>
+          <a:prstGeom prst="rect">
+            <a:avLst/>
+          </a:prstGeom>
+          <a:noFill/>
+        </p:spPr>
+        <p:txBody>
+          <a:bodyPr wrap="square" anchor="ctr" lIns="25400" rIns="25400" tIns="12700" bIns="12700">
+            <a:spAutoFit/>
+          </a:bodyPr>
+          <a:lstStyle/>
+          <a:p>
+            <a:pPr algn="ctr">
+              <a:lnSpc>
+                <a:spcPct val="100000"/>
+              </a:lnSpc>
+              <a:spcAft>
+                <a:spcPts val="300"/>
+              </a:spcAft>
+            </a:pPr>
+            <a:r>
+              <a:rPr sz="1100" b="1">
+                <a:solidFill>
+                  <a:srgbClr val="0B2A4A"/>
+                </a:solidFill>
+                <a:latin typeface="微软雅黑"/>
+                <a:ea typeface="微软雅黑"/>
+                <a:cs typeface="微软雅黑"/>
+              </a:rPr>
+              <a:t>…</a:t>
+            </a:r>
+          </a:p>
+        </p:txBody>
+      </p:sp>
+      <p:sp>
+        <p:nvSpPr>
+          <p:cNvPr id="25" name="TextBox 24"/>
+          <p:cNvSpPr txBox="1"/>
+          <p:nvPr/>
+        </p:nvSpPr>
+        <p:spPr>
+          <a:xfrm>
+            <a:off x="9098279" y="2788920"/>
+            <a:ext cx="1920240" cy="457200"/>
+          </a:xfrm>
+          <a:prstGeom prst="rect">
+            <a:avLst/>
+          </a:prstGeom>
+          <a:noFill/>
+        </p:spPr>
+        <p:txBody>
+          <a:bodyPr wrap="square" anchor="ctr" lIns="25400" rIns="25400" tIns="12700" bIns="12700">
+            <a:spAutoFit/>
+          </a:bodyPr>
+          <a:lstStyle/>
+          <a:p>
+            <a:pPr algn="l">
+              <a:lnSpc>
+                <a:spcPct val="100000"/>
+              </a:lnSpc>
+              <a:spcAft>
+                <a:spcPts val="300"/>
+              </a:spcAft>
+            </a:pPr>
+            <a:r>
+              <a:rPr sz="1100" b="1">
+                <a:solidFill>
+                  <a:srgbClr val="D89B2A"/>
+                </a:solidFill>
+                <a:latin typeface="微软雅黑"/>
+                <a:ea typeface="微软雅黑"/>
+                <a:cs typeface="微软雅黑"/>
+              </a:rPr>
+              <a:t>技能资产池</a:t>
+            </a:r>
+          </a:p>
+          <a:p>
+            <a:pPr algn="l">
+              <a:lnSpc>
+                <a:spcPct val="100000"/>
+              </a:lnSpc>
+              <a:spcAft>
+                <a:spcPts val="300"/>
+              </a:spcAft>
+            </a:pPr>
+            <a:r>
+              <a:rPr sz="950" b="0">
+                <a:solidFill>
+                  <a:srgbClr val="CFDDEA"/>
+                </a:solidFill>
+                <a:latin typeface="微软雅黑"/>
+                <a:ea typeface="微软雅黑"/>
+                <a:cs typeface="微软雅黑"/>
+              </a:rPr>
+              <a:t>原子 / 合成技能</a:t>
+            </a:r>
+          </a:p>
+        </p:txBody>
+      </p:sp>
+      <p:sp>
+        <p:nvSpPr>
+          <p:cNvPr id="26" name="Rounded Rectangle 25"/>
+          <p:cNvSpPr/>
+          <p:nvPr/>
+        </p:nvSpPr>
+        <p:spPr>
+          <a:xfrm>
+            <a:off x="548640" y="3401568"/>
+            <a:ext cx="5285232" cy="2880360"/>
+          </a:xfrm>
+          <a:prstGeom prst="roundRect">
+            <a:avLst/>
+          </a:prstGeom>
+          <a:solidFill>
+            <a:srgbClr val="FFFFFF"/>
+          </a:solidFill>
+          <a:ln w="12700">
+            <a:solidFill>
+              <a:srgbClr val="D6DEE6"/>
+            </a:solidFill>
+          </a:ln>
+          <a:effectLst/>
+        </p:spPr>
+        <p:style>
+          <a:lnRef idx="1">
+            <a:schemeClr val="accent1"/>
+          </a:lnRef>
+          <a:fillRef idx="3">
+            <a:schemeClr val="accent1"/>
+          </a:fillRef>
+          <a:effectRef idx="2">
+            <a:schemeClr val="accent1"/>
+          </a:effectRef>
+          <a:fontRef idx="minor">
+            <a:schemeClr val="lt1"/>
+          </a:fontRef>
+        </p:style>
+        <p:txBody>
+          <a:bodyPr rtlCol="0" anchor="ctr"/>
+          <a:lstStyle/>
+          <a:p>
+            <a:pPr algn="ctr"/>
+          </a:p>
+        </p:txBody>
+      </p:sp>
+      <p:sp>
+        <p:nvSpPr>
+          <p:cNvPr id="27" name="Rounded Rectangle 26"/>
+          <p:cNvSpPr/>
+          <p:nvPr/>
+        </p:nvSpPr>
+        <p:spPr>
+          <a:xfrm>
+            <a:off x="548640" y="3401568"/>
+            <a:ext cx="5285232" cy="457200"/>
+          </a:xfrm>
+          <a:prstGeom prst="roundRect">
             <a:avLst/>
           </a:prstGeom>
           <a:solidFill>
@@ -4776,14 +6684,58 @@
       </p:sp>
       <p:sp>
         <p:nvSpPr>
-          <p:cNvPr id="12" name="TextBox 11"/>
+          <p:cNvPr id="28" name="Rectangle 27"/>
+          <p:cNvSpPr/>
+          <p:nvPr/>
+        </p:nvSpPr>
+        <p:spPr>
+          <a:xfrm>
+            <a:off x="548640" y="3630168"/>
+            <a:ext cx="5285232" cy="228600"/>
+          </a:xfrm>
+          <a:prstGeom prst="rect">
+            <a:avLst/>
+          </a:prstGeom>
+          <a:solidFill>
+            <a:srgbClr val="0B2A4A"/>
+          </a:solidFill>
+          <a:ln>
+            <a:noFill/>
+          </a:ln>
+          <a:effectLst/>
+        </p:spPr>
+        <p:style>
+          <a:lnRef idx="1">
+            <a:schemeClr val="accent1"/>
+          </a:lnRef>
+          <a:fillRef idx="3">
+            <a:schemeClr val="accent1"/>
+          </a:fillRef>
+          <a:effectRef idx="2">
+            <a:schemeClr val="accent1"/>
+          </a:effectRef>
+          <a:fontRef idx="minor">
+            <a:schemeClr val="lt1"/>
+          </a:fontRef>
+        </p:style>
+        <p:txBody>
+          <a:bodyPr rtlCol="0" anchor="ctr"/>
+          <a:lstStyle/>
+          <a:p>
+            <a:pPr algn="ctr"/>
+          </a:p>
+        </p:txBody>
+      </p:sp>
+      <p:sp>
+        <p:nvSpPr>
+          <p:cNvPr id="29" name="TextBox 28"/>
           <p:cNvSpPr txBox="1"/>
           <p:nvPr/>
         </p:nvSpPr>
         <p:spPr>
           <a:xfrm>
-            <a:off x="822960" y="2862072"/>
-            <a:ext cx="3931920" cy="566928"/>
+            <a:off x="777240" y="3401568"/>
+            <a:ext cx="4919472" cy="457200"/>
           </a:xfrm>
           <a:prstGeom prst="rect">
             <a:avLst/>
@@ -4791,7 +6743,7 @@
           <a:noFill/>
         </p:spPr>
         <p:txBody>
-          <a:bodyPr wrap="square" anchor="ctr" lIns="25400" rIns="25400" tIns="25400" bIns="25400">
+          <a:bodyPr wrap="square" anchor="ctr" lIns="25400" rIns="25400" tIns="12700" bIns="12700">
             <a:spAutoFit/>
           </a:bodyPr>
           <a:lstStyle/>
@@ -4801,11 +6753,11 @@
                 <a:spcPct val="100000"/>
               </a:lnSpc>
               <a:spcAft>
-                <a:spcPts val="400"/>
+                <a:spcPts val="300"/>
               </a:spcAft>
             </a:pPr>
             <a:r>
-              <a:rPr sz="1350" b="1">
+              <a:rPr sz="1500" b="1">
                 <a:solidFill>
                   <a:srgbClr val="FFFFFF"/>
                 </a:solidFill>
@@ -4813,23 +6765,133 @@
                 <a:ea typeface="微软雅黑"/>
                 <a:cs typeface="微软雅黑"/>
               </a:rPr>
-              <a:t>入仓 → 成为集团共享资产</a:t>
-            </a:r>
-          </a:p>
-        </p:txBody>
-      </p:sp>
-      <p:sp>
-        <p:nvSpPr>
-          <p:cNvPr id="13" name="Pentagon 12"/>
+              <a:t>② SkillHub 治理</a:t>
+            </a:r>
+            <a:r>
+              <a:rPr sz="1100" b="0">
+                <a:solidFill>
+                  <a:srgbClr val="CFDDEA"/>
+                </a:solidFill>
+                <a:latin typeface="微软雅黑"/>
+                <a:ea typeface="微软雅黑"/>
+                <a:cs typeface="微软雅黑"/>
+              </a:rPr>
+              <a:t>   治理内建于研发流程</a:t>
+            </a:r>
+          </a:p>
+        </p:txBody>
+      </p:sp>
+      <p:sp>
+        <p:nvSpPr>
+          <p:cNvPr id="30" name="TextBox 29"/>
+          <p:cNvSpPr txBox="1"/>
+          <p:nvPr/>
+        </p:nvSpPr>
+        <p:spPr>
+          <a:xfrm>
+            <a:off x="777240" y="3950208"/>
+            <a:ext cx="4828032" cy="292608"/>
+          </a:xfrm>
+          <a:prstGeom prst="rect">
+            <a:avLst/>
+          </a:prstGeom>
+          <a:noFill/>
+        </p:spPr>
+        <p:txBody>
+          <a:bodyPr wrap="square" anchor="t" lIns="25400" rIns="25400" tIns="12700" bIns="12700">
+            <a:spAutoFit/>
+          </a:bodyPr>
+          <a:lstStyle/>
+          <a:p>
+            <a:pPr algn="l">
+              <a:lnSpc>
+                <a:spcPct val="100000"/>
+              </a:lnSpc>
+              <a:spcAft>
+                <a:spcPts val="300"/>
+              </a:spcAft>
+            </a:pPr>
+            <a:r>
+              <a:rPr sz="1250" b="1">
+                <a:solidFill>
+                  <a:srgbClr val="108A8A"/>
+                </a:solidFill>
+                <a:latin typeface="微软雅黑"/>
+                <a:ea typeface="微软雅黑"/>
+                <a:cs typeface="微软雅黑"/>
+              </a:rPr>
+              <a:t>Skills as Code</a:t>
+            </a:r>
+            <a:r>
+              <a:rPr sz="1050" b="0">
+                <a:solidFill>
+                  <a:srgbClr val="5A6672"/>
+                </a:solidFill>
+                <a:latin typeface="微软雅黑"/>
+                <a:ea typeface="微软雅黑"/>
+                <a:cs typeface="微软雅黑"/>
+              </a:rPr>
+              <a:t>  Git 版本化 · PR 评审 · CI 门禁，零流程开销</a:t>
+            </a:r>
+          </a:p>
+        </p:txBody>
+      </p:sp>
+      <p:sp>
+        <p:nvSpPr>
+          <p:cNvPr id="31" name="Rounded Rectangle 30"/>
           <p:cNvSpPr/>
           <p:nvPr/>
         </p:nvSpPr>
         <p:spPr>
           <a:xfrm>
-            <a:off x="822960" y="3575304"/>
-            <a:ext cx="4297680" cy="566928"/>
-          </a:xfrm>
-          <a:prstGeom prst="homePlate">
+            <a:off x="777240" y="4334256"/>
+            <a:ext cx="4828032" cy="493776"/>
+          </a:xfrm>
+          <a:prstGeom prst="roundRect">
+            <a:avLst/>
+          </a:prstGeom>
+          <a:solidFill>
+            <a:srgbClr val="EEF2F6"/>
+          </a:solidFill>
+          <a:ln>
+            <a:noFill/>
+          </a:ln>
+          <a:effectLst/>
+        </p:spPr>
+        <p:style>
+          <a:lnRef idx="1">
+            <a:schemeClr val="accent1"/>
+          </a:lnRef>
+          <a:fillRef idx="3">
+            <a:schemeClr val="accent1"/>
+          </a:fillRef>
+          <a:effectRef idx="2">
+            <a:schemeClr val="accent1"/>
+          </a:effectRef>
+          <a:fontRef idx="minor">
+            <a:schemeClr val="lt1"/>
+          </a:fontRef>
+        </p:style>
+        <p:txBody>
+          <a:bodyPr rtlCol="0" anchor="ctr"/>
+          <a:lstStyle/>
+          <a:p>
+            <a:pPr algn="ctr"/>
+          </a:p>
+        </p:txBody>
+      </p:sp>
+      <p:sp>
+        <p:nvSpPr>
+          <p:cNvPr id="32" name="Rectangle 31"/>
+          <p:cNvSpPr/>
+          <p:nvPr/>
+        </p:nvSpPr>
+        <p:spPr>
+          <a:xfrm>
+            <a:off x="777240" y="4334256"/>
+            <a:ext cx="76200" cy="493776"/>
+          </a:xfrm>
+          <a:prstGeom prst="rect">
             <a:avLst/>
           </a:prstGeom>
           <a:solidFill>
@@ -4864,14 +6926,14 @@
       </p:sp>
       <p:sp>
         <p:nvSpPr>
-          <p:cNvPr id="14" name="TextBox 13"/>
+          <p:cNvPr id="33" name="TextBox 32"/>
           <p:cNvSpPr txBox="1"/>
           <p:nvPr/>
         </p:nvSpPr>
         <p:spPr>
           <a:xfrm>
-            <a:off x="822960" y="3575304"/>
-            <a:ext cx="3931920" cy="566928"/>
+            <a:off x="960120" y="4334256"/>
+            <a:ext cx="1554480" cy="493776"/>
           </a:xfrm>
           <a:prstGeom prst="rect">
             <a:avLst/>
@@ -4879,7 +6941,7 @@
           <a:noFill/>
         </p:spPr>
         <p:txBody>
-          <a:bodyPr wrap="square" anchor="ctr" lIns="25400" rIns="25400" tIns="25400" bIns="25400">
+          <a:bodyPr wrap="square" anchor="ctr" lIns="25400" rIns="25400" tIns="12700" bIns="12700">
             <a:spAutoFit/>
           </a:bodyPr>
           <a:lstStyle/>
@@ -4889,35 +6951,123 @@
                 <a:spcPct val="100000"/>
               </a:lnSpc>
               <a:spcAft>
-                <a:spcPts val="400"/>
+                <a:spcPts val="300"/>
               </a:spcAft>
             </a:pPr>
             <a:r>
-              <a:rPr sz="1350" b="1">
-                <a:solidFill>
-                  <a:srgbClr val="FFFFFF"/>
+              <a:rPr sz="1200" b="1">
+                <a:solidFill>
+                  <a:srgbClr val="108A8A"/>
                 </a:solidFill>
                 <a:latin typeface="微软雅黑"/>
                 <a:ea typeface="微软雅黑"/>
                 <a:cs typeface="微软雅黑"/>
               </a:rPr>
-              <a:t>他人复用 / 组合调用</a:t>
-            </a:r>
-          </a:p>
-        </p:txBody>
-      </p:sp>
-      <p:sp>
-        <p:nvSpPr>
-          <p:cNvPr id="15" name="Pentagon 14"/>
+              <a:t>静态门禁</a:t>
+            </a:r>
+          </a:p>
+        </p:txBody>
+      </p:sp>
+      <p:sp>
+        <p:nvSpPr>
+          <p:cNvPr id="34" name="TextBox 33"/>
+          <p:cNvSpPr txBox="1"/>
+          <p:nvPr/>
+        </p:nvSpPr>
+        <p:spPr>
+          <a:xfrm>
+            <a:off x="2468880" y="4334256"/>
+            <a:ext cx="3136392" cy="493776"/>
+          </a:xfrm>
+          <a:prstGeom prst="rect">
+            <a:avLst/>
+          </a:prstGeom>
+          <a:noFill/>
+        </p:spPr>
+        <p:txBody>
+          <a:bodyPr wrap="square" anchor="ctr" lIns="25400" rIns="25400" tIns="12700" bIns="12700">
+            <a:spAutoFit/>
+          </a:bodyPr>
+          <a:lstStyle/>
+          <a:p>
+            <a:pPr algn="l">
+              <a:lnSpc>
+                <a:spcPct val="100000"/>
+              </a:lnSpc>
+              <a:spcAft>
+                <a:spcPts val="300"/>
+              </a:spcAft>
+            </a:pPr>
+            <a:r>
+              <a:rPr sz="1050" b="0">
+                <a:solidFill>
+                  <a:srgbClr val="1E262E"/>
+                </a:solidFill>
+                <a:latin typeface="微软雅黑"/>
+                <a:ea typeface="微软雅黑"/>
+                <a:cs typeface="微软雅黑"/>
+              </a:rPr>
+              <a:t>CI：Schema 校验 · 命名 · 唯一性 · 密钥扫描</a:t>
+            </a:r>
+          </a:p>
+        </p:txBody>
+      </p:sp>
+      <p:sp>
+        <p:nvSpPr>
+          <p:cNvPr id="35" name="Rounded Rectangle 34"/>
           <p:cNvSpPr/>
           <p:nvPr/>
         </p:nvSpPr>
         <p:spPr>
           <a:xfrm>
-            <a:off x="822960" y="4288536"/>
-            <a:ext cx="4297680" cy="566928"/>
-          </a:xfrm>
-          <a:prstGeom prst="homePlate">
+            <a:off x="777240" y="4919472"/>
+            <a:ext cx="4828032" cy="493776"/>
+          </a:xfrm>
+          <a:prstGeom prst="roundRect">
+            <a:avLst/>
+          </a:prstGeom>
+          <a:solidFill>
+            <a:srgbClr val="EEF2F6"/>
+          </a:solidFill>
+          <a:ln>
+            <a:noFill/>
+          </a:ln>
+          <a:effectLst/>
+        </p:spPr>
+        <p:style>
+          <a:lnRef idx="1">
+            <a:schemeClr val="accent1"/>
+          </a:lnRef>
+          <a:fillRef idx="3">
+            <a:schemeClr val="accent1"/>
+          </a:fillRef>
+          <a:effectRef idx="2">
+            <a:schemeClr val="accent1"/>
+          </a:effectRef>
+          <a:fontRef idx="minor">
+            <a:schemeClr val="lt1"/>
+          </a:fontRef>
+        </p:style>
+        <p:txBody>
+          <a:bodyPr rtlCol="0" anchor="ctr"/>
+          <a:lstStyle/>
+          <a:p>
+            <a:pPr algn="ctr"/>
+          </a:p>
+        </p:txBody>
+      </p:sp>
+      <p:sp>
+        <p:nvSpPr>
+          <p:cNvPr id="36" name="Rectangle 35"/>
+          <p:cNvSpPr/>
+          <p:nvPr/>
+        </p:nvSpPr>
+        <p:spPr>
+          <a:xfrm>
+            <a:off x="777240" y="4919472"/>
+            <a:ext cx="76200" cy="493776"/>
+          </a:xfrm>
+          <a:prstGeom prst="rect">
             <a:avLst/>
           </a:prstGeom>
           <a:solidFill>
@@ -4952,14 +7102,14 @@
       </p:sp>
       <p:sp>
         <p:nvSpPr>
-          <p:cNvPr id="16" name="TextBox 15"/>
+          <p:cNvPr id="37" name="TextBox 36"/>
           <p:cNvSpPr txBox="1"/>
           <p:nvPr/>
         </p:nvSpPr>
         <p:spPr>
           <a:xfrm>
-            <a:off x="822960" y="4288536"/>
-            <a:ext cx="3931920" cy="566928"/>
+            <a:off x="960120" y="4919472"/>
+            <a:ext cx="1554480" cy="493776"/>
           </a:xfrm>
           <a:prstGeom prst="rect">
             <a:avLst/>
@@ -4967,7 +7117,7 @@
           <a:noFill/>
         </p:spPr>
         <p:txBody>
-          <a:bodyPr wrap="square" anchor="ctr" lIns="25400" rIns="25400" tIns="25400" bIns="25400">
+          <a:bodyPr wrap="square" anchor="ctr" lIns="25400" rIns="25400" tIns="12700" bIns="12700">
             <a:spAutoFit/>
           </a:bodyPr>
           <a:lstStyle/>
@@ -4977,77 +7127,33 @@
                 <a:spcPct val="100000"/>
               </a:lnSpc>
               <a:spcAft>
-                <a:spcPts val="400"/>
+                <a:spcPts val="300"/>
               </a:spcAft>
             </a:pPr>
             <a:r>
-              <a:rPr sz="1350" b="1">
-                <a:solidFill>
-                  <a:srgbClr val="FFFFFF"/>
+              <a:rPr sz="1200" b="1">
+                <a:solidFill>
+                  <a:srgbClr val="0B2A4A"/>
                 </a:solidFill>
                 <a:latin typeface="微软雅黑"/>
                 <a:ea typeface="微软雅黑"/>
                 <a:cs typeface="微软雅黑"/>
               </a:rPr>
-              <a:t>覆盖更多业务场景</a:t>
-            </a:r>
-          </a:p>
-        </p:txBody>
-      </p:sp>
-      <p:sp>
-        <p:nvSpPr>
-          <p:cNvPr id="17" name="Pentagon 16"/>
-          <p:cNvSpPr/>
-          <p:nvPr/>
-        </p:nvSpPr>
-        <p:spPr>
-          <a:xfrm>
-            <a:off x="822960" y="5001768"/>
-            <a:ext cx="4297680" cy="566928"/>
-          </a:xfrm>
-          <a:prstGeom prst="homePlate">
-            <a:avLst/>
-          </a:prstGeom>
-          <a:solidFill>
-            <a:srgbClr val="108A8A"/>
-          </a:solidFill>
-          <a:ln>
-            <a:noFill/>
-          </a:ln>
-          <a:effectLst/>
-        </p:spPr>
-        <p:style>
-          <a:lnRef idx="1">
-            <a:schemeClr val="accent1"/>
-          </a:lnRef>
-          <a:fillRef idx="3">
-            <a:schemeClr val="accent1"/>
-          </a:fillRef>
-          <a:effectRef idx="2">
-            <a:schemeClr val="accent1"/>
-          </a:effectRef>
-          <a:fontRef idx="minor">
-            <a:schemeClr val="lt1"/>
-          </a:fontRef>
-        </p:style>
-        <p:txBody>
-          <a:bodyPr rtlCol="0" anchor="ctr"/>
-          <a:lstStyle/>
-          <a:p>
-            <a:pPr algn="ctr"/>
-          </a:p>
-        </p:txBody>
-      </p:sp>
-      <p:sp>
-        <p:nvSpPr>
-          <p:cNvPr id="18" name="TextBox 17"/>
+              <a:t>人工评审</a:t>
+            </a:r>
+          </a:p>
+        </p:txBody>
+      </p:sp>
+      <p:sp>
+        <p:nvSpPr>
+          <p:cNvPr id="38" name="TextBox 37"/>
           <p:cNvSpPr txBox="1"/>
           <p:nvPr/>
         </p:nvSpPr>
         <p:spPr>
           <a:xfrm>
-            <a:off x="822960" y="5001768"/>
-            <a:ext cx="3931920" cy="566928"/>
+            <a:off x="2468880" y="4919472"/>
+            <a:ext cx="3136392" cy="493776"/>
           </a:xfrm>
           <a:prstGeom prst="rect">
             <a:avLst/>
@@ -5055,7 +7161,7 @@
           <a:noFill/>
         </p:spPr>
         <p:txBody>
-          <a:bodyPr wrap="square" anchor="ctr" lIns="25400" rIns="25400" tIns="25400" bIns="25400">
+          <a:bodyPr wrap="square" anchor="ctr" lIns="25400" rIns="25400" tIns="12700" bIns="12700">
             <a:spAutoFit/>
           </a:bodyPr>
           <a:lstStyle/>
@@ -5065,77 +7171,33 @@
                 <a:spcPct val="100000"/>
               </a:lnSpc>
               <a:spcAft>
-                <a:spcPts val="400"/>
+                <a:spcPts val="300"/>
               </a:spcAft>
             </a:pPr>
             <a:r>
-              <a:rPr sz="1350" b="1">
-                <a:solidFill>
-                  <a:srgbClr val="FFFFFF"/>
+              <a:rPr sz="1050" b="0">
+                <a:solidFill>
+                  <a:srgbClr val="1E262E"/>
                 </a:solidFill>
                 <a:latin typeface="微软雅黑"/>
                 <a:ea typeface="微软雅黑"/>
                 <a:cs typeface="微软雅黑"/>
               </a:rPr>
-              <a:t>反哺沉淀更多 Skill</a:t>
-            </a:r>
-          </a:p>
-        </p:txBody>
-      </p:sp>
-      <p:sp>
-        <p:nvSpPr>
-          <p:cNvPr id="19" name="TextBox 18"/>
-          <p:cNvSpPr txBox="1"/>
-          <p:nvPr/>
-        </p:nvSpPr>
-        <p:spPr>
-          <a:xfrm>
-            <a:off x="822960" y="5760720"/>
-            <a:ext cx="4297680" cy="365760"/>
-          </a:xfrm>
-          <a:prstGeom prst="rect">
-            <a:avLst/>
-          </a:prstGeom>
-          <a:noFill/>
-        </p:spPr>
-        <p:txBody>
-          <a:bodyPr wrap="square" anchor="t" lIns="25400" rIns="25400" tIns="25400" bIns="25400">
-            <a:spAutoFit/>
-          </a:bodyPr>
-          <a:lstStyle/>
-          <a:p>
-            <a:pPr algn="l">
-              <a:lnSpc>
-                <a:spcPct val="100000"/>
-              </a:lnSpc>
-              <a:spcAft>
-                <a:spcPts val="400"/>
-              </a:spcAft>
-            </a:pPr>
-            <a:r>
-              <a:rPr sz="1250" b="1">
-                <a:solidFill>
-                  <a:srgbClr val="D89B2A"/>
-                </a:solidFill>
-                <a:latin typeface="微软雅黑"/>
-                <a:ea typeface="微软雅黑"/>
-                <a:cs typeface="微软雅黑"/>
-              </a:rPr>
-              <a:t>⟲ 飞轮一旦转起来,便自我增强</a:t>
-            </a:r>
-          </a:p>
-        </p:txBody>
-      </p:sp>
-      <p:sp>
-        <p:nvSpPr>
-          <p:cNvPr id="20" name="Rounded Rectangle 19"/>
+              <a:t>PR：语义质量 · 安全副作用 · 最小权限</a:t>
+            </a:r>
+          </a:p>
+        </p:txBody>
+      </p:sp>
+      <p:sp>
+        <p:nvSpPr>
+          <p:cNvPr id="39" name="Rounded Rectangle 38"/>
           <p:cNvSpPr/>
           <p:nvPr/>
         </p:nvSpPr>
         <p:spPr>
           <a:xfrm>
-            <a:off x="5577840" y="1783080"/>
-            <a:ext cx="5943600" cy="1783080"/>
+            <a:off x="777240" y="5504688"/>
+            <a:ext cx="4828032" cy="493776"/>
           </a:xfrm>
           <a:prstGeom prst="roundRect">
             <a:avLst/>
@@ -5172,414 +7234,14 @@
       </p:sp>
       <p:sp>
         <p:nvSpPr>
-          <p:cNvPr id="21" name="TextBox 20"/>
-          <p:cNvSpPr txBox="1"/>
-          <p:nvPr/>
-        </p:nvSpPr>
-        <p:spPr>
-          <a:xfrm>
-            <a:off x="5852160" y="1938528"/>
-            <a:ext cx="5486400" cy="365760"/>
-          </a:xfrm>
-          <a:prstGeom prst="rect">
-            <a:avLst/>
-          </a:prstGeom>
-          <a:noFill/>
-        </p:spPr>
-        <p:txBody>
-          <a:bodyPr wrap="square" anchor="t" lIns="25400" rIns="25400" tIns="25400" bIns="25400">
-            <a:spAutoFit/>
-          </a:bodyPr>
-          <a:lstStyle/>
-          <a:p>
-            <a:pPr algn="l">
-              <a:lnSpc>
-                <a:spcPct val="100000"/>
-              </a:lnSpc>
-              <a:spcAft>
-                <a:spcPts val="400"/>
-              </a:spcAft>
-            </a:pPr>
-            <a:r>
-              <a:rPr sz="1500" b="1">
-                <a:solidFill>
-                  <a:srgbClr val="0B2A4A"/>
-                </a:solidFill>
-                <a:latin typeface="微软雅黑"/>
-                <a:ea typeface="微软雅黑"/>
-                <a:cs typeface="微软雅黑"/>
-              </a:rPr>
-              <a:t>原子技能 × 合成技能(中台思想)</a:t>
-            </a:r>
-          </a:p>
-        </p:txBody>
-      </p:sp>
-      <p:sp>
-        <p:nvSpPr>
-          <p:cNvPr id="22" name="TextBox 21"/>
-          <p:cNvSpPr txBox="1"/>
-          <p:nvPr/>
-        </p:nvSpPr>
-        <p:spPr>
-          <a:xfrm>
-            <a:off x="5852160" y="2377440"/>
-            <a:ext cx="5486400" cy="1097280"/>
-          </a:xfrm>
-          <a:prstGeom prst="rect">
-            <a:avLst/>
-          </a:prstGeom>
-          <a:noFill/>
-        </p:spPr>
-        <p:txBody>
-          <a:bodyPr wrap="square" anchor="t" lIns="25400" rIns="25400" tIns="25400" bIns="25400">
-            <a:spAutoFit/>
-          </a:bodyPr>
-          <a:lstStyle/>
-          <a:p>
-            <a:pPr algn="l">
-              <a:lnSpc>
-                <a:spcPct val="120000"/>
-              </a:lnSpc>
-              <a:spcAft>
-                <a:spcPts val="500"/>
-              </a:spcAft>
-            </a:pPr>
-            <a:r>
-              <a:rPr sz="1300" b="0">
-                <a:solidFill>
-                  <a:srgbClr val="1E262E"/>
-                </a:solidFill>
-                <a:latin typeface="微软雅黑"/>
-                <a:ea typeface="微软雅黑"/>
-                <a:cs typeface="微软雅黑"/>
-              </a:rPr>
-              <a:t>•  原子技能 = 最小、可复用的单一能力(乐高积木)</a:t>
-            </a:r>
-          </a:p>
-          <a:p>
-            <a:pPr algn="l">
-              <a:lnSpc>
-                <a:spcPct val="120000"/>
-              </a:lnSpc>
-              <a:spcAft>
-                <a:spcPts val="500"/>
-              </a:spcAft>
-            </a:pPr>
-            <a:r>
-              <a:rPr sz="1300" b="0">
-                <a:solidFill>
-                  <a:srgbClr val="1E262E"/>
-                </a:solidFill>
-                <a:latin typeface="微软雅黑"/>
-                <a:ea typeface="微软雅黑"/>
-                <a:cs typeface="微软雅黑"/>
-              </a:rPr>
-              <a:t>•  合成技能 = 原子能力的编排组合,搭出复杂业务能力</a:t>
-            </a:r>
-          </a:p>
-          <a:p>
-            <a:pPr algn="l">
-              <a:lnSpc>
-                <a:spcPct val="120000"/>
-              </a:lnSpc>
-              <a:spcAft>
-                <a:spcPts val="500"/>
-              </a:spcAft>
-            </a:pPr>
-            <a:r>
-              <a:rPr sz="1300" b="1">
-                <a:solidFill>
-                  <a:srgbClr val="108A8A"/>
-                </a:solidFill>
-                <a:latin typeface="微软雅黑"/>
-                <a:ea typeface="微软雅黑"/>
-                <a:cs typeface="微软雅黑"/>
-              </a:rPr>
-              <a:t>→  新场景边际开发成本递减:不再造轮子,而是“拼装”</a:t>
-            </a:r>
-          </a:p>
-        </p:txBody>
-      </p:sp>
-      <p:sp>
-        <p:nvSpPr>
-          <p:cNvPr id="23" name="TextBox 22"/>
-          <p:cNvSpPr txBox="1"/>
-          <p:nvPr/>
-        </p:nvSpPr>
-        <p:spPr>
-          <a:xfrm>
-            <a:off x="5577840" y="3749039"/>
-            <a:ext cx="5486400" cy="320040"/>
-          </a:xfrm>
-          <a:prstGeom prst="rect">
-            <a:avLst/>
-          </a:prstGeom>
-          <a:noFill/>
-        </p:spPr>
-        <p:txBody>
-          <a:bodyPr wrap="square" anchor="t" lIns="25400" rIns="25400" tIns="25400" bIns="25400">
-            <a:spAutoFit/>
-          </a:bodyPr>
-          <a:lstStyle/>
-          <a:p>
-            <a:pPr algn="l">
-              <a:lnSpc>
-                <a:spcPct val="100000"/>
-              </a:lnSpc>
-              <a:spcAft>
-                <a:spcPts val="400"/>
-              </a:spcAft>
-            </a:pPr>
-            <a:r>
-              <a:rPr sz="1400" b="1">
-                <a:solidFill>
-                  <a:srgbClr val="0B2A4A"/>
-                </a:solidFill>
-                <a:latin typeface="微软雅黑"/>
-                <a:ea typeface="微软雅黑"/>
-                <a:cs typeface="微软雅黑"/>
-              </a:rPr>
-              <a:t>Before  vs  After</a:t>
-            </a:r>
-          </a:p>
-        </p:txBody>
-      </p:sp>
-      <p:graphicFrame>
-        <p:nvGraphicFramePr>
-          <p:cNvPr id="24" name="Table 23"/>
-          <p:cNvGraphicFramePr>
-            <a:graphicFrameLocks noGrp="1"/>
-          </p:cNvGraphicFramePr>
-          <p:nvPr/>
-        </p:nvGraphicFramePr>
-        <p:xfrm>
-          <a:off x="5577840" y="4069080"/>
-          <a:ext cx="5943600" cy="1737360"/>
-        </p:xfrm>
-        <a:graphic>
-          <a:graphicData uri="http://schemas.openxmlformats.org/drawingml/2006/table">
-            <a:tbl>
-              <a:tblPr firstRow="1" bandRow="1">
-                <a:tableStyleId>{5C22544A-7EE6-4342-B048-85BDC9FD1C3A}</a:tableStyleId>
-              </a:tblPr>
-              <a:tblGrid>
-                <a:gridCol w="2971800"/>
-                <a:gridCol w="2971800"/>
-              </a:tblGrid>
-              <a:tr h="434340">
-                <a:tc>
-                  <a:txBody>
-                    <a:bodyPr/>
-                    <a:lstStyle/>
-                    <a:p>
-                      <a:r>
-                        <a:rPr sz="1250" b="1">
-                          <a:solidFill>
-                            <a:srgbClr val="FFFFFF"/>
-                          </a:solidFill>
-                          <a:latin typeface="微软雅黑"/>
-                          <a:ea typeface="微软雅黑"/>
-                          <a:cs typeface="微软雅黑"/>
-                        </a:rPr>
-                        <a:t>没有技能仓</a:t>
-                      </a:r>
-                    </a:p>
-                  </a:txBody>
-                  <a:tcPr marL="76200" marR="76200" marT="25400" marB="25400" anchor="ctr">
-                    <a:solidFill>
-                      <a:srgbClr val="5A6672"/>
-                    </a:solidFill>
-                  </a:tcPr>
-                </a:tc>
-                <a:tc>
-                  <a:txBody>
-                    <a:bodyPr/>
-                    <a:lstStyle/>
-                    <a:p>
-                      <a:r>
-                        <a:rPr sz="1250" b="1">
-                          <a:solidFill>
-                            <a:srgbClr val="FFFFFF"/>
-                          </a:solidFill>
-                          <a:latin typeface="微软雅黑"/>
-                          <a:ea typeface="微软雅黑"/>
-                          <a:cs typeface="微软雅黑"/>
-                        </a:rPr>
-                        <a:t>有了技能仓</a:t>
-                      </a:r>
-                    </a:p>
-                  </a:txBody>
-                  <a:tcPr marL="76200" marR="76200" marT="25400" marB="25400" anchor="ctr">
-                    <a:solidFill>
-                      <a:srgbClr val="108A8A"/>
-                    </a:solidFill>
-                  </a:tcPr>
-                </a:tc>
-              </a:tr>
-              <a:tr h="434340">
-                <a:tc>
-                  <a:txBody>
-                    <a:bodyPr/>
-                    <a:lstStyle/>
-                    <a:p>
-                      <a:r>
-                        <a:rPr sz="1150" b="0">
-                          <a:solidFill>
-                            <a:srgbClr val="1E262E"/>
-                          </a:solidFill>
-                          <a:latin typeface="微软雅黑"/>
-                          <a:ea typeface="微软雅黑"/>
-                          <a:cs typeface="微软雅黑"/>
-                        </a:rPr>
-                        <a:t>经验锁在个人/项目,人走经验走</a:t>
-                      </a:r>
-                    </a:p>
-                  </a:txBody>
-                  <a:tcPr marL="76200" marR="76200" marT="25400" marB="25400" anchor="ctr">
-                    <a:solidFill>
-                      <a:srgbClr val="FFFFFF"/>
-                    </a:solidFill>
-                  </a:tcPr>
-                </a:tc>
-                <a:tc>
-                  <a:txBody>
-                    <a:bodyPr/>
-                    <a:lstStyle/>
-                    <a:p>
-                      <a:r>
-                        <a:rPr sz="1150" b="0">
-                          <a:solidFill>
-                            <a:srgbClr val="1E262E"/>
-                          </a:solidFill>
-                          <a:latin typeface="微软雅黑"/>
-                          <a:ea typeface="微软雅黑"/>
-                          <a:cs typeface="微软雅黑"/>
-                        </a:rPr>
-                        <a:t>经验显性化、可检索、可传承</a:t>
-                      </a:r>
-                    </a:p>
-                  </a:txBody>
-                  <a:tcPr marL="76200" marR="76200" marT="25400" marB="25400" anchor="ctr">
-                    <a:solidFill>
-                      <a:srgbClr val="FFFFFF"/>
-                    </a:solidFill>
-                  </a:tcPr>
-                </a:tc>
-              </a:tr>
-              <a:tr h="434340">
-                <a:tc>
-                  <a:txBody>
-                    <a:bodyPr/>
-                    <a:lstStyle/>
-                    <a:p>
-                      <a:r>
-                        <a:rPr sz="1150" b="0">
-                          <a:solidFill>
-                            <a:srgbClr val="1E262E"/>
-                          </a:solidFill>
-                          <a:latin typeface="微软雅黑"/>
-                          <a:ea typeface="微软雅黑"/>
-                          <a:cs typeface="微软雅黑"/>
-                        </a:rPr>
-                        <a:t>各团队重复造轮子,质量参差</a:t>
-                      </a:r>
-                    </a:p>
-                  </a:txBody>
-                  <a:tcPr marL="76200" marR="76200" marT="25400" marB="25400" anchor="ctr">
-                    <a:solidFill>
-                      <a:srgbClr val="EEF2F6"/>
-                    </a:solidFill>
-                  </a:tcPr>
-                </a:tc>
-                <a:tc>
-                  <a:txBody>
-                    <a:bodyPr/>
-                    <a:lstStyle/>
-                    <a:p>
-                      <a:r>
-                        <a:rPr sz="1150" b="0">
-                          <a:solidFill>
-                            <a:srgbClr val="1E262E"/>
-                          </a:solidFill>
-                          <a:latin typeface="微软雅黑"/>
-                          <a:ea typeface="微软雅黑"/>
-                          <a:cs typeface="微软雅黑"/>
-                        </a:rPr>
-                        <a:t>一次沉淀,全集团复用</a:t>
-                      </a:r>
-                    </a:p>
-                  </a:txBody>
-                  <a:tcPr marL="76200" marR="76200" marT="25400" marB="25400" anchor="ctr">
-                    <a:solidFill>
-                      <a:srgbClr val="EEF2F6"/>
-                    </a:solidFill>
-                  </a:tcPr>
-                </a:tc>
-              </a:tr>
-              <a:tr h="434340">
-                <a:tc>
-                  <a:txBody>
-                    <a:bodyPr/>
-                    <a:lstStyle/>
-                    <a:p>
-                      <a:r>
-                        <a:rPr sz="1150" b="0">
-                          <a:solidFill>
-                            <a:srgbClr val="1E262E"/>
-                          </a:solidFill>
-                          <a:latin typeface="微软雅黑"/>
-                          <a:ea typeface="微软雅黑"/>
-                          <a:cs typeface="微软雅黑"/>
-                        </a:rPr>
-                        <a:t>能力无法度量</a:t>
-                      </a:r>
-                    </a:p>
-                  </a:txBody>
-                  <a:tcPr marL="76200" marR="76200" marT="25400" marB="25400" anchor="ctr">
-                    <a:solidFill>
-                      <a:srgbClr val="FFFFFF"/>
-                    </a:solidFill>
-                  </a:tcPr>
-                </a:tc>
-                <a:tc>
-                  <a:txBody>
-                    <a:bodyPr/>
-                    <a:lstStyle/>
-                    <a:p>
-                      <a:r>
-                        <a:rPr sz="1150" b="0">
-                          <a:solidFill>
-                            <a:srgbClr val="1E262E"/>
-                          </a:solidFill>
-                          <a:latin typeface="微软雅黑"/>
-                          <a:ea typeface="微软雅黑"/>
-                          <a:cs typeface="微软雅黑"/>
-                        </a:rPr>
-                        <a:t>资产可盘点、可审计</a:t>
-                      </a:r>
-                    </a:p>
-                  </a:txBody>
-                  <a:tcPr marL="76200" marR="76200" marT="25400" marB="25400" anchor="ctr">
-                    <a:solidFill>
-                      <a:srgbClr val="FFFFFF"/>
-                    </a:solidFill>
-                  </a:tcPr>
-                </a:tc>
-              </a:tr>
-            </a:tbl>
-          </a:graphicData>
-        </a:graphic>
-      </p:graphicFrame>
-      <p:sp>
-        <p:nvSpPr>
-          <p:cNvPr id="25" name="Rectangle 24"/>
+          <p:cNvPr id="40" name="Rectangle 39"/>
           <p:cNvSpPr/>
           <p:nvPr/>
         </p:nvSpPr>
         <p:spPr>
           <a:xfrm>
-            <a:off x="640080" y="6144768"/>
-            <a:ext cx="10881360" cy="457200"/>
+            <a:off x="777240" y="5504688"/>
+            <a:ext cx="76200" cy="493776"/>
           </a:xfrm>
           <a:prstGeom prst="rect">
             <a:avLst/>
@@ -5616,14 +7278,14 @@
       </p:sp>
       <p:sp>
         <p:nvSpPr>
-          <p:cNvPr id="26" name="TextBox 25"/>
+          <p:cNvPr id="41" name="TextBox 40"/>
           <p:cNvSpPr txBox="1"/>
           <p:nvPr/>
         </p:nvSpPr>
         <p:spPr>
           <a:xfrm>
-            <a:off x="640080" y="6163056"/>
-            <a:ext cx="10881360" cy="420624"/>
+            <a:off x="960120" y="5504688"/>
+            <a:ext cx="1554480" cy="493776"/>
           </a:xfrm>
           <a:prstGeom prst="rect">
             <a:avLst/>
@@ -5631,7 +7293,493 @@
           <a:noFill/>
         </p:spPr>
         <p:txBody>
-          <a:bodyPr wrap="square" anchor="ctr" lIns="25400" rIns="25400" tIns="25400" bIns="25400">
+          <a:bodyPr wrap="square" anchor="ctr" lIns="25400" rIns="25400" tIns="12700" bIns="12700">
+            <a:spAutoFit/>
+          </a:bodyPr>
+          <a:lstStyle/>
+          <a:p>
+            <a:pPr algn="l">
+              <a:lnSpc>
+                <a:spcPct val="100000"/>
+              </a:lnSpc>
+              <a:spcAft>
+                <a:spcPts val="300"/>
+              </a:spcAft>
+            </a:pPr>
+            <a:r>
+              <a:rPr sz="1200" b="1">
+                <a:solidFill>
+                  <a:srgbClr val="D89B2A"/>
+                </a:solidFill>
+                <a:latin typeface="微软雅黑"/>
+                <a:ea typeface="微软雅黑"/>
+                <a:cs typeface="微软雅黑"/>
+              </a:rPr>
+              <a:t>运行时管控</a:t>
+            </a:r>
+          </a:p>
+        </p:txBody>
+      </p:sp>
+      <p:sp>
+        <p:nvSpPr>
+          <p:cNvPr id="42" name="TextBox 41"/>
+          <p:cNvSpPr txBox="1"/>
+          <p:nvPr/>
+        </p:nvSpPr>
+        <p:spPr>
+          <a:xfrm>
+            <a:off x="2468880" y="5504688"/>
+            <a:ext cx="3136392" cy="493776"/>
+          </a:xfrm>
+          <a:prstGeom prst="rect">
+            <a:avLst/>
+          </a:prstGeom>
+          <a:noFill/>
+        </p:spPr>
+        <p:txBody>
+          <a:bodyPr wrap="square" anchor="ctr" lIns="25400" rIns="25400" tIns="12700" bIns="12700">
+            <a:spAutoFit/>
+          </a:bodyPr>
+          <a:lstStyle/>
+          <a:p>
+            <a:pPr algn="l">
+              <a:lnSpc>
+                <a:spcPct val="100000"/>
+              </a:lnSpc>
+              <a:spcAft>
+                <a:spcPts val="300"/>
+              </a:spcAft>
+            </a:pPr>
+            <a:r>
+              <a:rPr sz="1050" b="0">
+                <a:solidFill>
+                  <a:srgbClr val="1E262E"/>
+                </a:solidFill>
+                <a:latin typeface="微软雅黑"/>
+                <a:ea typeface="微软雅黑"/>
+                <a:cs typeface="微软雅黑"/>
+              </a:rPr>
+              <a:t>Harness：allowed-tools · 调用审计</a:t>
+            </a:r>
+          </a:p>
+        </p:txBody>
+      </p:sp>
+      <p:sp>
+        <p:nvSpPr>
+          <p:cNvPr id="43" name="Rounded Rectangle 42"/>
+          <p:cNvSpPr/>
+          <p:nvPr/>
+        </p:nvSpPr>
+        <p:spPr>
+          <a:xfrm>
+            <a:off x="6355080" y="3401568"/>
+            <a:ext cx="5285232" cy="2880360"/>
+          </a:xfrm>
+          <a:prstGeom prst="roundRect">
+            <a:avLst/>
+          </a:prstGeom>
+          <a:solidFill>
+            <a:srgbClr val="FFFFFF"/>
+          </a:solidFill>
+          <a:ln w="12700">
+            <a:solidFill>
+              <a:srgbClr val="D6DEE6"/>
+            </a:solidFill>
+          </a:ln>
+          <a:effectLst/>
+        </p:spPr>
+        <p:style>
+          <a:lnRef idx="1">
+            <a:schemeClr val="accent1"/>
+          </a:lnRef>
+          <a:fillRef idx="3">
+            <a:schemeClr val="accent1"/>
+          </a:fillRef>
+          <a:effectRef idx="2">
+            <a:schemeClr val="accent1"/>
+          </a:effectRef>
+          <a:fontRef idx="minor">
+            <a:schemeClr val="lt1"/>
+          </a:fontRef>
+        </p:style>
+        <p:txBody>
+          <a:bodyPr rtlCol="0" anchor="ctr"/>
+          <a:lstStyle/>
+          <a:p>
+            <a:pPr algn="ctr"/>
+          </a:p>
+        </p:txBody>
+      </p:sp>
+      <p:sp>
+        <p:nvSpPr>
+          <p:cNvPr id="44" name="Rounded Rectangle 43"/>
+          <p:cNvSpPr/>
+          <p:nvPr/>
+        </p:nvSpPr>
+        <p:spPr>
+          <a:xfrm>
+            <a:off x="6355080" y="3401568"/>
+            <a:ext cx="5285232" cy="457200"/>
+          </a:xfrm>
+          <a:prstGeom prst="roundRect">
+            <a:avLst/>
+          </a:prstGeom>
+          <a:solidFill>
+            <a:srgbClr val="D89B2A"/>
+          </a:solidFill>
+          <a:ln>
+            <a:noFill/>
+          </a:ln>
+          <a:effectLst/>
+        </p:spPr>
+        <p:style>
+          <a:lnRef idx="1">
+            <a:schemeClr val="accent1"/>
+          </a:lnRef>
+          <a:fillRef idx="3">
+            <a:schemeClr val="accent1"/>
+          </a:fillRef>
+          <a:effectRef idx="2">
+            <a:schemeClr val="accent1"/>
+          </a:effectRef>
+          <a:fontRef idx="minor">
+            <a:schemeClr val="lt1"/>
+          </a:fontRef>
+        </p:style>
+        <p:txBody>
+          <a:bodyPr rtlCol="0" anchor="ctr"/>
+          <a:lstStyle/>
+          <a:p>
+            <a:pPr algn="ctr"/>
+          </a:p>
+        </p:txBody>
+      </p:sp>
+      <p:sp>
+        <p:nvSpPr>
+          <p:cNvPr id="45" name="Rectangle 44"/>
+          <p:cNvSpPr/>
+          <p:nvPr/>
+        </p:nvSpPr>
+        <p:spPr>
+          <a:xfrm>
+            <a:off x="6355080" y="3630168"/>
+            <a:ext cx="5285232" cy="228600"/>
+          </a:xfrm>
+          <a:prstGeom prst="rect">
+            <a:avLst/>
+          </a:prstGeom>
+          <a:solidFill>
+            <a:srgbClr val="D89B2A"/>
+          </a:solidFill>
+          <a:ln>
+            <a:noFill/>
+          </a:ln>
+          <a:effectLst/>
+        </p:spPr>
+        <p:style>
+          <a:lnRef idx="1">
+            <a:schemeClr val="accent1"/>
+          </a:lnRef>
+          <a:fillRef idx="3">
+            <a:schemeClr val="accent1"/>
+          </a:fillRef>
+          <a:effectRef idx="2">
+            <a:schemeClr val="accent1"/>
+          </a:effectRef>
+          <a:fontRef idx="minor">
+            <a:schemeClr val="lt1"/>
+          </a:fontRef>
+        </p:style>
+        <p:txBody>
+          <a:bodyPr rtlCol="0" anchor="ctr"/>
+          <a:lstStyle/>
+          <a:p>
+            <a:pPr algn="ctr"/>
+          </a:p>
+        </p:txBody>
+      </p:sp>
+      <p:sp>
+        <p:nvSpPr>
+          <p:cNvPr id="46" name="TextBox 45"/>
+          <p:cNvSpPr txBox="1"/>
+          <p:nvPr/>
+        </p:nvSpPr>
+        <p:spPr>
+          <a:xfrm>
+            <a:off x="6583680" y="3401568"/>
+            <a:ext cx="4919472" cy="457200"/>
+          </a:xfrm>
+          <a:prstGeom prst="rect">
+            <a:avLst/>
+          </a:prstGeom>
+          <a:noFill/>
+        </p:spPr>
+        <p:txBody>
+          <a:bodyPr wrap="square" anchor="ctr" lIns="25400" rIns="25400" tIns="12700" bIns="12700">
+            <a:spAutoFit/>
+          </a:bodyPr>
+          <a:lstStyle/>
+          <a:p>
+            <a:pPr algn="l">
+              <a:lnSpc>
+                <a:spcPct val="100000"/>
+              </a:lnSpc>
+              <a:spcAft>
+                <a:spcPts val="300"/>
+              </a:spcAft>
+            </a:pPr>
+            <a:r>
+              <a:rPr sz="1500" b="1">
+                <a:solidFill>
+                  <a:srgbClr val="0B2A4A"/>
+                </a:solidFill>
+                <a:latin typeface="微软雅黑"/>
+                <a:ea typeface="微软雅黑"/>
+                <a:cs typeface="微软雅黑"/>
+              </a:rPr>
+              <a:t>③ 价值</a:t>
+            </a:r>
+            <a:r>
+              <a:rPr sz="1100" b="0">
+                <a:solidFill>
+                  <a:srgbClr val="5A4010"/>
+                </a:solidFill>
+                <a:latin typeface="微软雅黑"/>
+                <a:ea typeface="微软雅黑"/>
+                <a:cs typeface="微软雅黑"/>
+              </a:rPr>
+              <a:t>   能力资产随复用累积增值</a:t>
+            </a:r>
+          </a:p>
+        </p:txBody>
+      </p:sp>
+      <p:sp>
+        <p:nvSpPr>
+          <p:cNvPr id="47" name="TextBox 46"/>
+          <p:cNvSpPr txBox="1"/>
+          <p:nvPr/>
+        </p:nvSpPr>
+        <p:spPr>
+          <a:xfrm>
+            <a:off x="6583680" y="3968496"/>
+            <a:ext cx="4828032" cy="457200"/>
+          </a:xfrm>
+          <a:prstGeom prst="rect">
+            <a:avLst/>
+          </a:prstGeom>
+          <a:noFill/>
+        </p:spPr>
+        <p:txBody>
+          <a:bodyPr wrap="square" anchor="t" lIns="25400" rIns="25400" tIns="12700" bIns="12700">
+            <a:spAutoFit/>
+          </a:bodyPr>
+          <a:lstStyle/>
+          <a:p>
+            <a:pPr algn="l">
+              <a:lnSpc>
+                <a:spcPct val="110000"/>
+              </a:lnSpc>
+              <a:spcAft>
+                <a:spcPts val="300"/>
+              </a:spcAft>
+            </a:pPr>
+            <a:r>
+              <a:rPr sz="1250" b="1">
+                <a:solidFill>
+                  <a:srgbClr val="0B2A4A"/>
+                </a:solidFill>
+                <a:latin typeface="微软雅黑"/>
+                <a:ea typeface="微软雅黑"/>
+                <a:cs typeface="微软雅黑"/>
+              </a:rPr>
+              <a:t>能力复利：</a:t>
+            </a:r>
+            <a:r>
+              <a:rPr sz="1080" b="0">
+                <a:solidFill>
+                  <a:srgbClr val="1E262E"/>
+                </a:solidFill>
+                <a:latin typeface="微软雅黑"/>
+                <a:ea typeface="微软雅黑"/>
+                <a:cs typeface="微软雅黑"/>
+              </a:rPr>
+              <a:t>Skill 一次建成，多团队反复复用、组合出新能力不断复利</a:t>
+            </a:r>
+          </a:p>
+        </p:txBody>
+      </p:sp>
+      <p:sp>
+        <p:nvSpPr>
+          <p:cNvPr id="48" name="TextBox 47"/>
+          <p:cNvSpPr txBox="1"/>
+          <p:nvPr/>
+        </p:nvSpPr>
+        <p:spPr>
+          <a:xfrm>
+            <a:off x="6583680" y="4572000"/>
+            <a:ext cx="4828032" cy="457200"/>
+          </a:xfrm>
+          <a:prstGeom prst="rect">
+            <a:avLst/>
+          </a:prstGeom>
+          <a:noFill/>
+        </p:spPr>
+        <p:txBody>
+          <a:bodyPr wrap="square" anchor="t" lIns="25400" rIns="25400" tIns="12700" bIns="12700">
+            <a:spAutoFit/>
+          </a:bodyPr>
+          <a:lstStyle/>
+          <a:p>
+            <a:pPr algn="l">
+              <a:lnSpc>
+                <a:spcPct val="110000"/>
+              </a:lnSpc>
+              <a:spcAft>
+                <a:spcPts val="300"/>
+              </a:spcAft>
+            </a:pPr>
+            <a:r>
+              <a:rPr sz="1250" b="1">
+                <a:solidFill>
+                  <a:srgbClr val="0B2A4A"/>
+                </a:solidFill>
+                <a:latin typeface="微软雅黑"/>
+                <a:ea typeface="微软雅黑"/>
+                <a:cs typeface="微软雅黑"/>
+              </a:rPr>
+              <a:t>原子化与可组合：</a:t>
+            </a:r>
+            <a:r>
+              <a:rPr sz="1080" b="0">
+                <a:solidFill>
+                  <a:srgbClr val="1E262E"/>
+                </a:solidFill>
+                <a:latin typeface="微软雅黑"/>
+                <a:ea typeface="微软雅黑"/>
+                <a:cs typeface="微软雅黑"/>
+              </a:rPr>
+              <a:t>原子技能编排为合成技能，新场景边际成本递减</a:t>
+            </a:r>
+          </a:p>
+        </p:txBody>
+      </p:sp>
+      <p:sp>
+        <p:nvSpPr>
+          <p:cNvPr id="49" name="TextBox 48"/>
+          <p:cNvSpPr txBox="1"/>
+          <p:nvPr/>
+        </p:nvSpPr>
+        <p:spPr>
+          <a:xfrm>
+            <a:off x="6583680" y="5175504"/>
+            <a:ext cx="4828032" cy="457200"/>
+          </a:xfrm>
+          <a:prstGeom prst="rect">
+            <a:avLst/>
+          </a:prstGeom>
+          <a:noFill/>
+        </p:spPr>
+        <p:txBody>
+          <a:bodyPr wrap="square" anchor="t" lIns="25400" rIns="25400" tIns="12700" bIns="12700">
+            <a:spAutoFit/>
+          </a:bodyPr>
+          <a:lstStyle/>
+          <a:p>
+            <a:pPr algn="l">
+              <a:lnSpc>
+                <a:spcPct val="110000"/>
+              </a:lnSpc>
+              <a:spcAft>
+                <a:spcPts val="300"/>
+              </a:spcAft>
+            </a:pPr>
+            <a:r>
+              <a:rPr sz="1250" b="1">
+                <a:solidFill>
+                  <a:srgbClr val="0B2A4A"/>
+                </a:solidFill>
+                <a:latin typeface="微软雅黑"/>
+                <a:ea typeface="微软雅黑"/>
+                <a:cs typeface="微软雅黑"/>
+              </a:rPr>
+              <a:t>知识资产化：</a:t>
+            </a:r>
+            <a:r>
+              <a:rPr sz="1080" b="0">
+                <a:solidFill>
+                  <a:srgbClr val="1E262E"/>
+                </a:solidFill>
+                <a:latin typeface="微软雅黑"/>
+                <a:ea typeface="微软雅黑"/>
+                <a:cs typeface="微软雅黑"/>
+              </a:rPr>
+              <a:t>隐性经验 → 显式 · 版本化 · 可审计的组织资产</a:t>
+            </a:r>
+          </a:p>
+        </p:txBody>
+      </p:sp>
+      <p:sp>
+        <p:nvSpPr>
+          <p:cNvPr id="50" name="Rounded Rectangle 49"/>
+          <p:cNvSpPr/>
+          <p:nvPr/>
+        </p:nvSpPr>
+        <p:spPr>
+          <a:xfrm>
+            <a:off x="6583680" y="5715000"/>
+            <a:ext cx="4828032" cy="402336"/>
+          </a:xfrm>
+          <a:prstGeom prst="roundRect">
+            <a:avLst/>
+          </a:prstGeom>
+          <a:solidFill>
+            <a:srgbClr val="D89B2A"/>
+          </a:solidFill>
+          <a:ln>
+            <a:noFill/>
+          </a:ln>
+          <a:effectLst/>
+        </p:spPr>
+        <p:style>
+          <a:lnRef idx="1">
+            <a:schemeClr val="accent1"/>
+          </a:lnRef>
+          <a:fillRef idx="3">
+            <a:schemeClr val="accent1"/>
+          </a:fillRef>
+          <a:effectRef idx="2">
+            <a:schemeClr val="accent1"/>
+          </a:effectRef>
+          <a:fontRef idx="minor">
+            <a:schemeClr val="lt1"/>
+          </a:fontRef>
+        </p:style>
+        <p:txBody>
+          <a:bodyPr rtlCol="0" anchor="ctr"/>
+          <a:lstStyle/>
+          <a:p>
+            <a:pPr algn="ctr"/>
+          </a:p>
+        </p:txBody>
+      </p:sp>
+      <p:sp>
+        <p:nvSpPr>
+          <p:cNvPr id="51" name="TextBox 50"/>
+          <p:cNvSpPr txBox="1"/>
+          <p:nvPr/>
+        </p:nvSpPr>
+        <p:spPr>
+          <a:xfrm>
+            <a:off x="6583680" y="5715000"/>
+            <a:ext cx="4828032" cy="402336"/>
+          </a:xfrm>
+          <a:prstGeom prst="rect">
+            <a:avLst/>
+          </a:prstGeom>
+          <a:noFill/>
+        </p:spPr>
+        <p:txBody>
+          <a:bodyPr wrap="square" anchor="ctr" lIns="25400" rIns="25400" tIns="12700" bIns="12700">
             <a:spAutoFit/>
           </a:bodyPr>
           <a:lstStyle/>
@@ -5641,11 +7789,11 @@
                 <a:spcPct val="100000"/>
               </a:lnSpc>
               <a:spcAft>
-                <a:spcPts val="400"/>
+                <a:spcPts val="300"/>
               </a:spcAft>
             </a:pPr>
             <a:r>
-              <a:rPr sz="1350" b="1">
+              <a:rPr sz="1150" b="1">
                 <a:solidFill>
                   <a:srgbClr val="0B2A4A"/>
                 </a:solidFill>
@@ -5653,7 +7801,7 @@
                 <a:ea typeface="微软雅黑"/>
                 <a:cs typeface="微软雅黑"/>
               </a:rPr>
-              <a:t>可填量化锚点:  复用率 ▢%   ·   节省重复开发 ▢ 人天   ·   覆盖 ▢ 个业务场景</a:t>
+              <a:t>技能复用率 ▢%  ·  节省 ▢ 人天  ·  覆盖场景 ▢  ·  月调用 ▢</a:t>
             </a:r>
           </a:p>
         </p:txBody>
@@ -5729,7 +7877,7 @@
         <p:spPr>
           <a:xfrm>
             <a:off x="0" y="0"/>
-            <a:ext cx="12191695" cy="1417320"/>
+            <a:ext cx="12191695" cy="1024128"/>
           </a:xfrm>
           <a:prstGeom prst="rect">
             <a:avLst/>
@@ -5772,7 +7920,7 @@
         </p:nvSpPr>
         <p:spPr>
           <a:xfrm>
-            <a:off x="0" y="1417320"/>
+            <a:off x="0" y="1024128"/>
             <a:ext cx="12191695" cy="50800"/>
           </a:xfrm>
           <a:prstGeom prst="rect">
@@ -5816,8 +7964,8 @@
         </p:nvSpPr>
         <p:spPr>
           <a:xfrm>
-            <a:off x="548640" y="164592"/>
-            <a:ext cx="10972800" cy="320040"/>
+            <a:off x="548640" y="109728"/>
+            <a:ext cx="10972800" cy="274320"/>
           </a:xfrm>
           <a:prstGeom prst="rect">
             <a:avLst/>
@@ -5825,7 +7973,7 @@
           <a:noFill/>
         </p:spPr>
         <p:txBody>
-          <a:bodyPr wrap="square" anchor="t" lIns="25400" rIns="25400" tIns="25400" bIns="25400">
+          <a:bodyPr wrap="square" anchor="t" lIns="25400" rIns="25400" tIns="12700" bIns="12700">
             <a:spAutoFit/>
           </a:bodyPr>
           <a:lstStyle/>
@@ -5835,11 +7983,11 @@
                 <a:spcPct val="100000"/>
               </a:lnSpc>
               <a:spcAft>
-                <a:spcPts val="400"/>
+                <a:spcPts val="300"/>
               </a:spcAft>
             </a:pPr>
             <a:r>
-              <a:rPr sz="1300" b="1">
+              <a:rPr sz="1250" b="1">
                 <a:solidFill>
                   <a:srgbClr val="D89B2A"/>
                 </a:solidFill>
@@ -5847,7 +7995,7 @@
                 <a:ea typeface="微软雅黑"/>
                 <a:cs typeface="微软雅黑"/>
               </a:rPr>
-              <a:t>放 心 用 · GOVERNANCE</a:t>
+              <a:t>③ 下一步计划 · ROADMAP</a:t>
             </a:r>
           </a:p>
         </p:txBody>
@@ -5860,8 +8008,8 @@
         </p:nvSpPr>
         <p:spPr>
           <a:xfrm>
-            <a:off x="548640" y="420624"/>
-            <a:ext cx="11064240" cy="566928"/>
+            <a:off x="548640" y="384048"/>
+            <a:ext cx="8869680" cy="548640"/>
           </a:xfrm>
           <a:prstGeom prst="rect">
             <a:avLst/>
@@ -5869,7 +8017,7 @@
           <a:noFill/>
         </p:spPr>
         <p:txBody>
-          <a:bodyPr wrap="square" anchor="t" lIns="25400" rIns="25400" tIns="25400" bIns="25400">
+          <a:bodyPr wrap="square" anchor="t" lIns="25400" rIns="25400" tIns="12700" bIns="12700">
             <a:spAutoFit/>
           </a:bodyPr>
           <a:lstStyle/>
@@ -5879,11 +8027,11 @@
                 <a:spcPct val="100000"/>
               </a:lnSpc>
               <a:spcAft>
-                <a:spcPts val="400"/>
+                <a:spcPts val="300"/>
               </a:spcAft>
             </a:pPr>
             <a:r>
-              <a:rPr sz="3000" b="1">
+              <a:rPr sz="2500" b="1">
                 <a:solidFill>
                   <a:srgbClr val="FFFFFF"/>
                 </a:solidFill>
@@ -5891,7 +8039,7 @@
                 <a:ea typeface="微软雅黑"/>
                 <a:cs typeface="微软雅黑"/>
               </a:rPr>
-              <a:t>低门槛进,可治理,能放心大规模推广</a:t>
+              <a:t>测试前移 · 全员推广 · 发展 SkillHub</a:t>
             </a:r>
           </a:p>
         </p:txBody>
@@ -5904,8 +8052,8 @@
         </p:nvSpPr>
         <p:spPr>
           <a:xfrm>
-            <a:off x="548640" y="1024128"/>
-            <a:ext cx="11064240" cy="365760"/>
+            <a:off x="9098280" y="310896"/>
+            <a:ext cx="2880360" cy="640080"/>
           </a:xfrm>
           <a:prstGeom prst="rect">
             <a:avLst/>
@@ -5913,410 +8061,64 @@
           <a:noFill/>
         </p:spPr>
         <p:txBody>
-          <a:bodyPr wrap="square" anchor="t" lIns="25400" rIns="25400" tIns="25400" bIns="25400">
+          <a:bodyPr wrap="square" anchor="t" lIns="25400" rIns="25400" tIns="12700" bIns="12700">
             <a:spAutoFit/>
           </a:bodyPr>
           <a:lstStyle/>
           <a:p>
-            <a:pPr algn="l">
+            <a:pPr algn="r">
               <a:lnSpc>
-                <a:spcPct val="100000"/>
+                <a:spcPct val="105000"/>
               </a:lnSpc>
               <a:spcAft>
-                <a:spcPts val="400"/>
+                <a:spcPts val="300"/>
               </a:spcAft>
             </a:pPr>
             <a:r>
-              <a:rPr sz="1400" b="0">
-                <a:solidFill>
-                  <a:srgbClr val="CFDDEA"/>
+              <a:rPr sz="1300" b="1">
+                <a:solidFill>
+                  <a:srgbClr val="FFFFFF"/>
                 </a:solidFill>
                 <a:latin typeface="微软雅黑"/>
                 <a:ea typeface="微软雅黑"/>
                 <a:cs typeface="微软雅黑"/>
               </a:rPr>
-              <a:t>把“防护经验”升级成一套可解释的信任模型</a:t>
-            </a:r>
-          </a:p>
-        </p:txBody>
-      </p:sp>
-      <p:sp>
-        <p:nvSpPr>
-          <p:cNvPr id="8" name="TextBox 7"/>
-          <p:cNvSpPr txBox="1"/>
-          <p:nvPr/>
-        </p:nvSpPr>
-        <p:spPr>
-          <a:xfrm>
-            <a:off x="640080" y="1645920"/>
-            <a:ext cx="7315200" cy="320040"/>
-          </a:xfrm>
-          <a:prstGeom prst="rect">
-            <a:avLst/>
-          </a:prstGeom>
-          <a:noFill/>
-        </p:spPr>
-        <p:txBody>
-          <a:bodyPr wrap="square" anchor="t" lIns="25400" rIns="25400" tIns="25400" bIns="25400">
-            <a:spAutoFit/>
-          </a:bodyPr>
-          <a:lstStyle/>
-          <a:p>
-            <a:pPr algn="l">
+              <a:t>从试点</a:t>
+            </a:r>
+          </a:p>
+          <a:p>
+            <a:pPr algn="r">
               <a:lnSpc>
-                <a:spcPct val="100000"/>
+                <a:spcPct val="105000"/>
               </a:lnSpc>
               <a:spcAft>
-                <a:spcPts val="400"/>
+                <a:spcPts val="300"/>
               </a:spcAft>
             </a:pPr>
             <a:r>
-              <a:rPr sz="1500" b="1">
-                <a:solidFill>
-                  <a:srgbClr val="0B2A4A"/>
+              <a:rPr sz="1300" b="1">
+                <a:solidFill>
+                  <a:srgbClr val="D89B2A"/>
                 </a:solidFill>
                 <a:latin typeface="微软雅黑"/>
                 <a:ea typeface="微软雅黑"/>
                 <a:cs typeface="微软雅黑"/>
               </a:rPr>
-              <a:t>三层信任模型</a:t>
-            </a:r>
-          </a:p>
-        </p:txBody>
-      </p:sp>
-      <p:graphicFrame>
-        <p:nvGraphicFramePr>
-          <p:cNvPr id="9" name="Table 8"/>
-          <p:cNvGraphicFramePr>
-            <a:graphicFrameLocks noGrp="1"/>
-          </p:cNvGraphicFramePr>
-          <p:nvPr/>
-        </p:nvGraphicFramePr>
-        <p:xfrm>
-          <a:off x="640080" y="1965960"/>
-          <a:ext cx="6583680" cy="2286000"/>
-        </p:xfrm>
-        <a:graphic>
-          <a:graphicData uri="http://schemas.openxmlformats.org/drawingml/2006/table">
-            <a:tbl>
-              <a:tblPr firstRow="1" bandRow="1">
-                <a:tableStyleId>{5C22544A-7EE6-4342-B048-85BDC9FD1C3A}</a:tableStyleId>
-              </a:tblPr>
-              <a:tblGrid>
-                <a:gridCol w="1828800"/>
-                <a:gridCol w="2011680"/>
-                <a:gridCol w="2743200"/>
-              </a:tblGrid>
-              <a:tr h="571500">
-                <a:tc>
-                  <a:txBody>
-                    <a:bodyPr/>
-                    <a:lstStyle/>
-                    <a:p>
-                      <a:r>
-                        <a:rPr sz="1250" b="1">
-                          <a:solidFill>
-                            <a:srgbClr val="FFFFFF"/>
-                          </a:solidFill>
-                          <a:latin typeface="微软雅黑"/>
-                          <a:ea typeface="微软雅黑"/>
-                          <a:cs typeface="微软雅黑"/>
-                        </a:rPr>
-                        <a:t>层级</a:t>
-                      </a:r>
-                    </a:p>
-                  </a:txBody>
-                  <a:tcPr marL="88900" marT="38100" marB="38100" anchor="ctr">
-                    <a:solidFill>
-                      <a:srgbClr val="0B2A4A"/>
-                    </a:solidFill>
-                  </a:tcPr>
-                </a:tc>
-                <a:tc>
-                  <a:txBody>
-                    <a:bodyPr/>
-                    <a:lstStyle/>
-                    <a:p>
-                      <a:r>
-                        <a:rPr sz="1250" b="1">
-                          <a:solidFill>
-                            <a:srgbClr val="FFFFFF"/>
-                          </a:solidFill>
-                          <a:latin typeface="微软雅黑"/>
-                          <a:ea typeface="微软雅黑"/>
-                          <a:cs typeface="微软雅黑"/>
-                        </a:rPr>
-                        <a:t>谁来把关</a:t>
-                      </a:r>
-                    </a:p>
-                  </a:txBody>
-                  <a:tcPr marL="88900" marT="38100" marB="38100" anchor="ctr">
-                    <a:solidFill>
-                      <a:srgbClr val="0B2A4A"/>
-                    </a:solidFill>
-                  </a:tcPr>
-                </a:tc>
-                <a:tc>
-                  <a:txBody>
-                    <a:bodyPr/>
-                    <a:lstStyle/>
-                    <a:p>
-                      <a:r>
-                        <a:rPr sz="1250" b="1">
-                          <a:solidFill>
-                            <a:srgbClr val="FFFFFF"/>
-                          </a:solidFill>
-                          <a:latin typeface="微软雅黑"/>
-                          <a:ea typeface="微软雅黑"/>
-                          <a:cs typeface="微软雅黑"/>
-                        </a:rPr>
-                        <a:t>管什么</a:t>
-                      </a:r>
-                    </a:p>
-                  </a:txBody>
-                  <a:tcPr marL="88900" marT="38100" marB="38100" anchor="ctr">
-                    <a:solidFill>
-                      <a:srgbClr val="0B2A4A"/>
-                    </a:solidFill>
-                  </a:tcPr>
-                </a:tc>
-              </a:tr>
-              <a:tr h="571500">
-                <a:tc>
-                  <a:txBody>
-                    <a:bodyPr/>
-                    <a:lstStyle/>
-                    <a:p>
-                      <a:r>
-                        <a:rPr sz="1200" b="1">
-                          <a:solidFill>
-                            <a:srgbClr val="0B2A4A"/>
-                          </a:solidFill>
-                          <a:latin typeface="微软雅黑"/>
-                          <a:ea typeface="微软雅黑"/>
-                          <a:cs typeface="微软雅黑"/>
-                        </a:rPr>
-                        <a:t>机器把关结构</a:t>
-                      </a:r>
-                    </a:p>
-                  </a:txBody>
-                  <a:tcPr marL="88900" marT="38100" marB="38100" anchor="ctr">
-                    <a:solidFill>
-                      <a:srgbClr val="EEF2F6"/>
-                    </a:solidFill>
-                  </a:tcPr>
-                </a:tc>
-                <a:tc>
-                  <a:txBody>
-                    <a:bodyPr/>
-                    <a:lstStyle/>
-                    <a:p>
-                      <a:r>
-                        <a:rPr sz="1200" b="0">
-                          <a:solidFill>
-                            <a:srgbClr val="1E262E"/>
-                          </a:solidFill>
-                          <a:latin typeface="微软雅黑"/>
-                          <a:ea typeface="微软雅黑"/>
-                          <a:cs typeface="微软雅黑"/>
-                        </a:rPr>
-                        <a:t>CI 自动校验</a:t>
-                      </a:r>
-                    </a:p>
-                  </a:txBody>
-                  <a:tcPr marL="88900" marT="38100" marB="38100" anchor="ctr">
-                    <a:solidFill>
-                      <a:srgbClr val="EEF2F6"/>
-                    </a:solidFill>
-                  </a:tcPr>
-                </a:tc>
-                <a:tc>
-                  <a:txBody>
-                    <a:bodyPr/>
-                    <a:lstStyle/>
-                    <a:p>
-                      <a:r>
-                        <a:rPr sz="1200" b="0">
-                          <a:solidFill>
-                            <a:srgbClr val="1E262E"/>
-                          </a:solidFill>
-                          <a:latin typeface="微软雅黑"/>
-                          <a:ea typeface="微软雅黑"/>
-                          <a:cs typeface="微软雅黑"/>
-                        </a:rPr>
-                        <a:t>必填字段 · 格式 · 查重 · 密钥扫描</a:t>
-                      </a:r>
-                    </a:p>
-                  </a:txBody>
-                  <a:tcPr marL="88900" marT="38100" marB="38100" anchor="ctr">
-                    <a:solidFill>
-                      <a:srgbClr val="EEF2F6"/>
-                    </a:solidFill>
-                  </a:tcPr>
-                </a:tc>
-              </a:tr>
-              <a:tr h="571500">
-                <a:tc>
-                  <a:txBody>
-                    <a:bodyPr/>
-                    <a:lstStyle/>
-                    <a:p>
-                      <a:r>
-                        <a:rPr sz="1200" b="1">
-                          <a:solidFill>
-                            <a:srgbClr val="0B2A4A"/>
-                          </a:solidFill>
-                          <a:latin typeface="微软雅黑"/>
-                          <a:ea typeface="微软雅黑"/>
-                          <a:cs typeface="微软雅黑"/>
-                        </a:rPr>
-                        <a:t>人看内容</a:t>
-                      </a:r>
-                    </a:p>
-                  </a:txBody>
-                  <a:tcPr marL="88900" marT="38100" marB="38100" anchor="ctr">
-                    <a:solidFill>
-                      <a:srgbClr val="FFFFFF"/>
-                    </a:solidFill>
-                  </a:tcPr>
-                </a:tc>
-                <a:tc>
-                  <a:txBody>
-                    <a:bodyPr/>
-                    <a:lstStyle/>
-                    <a:p>
-                      <a:r>
-                        <a:rPr sz="1200" b="0">
-                          <a:solidFill>
-                            <a:srgbClr val="1E262E"/>
-                          </a:solidFill>
-                          <a:latin typeface="微软雅黑"/>
-                          <a:ea typeface="微软雅黑"/>
-                          <a:cs typeface="微软雅黑"/>
-                        </a:rPr>
-                        <a:t>PR 评审</a:t>
-                      </a:r>
-                    </a:p>
-                  </a:txBody>
-                  <a:tcPr marL="88900" marT="38100" marB="38100" anchor="ctr">
-                    <a:solidFill>
-                      <a:srgbClr val="FFFFFF"/>
-                    </a:solidFill>
-                  </a:tcPr>
-                </a:tc>
-                <a:tc>
-                  <a:txBody>
-                    <a:bodyPr/>
-                    <a:lstStyle/>
-                    <a:p>
-                      <a:r>
-                        <a:rPr sz="1200" b="0">
-                          <a:solidFill>
-                            <a:srgbClr val="1E262E"/>
-                          </a:solidFill>
-                          <a:latin typeface="微软雅黑"/>
-                          <a:ea typeface="微软雅黑"/>
-                          <a:cs typeface="微软雅黑"/>
-                        </a:rPr>
-                        <a:t>语义质量 · 安全副作用</a:t>
-                      </a:r>
-                    </a:p>
-                  </a:txBody>
-                  <a:tcPr marL="88900" marT="38100" marB="38100" anchor="ctr">
-                    <a:solidFill>
-                      <a:srgbClr val="FFFFFF"/>
-                    </a:solidFill>
-                  </a:tcPr>
-                </a:tc>
-              </a:tr>
-              <a:tr h="571500">
-                <a:tc>
-                  <a:txBody>
-                    <a:bodyPr/>
-                    <a:lstStyle/>
-                    <a:p>
-                      <a:r>
-                        <a:rPr sz="1200" b="1">
-                          <a:solidFill>
-                            <a:srgbClr val="0B2A4A"/>
-                          </a:solidFill>
-                          <a:latin typeface="微软雅黑"/>
-                          <a:ea typeface="微软雅黑"/>
-                          <a:cs typeface="微软雅黑"/>
-                        </a:rPr>
-                        <a:t>平台兜底</a:t>
-                      </a:r>
-                    </a:p>
-                  </a:txBody>
-                  <a:tcPr marL="88900" marT="38100" marB="38100" anchor="ctr">
-                    <a:solidFill>
-                      <a:srgbClr val="EEF2F6"/>
-                    </a:solidFill>
-                  </a:tcPr>
-                </a:tc>
-                <a:tc>
-                  <a:txBody>
-                    <a:bodyPr/>
-                    <a:lstStyle/>
-                    <a:p>
-                      <a:r>
-                        <a:rPr sz="1200" b="0">
-                          <a:solidFill>
-                            <a:srgbClr val="1E262E"/>
-                          </a:solidFill>
-                          <a:latin typeface="微软雅黑"/>
-                          <a:ea typeface="微软雅黑"/>
-                          <a:cs typeface="微软雅黑"/>
-                        </a:rPr>
-                        <a:t>运行框架 Harness</a:t>
-                      </a:r>
-                    </a:p>
-                  </a:txBody>
-                  <a:tcPr marL="88900" marT="38100" marB="38100" anchor="ctr">
-                    <a:solidFill>
-                      <a:srgbClr val="EEF2F6"/>
-                    </a:solidFill>
-                  </a:tcPr>
-                </a:tc>
-                <a:tc>
-                  <a:txBody>
-                    <a:bodyPr/>
-                    <a:lstStyle/>
-                    <a:p>
-                      <a:r>
-                        <a:rPr sz="1200" b="0">
-                          <a:solidFill>
-                            <a:srgbClr val="1E262E"/>
-                          </a:solidFill>
-                          <a:latin typeface="微软雅黑"/>
-                          <a:ea typeface="微软雅黑"/>
-                          <a:cs typeface="微软雅黑"/>
-                        </a:rPr>
-                        <a:t>最小权限 · 使用审计</a:t>
-                      </a:r>
-                    </a:p>
-                  </a:txBody>
-                  <a:tcPr marL="88900" marT="38100" marB="38100" anchor="ctr">
-                    <a:solidFill>
-                      <a:srgbClr val="EEF2F6"/>
-                    </a:solidFill>
-                  </a:tcPr>
-                </a:tc>
-              </a:tr>
-            </a:tbl>
-          </a:graphicData>
-        </a:graphic>
-      </p:graphicFrame>
-      <p:sp>
-        <p:nvSpPr>
-          <p:cNvPr id="10" name="Rounded Rectangle 9"/>
+              <a:t>到规模化</a:t>
+            </a:r>
+          </a:p>
+        </p:txBody>
+      </p:sp>
+      <p:sp>
+        <p:nvSpPr>
+          <p:cNvPr id="8" name="Rounded Rectangle 7"/>
           <p:cNvSpPr/>
           <p:nvPr/>
         </p:nvSpPr>
         <p:spPr>
           <a:xfrm>
-            <a:off x="7543800" y="1965960"/>
-            <a:ext cx="3977639" cy="1005840"/>
+            <a:off x="502920" y="1417320"/>
+            <a:ext cx="3611880" cy="4114800"/>
           </a:xfrm>
           <a:prstGeom prst="roundRect">
             <a:avLst/>
@@ -6355,16 +8157,16 @@
       </p:sp>
       <p:sp>
         <p:nvSpPr>
-          <p:cNvPr id="11" name="Rectangle 10"/>
+          <p:cNvPr id="9" name="Rounded Rectangle 8"/>
           <p:cNvSpPr/>
           <p:nvPr/>
         </p:nvSpPr>
         <p:spPr>
           <a:xfrm>
-            <a:off x="7543800" y="1965960"/>
-            <a:ext cx="88900" cy="1005840"/>
-          </a:xfrm>
-          <a:prstGeom prst="rect">
+            <a:off x="502920" y="1417320"/>
+            <a:ext cx="3611880" cy="566928"/>
+          </a:xfrm>
+          <a:prstGeom prst="roundRect">
             <a:avLst/>
           </a:prstGeom>
           <a:solidFill>
@@ -6399,14 +8201,58 @@
       </p:sp>
       <p:sp>
         <p:nvSpPr>
-          <p:cNvPr id="12" name="TextBox 11"/>
+          <p:cNvPr id="10" name="Rectangle 9"/>
+          <p:cNvSpPr/>
+          <p:nvPr/>
+        </p:nvSpPr>
+        <p:spPr>
+          <a:xfrm>
+            <a:off x="502920" y="1700784"/>
+            <a:ext cx="3611880" cy="283464"/>
+          </a:xfrm>
+          <a:prstGeom prst="rect">
+            <a:avLst/>
+          </a:prstGeom>
+          <a:solidFill>
+            <a:srgbClr val="108A8A"/>
+          </a:solidFill>
+          <a:ln>
+            <a:noFill/>
+          </a:ln>
+          <a:effectLst/>
+        </p:spPr>
+        <p:style>
+          <a:lnRef idx="1">
+            <a:schemeClr val="accent1"/>
+          </a:lnRef>
+          <a:fillRef idx="3">
+            <a:schemeClr val="accent1"/>
+          </a:fillRef>
+          <a:effectRef idx="2">
+            <a:schemeClr val="accent1"/>
+          </a:effectRef>
+          <a:fontRef idx="minor">
+            <a:schemeClr val="lt1"/>
+          </a:fontRef>
+        </p:style>
+        <p:txBody>
+          <a:bodyPr rtlCol="0" anchor="ctr"/>
+          <a:lstStyle/>
+          <a:p>
+            <a:pPr algn="ctr"/>
+          </a:p>
+        </p:txBody>
+      </p:sp>
+      <p:sp>
+        <p:nvSpPr>
+          <p:cNvPr id="11" name="TextBox 10"/>
           <p:cNvSpPr txBox="1"/>
           <p:nvPr/>
         </p:nvSpPr>
         <p:spPr>
           <a:xfrm>
-            <a:off x="7744968" y="2075688"/>
-            <a:ext cx="3657600" cy="365760"/>
+            <a:off x="502920" y="1417320"/>
+            <a:ext cx="3611880" cy="566928"/>
           </a:xfrm>
           <a:prstGeom prst="rect">
             <a:avLst/>
@@ -6414,30 +8260,74 @@
           <a:noFill/>
         </p:spPr>
         <p:txBody>
-          <a:bodyPr wrap="square" anchor="t" lIns="25400" rIns="25400" tIns="25400" bIns="25400">
+          <a:bodyPr wrap="square" anchor="ctr" lIns="25400" rIns="25400" tIns="12700" bIns="12700">
             <a:spAutoFit/>
           </a:bodyPr>
           <a:lstStyle/>
           <a:p>
-            <a:pPr algn="l">
+            <a:pPr algn="ctr">
               <a:lnSpc>
                 <a:spcPct val="100000"/>
               </a:lnSpc>
               <a:spcAft>
-                <a:spcPts val="400"/>
+                <a:spcPts val="300"/>
               </a:spcAft>
             </a:pPr>
             <a:r>
-              <a:rPr sz="1400" b="1">
-                <a:solidFill>
-                  <a:srgbClr val="0B2A4A"/>
+              <a:rPr sz="1600" b="1">
+                <a:solidFill>
+                  <a:srgbClr val="FFFFFF"/>
                 </a:solidFill>
                 <a:latin typeface="微软雅黑"/>
                 <a:ea typeface="微软雅黑"/>
                 <a:cs typeface="微软雅黑"/>
               </a:rPr>
-              <a:t>Skills as Code</a:t>
-            </a:r>
+              <a:t>1  推动测试前移</a:t>
+            </a:r>
+          </a:p>
+        </p:txBody>
+      </p:sp>
+      <p:sp>
+        <p:nvSpPr>
+          <p:cNvPr id="12" name="Rectangle 11"/>
+          <p:cNvSpPr/>
+          <p:nvPr/>
+        </p:nvSpPr>
+        <p:spPr>
+          <a:xfrm>
+            <a:off x="731520" y="2395728"/>
+            <a:ext cx="88900" cy="457200"/>
+          </a:xfrm>
+          <a:prstGeom prst="rect">
+            <a:avLst/>
+          </a:prstGeom>
+          <a:solidFill>
+            <a:srgbClr val="108A8A"/>
+          </a:solidFill>
+          <a:ln>
+            <a:noFill/>
+          </a:ln>
+          <a:effectLst/>
+        </p:spPr>
+        <p:style>
+          <a:lnRef idx="1">
+            <a:schemeClr val="accent1"/>
+          </a:lnRef>
+          <a:fillRef idx="3">
+            <a:schemeClr val="accent1"/>
+          </a:fillRef>
+          <a:effectRef idx="2">
+            <a:schemeClr val="accent1"/>
+          </a:effectRef>
+          <a:fontRef idx="minor">
+            <a:schemeClr val="lt1"/>
+          </a:fontRef>
+        </p:style>
+        <p:txBody>
+          <a:bodyPr rtlCol="0" anchor="ctr"/>
+          <a:lstStyle/>
+          <a:p>
+            <a:pPr algn="ctr"/>
           </a:p>
         </p:txBody>
       </p:sp>
@@ -6449,8 +8339,8 @@
         </p:nvSpPr>
         <p:spPr>
           <a:xfrm>
-            <a:off x="7744968" y="2423160"/>
-            <a:ext cx="3657600" cy="502920"/>
+            <a:off x="960120" y="2286000"/>
+            <a:ext cx="2926080" cy="822960"/>
           </a:xfrm>
           <a:prstGeom prst="rect">
             <a:avLst/>
@@ -6458,43 +8348,219 @@
           <a:noFill/>
         </p:spPr>
         <p:txBody>
-          <a:bodyPr wrap="square" anchor="t" lIns="25400" rIns="25400" tIns="25400" bIns="25400">
+          <a:bodyPr wrap="square" anchor="ctr" lIns="25400" rIns="25400" tIns="12700" bIns="12700">
             <a:spAutoFit/>
           </a:bodyPr>
           <a:lstStyle/>
           <a:p>
             <a:pPr algn="l">
               <a:lnSpc>
-                <a:spcPct val="110000"/>
+                <a:spcPct val="115000"/>
               </a:lnSpc>
               <a:spcAft>
-                <a:spcPts val="400"/>
+                <a:spcPts val="300"/>
               </a:spcAft>
             </a:pPr>
             <a:r>
-              <a:rPr sz="1150" b="0">
-                <a:solidFill>
-                  <a:srgbClr val="5A6672"/>
+              <a:rPr sz="1250" b="0">
+                <a:solidFill>
+                  <a:srgbClr val="1E262E"/>
                 </a:solidFill>
                 <a:latin typeface="微软雅黑"/>
                 <a:ea typeface="微软雅黑"/>
                 <a:cs typeface="微软雅黑"/>
               </a:rPr>
-              <a:t>像管代码一样管技能:git + PR,零额外官僚,版本/回滚/审计天然具备</a:t>
-            </a:r>
-          </a:p>
-        </p:txBody>
-      </p:sp>
-      <p:sp>
-        <p:nvSpPr>
-          <p:cNvPr id="14" name="Rounded Rectangle 13"/>
+              <a:t>扩大开发自验证的覆盖范围</a:t>
+            </a:r>
+          </a:p>
+        </p:txBody>
+      </p:sp>
+      <p:sp>
+        <p:nvSpPr>
+          <p:cNvPr id="14" name="Rectangle 13"/>
           <p:cNvSpPr/>
           <p:nvPr/>
         </p:nvSpPr>
         <p:spPr>
           <a:xfrm>
-            <a:off x="7543800" y="3108960"/>
-            <a:ext cx="3977639" cy="1005840"/>
+            <a:off x="731520" y="3355848"/>
+            <a:ext cx="88900" cy="457200"/>
+          </a:xfrm>
+          <a:prstGeom prst="rect">
+            <a:avLst/>
+          </a:prstGeom>
+          <a:solidFill>
+            <a:srgbClr val="108A8A"/>
+          </a:solidFill>
+          <a:ln>
+            <a:noFill/>
+          </a:ln>
+          <a:effectLst/>
+        </p:spPr>
+        <p:style>
+          <a:lnRef idx="1">
+            <a:schemeClr val="accent1"/>
+          </a:lnRef>
+          <a:fillRef idx="3">
+            <a:schemeClr val="accent1"/>
+          </a:fillRef>
+          <a:effectRef idx="2">
+            <a:schemeClr val="accent1"/>
+          </a:effectRef>
+          <a:fontRef idx="minor">
+            <a:schemeClr val="lt1"/>
+          </a:fontRef>
+        </p:style>
+        <p:txBody>
+          <a:bodyPr rtlCol="0" anchor="ctr"/>
+          <a:lstStyle/>
+          <a:p>
+            <a:pPr algn="ctr"/>
+          </a:p>
+        </p:txBody>
+      </p:sp>
+      <p:sp>
+        <p:nvSpPr>
+          <p:cNvPr id="15" name="TextBox 14"/>
+          <p:cNvSpPr txBox="1"/>
+          <p:nvPr/>
+        </p:nvSpPr>
+        <p:spPr>
+          <a:xfrm>
+            <a:off x="960120" y="3246120"/>
+            <a:ext cx="2926080" cy="822960"/>
+          </a:xfrm>
+          <a:prstGeom prst="rect">
+            <a:avLst/>
+          </a:prstGeom>
+          <a:noFill/>
+        </p:spPr>
+        <p:txBody>
+          <a:bodyPr wrap="square" anchor="ctr" lIns="25400" rIns="25400" tIns="12700" bIns="12700">
+            <a:spAutoFit/>
+          </a:bodyPr>
+          <a:lstStyle/>
+          <a:p>
+            <a:pPr algn="l">
+              <a:lnSpc>
+                <a:spcPct val="115000"/>
+              </a:lnSpc>
+              <a:spcAft>
+                <a:spcPts val="300"/>
+              </a:spcAft>
+            </a:pPr>
+            <a:r>
+              <a:rPr sz="1250" b="0">
+                <a:solidFill>
+                  <a:srgbClr val="1E262E"/>
+                </a:solidFill>
+                <a:latin typeface="微软雅黑"/>
+                <a:ea typeface="微软雅黑"/>
+                <a:cs typeface="微软雅黑"/>
+              </a:rPr>
+              <a:t>沉淀更多业务测试知识为 Skill</a:t>
+            </a:r>
+          </a:p>
+        </p:txBody>
+      </p:sp>
+      <p:sp>
+        <p:nvSpPr>
+          <p:cNvPr id="16" name="Rectangle 15"/>
+          <p:cNvSpPr/>
+          <p:nvPr/>
+        </p:nvSpPr>
+        <p:spPr>
+          <a:xfrm>
+            <a:off x="731520" y="4315968"/>
+            <a:ext cx="88900" cy="457200"/>
+          </a:xfrm>
+          <a:prstGeom prst="rect">
+            <a:avLst/>
+          </a:prstGeom>
+          <a:solidFill>
+            <a:srgbClr val="108A8A"/>
+          </a:solidFill>
+          <a:ln>
+            <a:noFill/>
+          </a:ln>
+          <a:effectLst/>
+        </p:spPr>
+        <p:style>
+          <a:lnRef idx="1">
+            <a:schemeClr val="accent1"/>
+          </a:lnRef>
+          <a:fillRef idx="3">
+            <a:schemeClr val="accent1"/>
+          </a:fillRef>
+          <a:effectRef idx="2">
+            <a:schemeClr val="accent1"/>
+          </a:effectRef>
+          <a:fontRef idx="minor">
+            <a:schemeClr val="lt1"/>
+          </a:fontRef>
+        </p:style>
+        <p:txBody>
+          <a:bodyPr rtlCol="0" anchor="ctr"/>
+          <a:lstStyle/>
+          <a:p>
+            <a:pPr algn="ctr"/>
+          </a:p>
+        </p:txBody>
+      </p:sp>
+      <p:sp>
+        <p:nvSpPr>
+          <p:cNvPr id="17" name="TextBox 16"/>
+          <p:cNvSpPr txBox="1"/>
+          <p:nvPr/>
+        </p:nvSpPr>
+        <p:spPr>
+          <a:xfrm>
+            <a:off x="960120" y="4206240"/>
+            <a:ext cx="2926080" cy="822960"/>
+          </a:xfrm>
+          <a:prstGeom prst="rect">
+            <a:avLst/>
+          </a:prstGeom>
+          <a:noFill/>
+        </p:spPr>
+        <p:txBody>
+          <a:bodyPr wrap="square" anchor="ctr" lIns="25400" rIns="25400" tIns="12700" bIns="12700">
+            <a:spAutoFit/>
+          </a:bodyPr>
+          <a:lstStyle/>
+          <a:p>
+            <a:pPr algn="l">
+              <a:lnSpc>
+                <a:spcPct val="115000"/>
+              </a:lnSpc>
+              <a:spcAft>
+                <a:spcPts val="300"/>
+              </a:spcAft>
+            </a:pPr>
+            <a:r>
+              <a:rPr sz="1250" b="0">
+                <a:solidFill>
+                  <a:srgbClr val="1E262E"/>
+                </a:solidFill>
+                <a:latin typeface="微软雅黑"/>
+                <a:ea typeface="微软雅黑"/>
+                <a:cs typeface="微软雅黑"/>
+              </a:rPr>
+              <a:t>目标：缺陷左移，研发提质提效</a:t>
+            </a:r>
+          </a:p>
+        </p:txBody>
+      </p:sp>
+      <p:sp>
+        <p:nvSpPr>
+          <p:cNvPr id="18" name="Rounded Rectangle 17"/>
+          <p:cNvSpPr/>
+          <p:nvPr/>
+        </p:nvSpPr>
+        <p:spPr>
+          <a:xfrm>
+            <a:off x="4297680" y="1417320"/>
+            <a:ext cx="3611880" cy="4114800"/>
           </a:xfrm>
           <a:prstGeom prst="roundRect">
             <a:avLst/>
@@ -6533,16 +8599,458 @@
       </p:sp>
       <p:sp>
         <p:nvSpPr>
-          <p:cNvPr id="15" name="Rectangle 14"/>
+          <p:cNvPr id="19" name="Rounded Rectangle 18"/>
           <p:cNvSpPr/>
           <p:nvPr/>
         </p:nvSpPr>
         <p:spPr>
           <a:xfrm>
-            <a:off x="7543800" y="3108960"/>
-            <a:ext cx="88900" cy="1005840"/>
-          </a:xfrm>
-          <a:prstGeom prst="rect">
+            <a:off x="4297680" y="1417320"/>
+            <a:ext cx="3611880" cy="566928"/>
+          </a:xfrm>
+          <a:prstGeom prst="roundRect">
+            <a:avLst/>
+          </a:prstGeom>
+          <a:solidFill>
+            <a:srgbClr val="0B2A4A"/>
+          </a:solidFill>
+          <a:ln>
+            <a:noFill/>
+          </a:ln>
+          <a:effectLst/>
+        </p:spPr>
+        <p:style>
+          <a:lnRef idx="1">
+            <a:schemeClr val="accent1"/>
+          </a:lnRef>
+          <a:fillRef idx="3">
+            <a:schemeClr val="accent1"/>
+          </a:fillRef>
+          <a:effectRef idx="2">
+            <a:schemeClr val="accent1"/>
+          </a:effectRef>
+          <a:fontRef idx="minor">
+            <a:schemeClr val="lt1"/>
+          </a:fontRef>
+        </p:style>
+        <p:txBody>
+          <a:bodyPr rtlCol="0" anchor="ctr"/>
+          <a:lstStyle/>
+          <a:p>
+            <a:pPr algn="ctr"/>
+          </a:p>
+        </p:txBody>
+      </p:sp>
+      <p:sp>
+        <p:nvSpPr>
+          <p:cNvPr id="20" name="Rectangle 19"/>
+          <p:cNvSpPr/>
+          <p:nvPr/>
+        </p:nvSpPr>
+        <p:spPr>
+          <a:xfrm>
+            <a:off x="4297680" y="1700784"/>
+            <a:ext cx="3611880" cy="283464"/>
+          </a:xfrm>
+          <a:prstGeom prst="rect">
+            <a:avLst/>
+          </a:prstGeom>
+          <a:solidFill>
+            <a:srgbClr val="0B2A4A"/>
+          </a:solidFill>
+          <a:ln>
+            <a:noFill/>
+          </a:ln>
+          <a:effectLst/>
+        </p:spPr>
+        <p:style>
+          <a:lnRef idx="1">
+            <a:schemeClr val="accent1"/>
+          </a:lnRef>
+          <a:fillRef idx="3">
+            <a:schemeClr val="accent1"/>
+          </a:fillRef>
+          <a:effectRef idx="2">
+            <a:schemeClr val="accent1"/>
+          </a:effectRef>
+          <a:fontRef idx="minor">
+            <a:schemeClr val="lt1"/>
+          </a:fontRef>
+        </p:style>
+        <p:txBody>
+          <a:bodyPr rtlCol="0" anchor="ctr"/>
+          <a:lstStyle/>
+          <a:p>
+            <a:pPr algn="ctr"/>
+          </a:p>
+        </p:txBody>
+      </p:sp>
+      <p:sp>
+        <p:nvSpPr>
+          <p:cNvPr id="21" name="TextBox 20"/>
+          <p:cNvSpPr txBox="1"/>
+          <p:nvPr/>
+        </p:nvSpPr>
+        <p:spPr>
+          <a:xfrm>
+            <a:off x="4297680" y="1417320"/>
+            <a:ext cx="3611880" cy="566928"/>
+          </a:xfrm>
+          <a:prstGeom prst="rect">
+            <a:avLst/>
+          </a:prstGeom>
+          <a:noFill/>
+        </p:spPr>
+        <p:txBody>
+          <a:bodyPr wrap="square" anchor="ctr" lIns="25400" rIns="25400" tIns="12700" bIns="12700">
+            <a:spAutoFit/>
+          </a:bodyPr>
+          <a:lstStyle/>
+          <a:p>
+            <a:pPr algn="ctr">
+              <a:lnSpc>
+                <a:spcPct val="100000"/>
+              </a:lnSpc>
+              <a:spcAft>
+                <a:spcPts val="300"/>
+              </a:spcAft>
+            </a:pPr>
+            <a:r>
+              <a:rPr sz="1600" b="1">
+                <a:solidFill>
+                  <a:srgbClr val="FFFFFF"/>
+                </a:solidFill>
+                <a:latin typeface="微软雅黑"/>
+                <a:ea typeface="微软雅黑"/>
+                <a:cs typeface="微软雅黑"/>
+              </a:rPr>
+              <a:t>2  公司内推广宣讲</a:t>
+            </a:r>
+          </a:p>
+        </p:txBody>
+      </p:sp>
+      <p:sp>
+        <p:nvSpPr>
+          <p:cNvPr id="22" name="Rectangle 21"/>
+          <p:cNvSpPr/>
+          <p:nvPr/>
+        </p:nvSpPr>
+        <p:spPr>
+          <a:xfrm>
+            <a:off x="4526280" y="2395728"/>
+            <a:ext cx="88900" cy="457200"/>
+          </a:xfrm>
+          <a:prstGeom prst="rect">
+            <a:avLst/>
+          </a:prstGeom>
+          <a:solidFill>
+            <a:srgbClr val="0B2A4A"/>
+          </a:solidFill>
+          <a:ln>
+            <a:noFill/>
+          </a:ln>
+          <a:effectLst/>
+        </p:spPr>
+        <p:style>
+          <a:lnRef idx="1">
+            <a:schemeClr val="accent1"/>
+          </a:lnRef>
+          <a:fillRef idx="3">
+            <a:schemeClr val="accent1"/>
+          </a:fillRef>
+          <a:effectRef idx="2">
+            <a:schemeClr val="accent1"/>
+          </a:effectRef>
+          <a:fontRef idx="minor">
+            <a:schemeClr val="lt1"/>
+          </a:fontRef>
+        </p:style>
+        <p:txBody>
+          <a:bodyPr rtlCol="0" anchor="ctr"/>
+          <a:lstStyle/>
+          <a:p>
+            <a:pPr algn="ctr"/>
+          </a:p>
+        </p:txBody>
+      </p:sp>
+      <p:sp>
+        <p:nvSpPr>
+          <p:cNvPr id="23" name="TextBox 22"/>
+          <p:cNvSpPr txBox="1"/>
+          <p:nvPr/>
+        </p:nvSpPr>
+        <p:spPr>
+          <a:xfrm>
+            <a:off x="4754880" y="2286000"/>
+            <a:ext cx="2926080" cy="822960"/>
+          </a:xfrm>
+          <a:prstGeom prst="rect">
+            <a:avLst/>
+          </a:prstGeom>
+          <a:noFill/>
+        </p:spPr>
+        <p:txBody>
+          <a:bodyPr wrap="square" anchor="ctr" lIns="25400" rIns="25400" tIns="12700" bIns="12700">
+            <a:spAutoFit/>
+          </a:bodyPr>
+          <a:lstStyle/>
+          <a:p>
+            <a:pPr algn="l">
+              <a:lnSpc>
+                <a:spcPct val="115000"/>
+              </a:lnSpc>
+              <a:spcAft>
+                <a:spcPts val="300"/>
+              </a:spcAft>
+            </a:pPr>
+            <a:r>
+              <a:rPr sz="1250" b="0">
+                <a:solidFill>
+                  <a:srgbClr val="1E262E"/>
+                </a:solidFill>
+                <a:latin typeface="微软雅黑"/>
+                <a:ea typeface="微软雅黑"/>
+                <a:cs typeface="微软雅黑"/>
+              </a:rPr>
+              <a:t>培训与标杆案例宣讲</a:t>
+            </a:r>
+          </a:p>
+        </p:txBody>
+      </p:sp>
+      <p:sp>
+        <p:nvSpPr>
+          <p:cNvPr id="24" name="Rectangle 23"/>
+          <p:cNvSpPr/>
+          <p:nvPr/>
+        </p:nvSpPr>
+        <p:spPr>
+          <a:xfrm>
+            <a:off x="4526280" y="3355848"/>
+            <a:ext cx="88900" cy="457200"/>
+          </a:xfrm>
+          <a:prstGeom prst="rect">
+            <a:avLst/>
+          </a:prstGeom>
+          <a:solidFill>
+            <a:srgbClr val="0B2A4A"/>
+          </a:solidFill>
+          <a:ln>
+            <a:noFill/>
+          </a:ln>
+          <a:effectLst/>
+        </p:spPr>
+        <p:style>
+          <a:lnRef idx="1">
+            <a:schemeClr val="accent1"/>
+          </a:lnRef>
+          <a:fillRef idx="3">
+            <a:schemeClr val="accent1"/>
+          </a:fillRef>
+          <a:effectRef idx="2">
+            <a:schemeClr val="accent1"/>
+          </a:effectRef>
+          <a:fontRef idx="minor">
+            <a:schemeClr val="lt1"/>
+          </a:fontRef>
+        </p:style>
+        <p:txBody>
+          <a:bodyPr rtlCol="0" anchor="ctr"/>
+          <a:lstStyle/>
+          <a:p>
+            <a:pPr algn="ctr"/>
+          </a:p>
+        </p:txBody>
+      </p:sp>
+      <p:sp>
+        <p:nvSpPr>
+          <p:cNvPr id="25" name="TextBox 24"/>
+          <p:cNvSpPr txBox="1"/>
+          <p:nvPr/>
+        </p:nvSpPr>
+        <p:spPr>
+          <a:xfrm>
+            <a:off x="4754880" y="3246120"/>
+            <a:ext cx="2926080" cy="822960"/>
+          </a:xfrm>
+          <a:prstGeom prst="rect">
+            <a:avLst/>
+          </a:prstGeom>
+          <a:noFill/>
+        </p:spPr>
+        <p:txBody>
+          <a:bodyPr wrap="square" anchor="ctr" lIns="25400" rIns="25400" tIns="12700" bIns="12700">
+            <a:spAutoFit/>
+          </a:bodyPr>
+          <a:lstStyle/>
+          <a:p>
+            <a:pPr algn="l">
+              <a:lnSpc>
+                <a:spcPct val="115000"/>
+              </a:lnSpc>
+              <a:spcAft>
+                <a:spcPts val="300"/>
+              </a:spcAft>
+            </a:pPr>
+            <a:r>
+              <a:rPr sz="1250" b="0">
+                <a:solidFill>
+                  <a:srgbClr val="1E262E"/>
+                </a:solidFill>
+                <a:latin typeface="微软雅黑"/>
+                <a:ea typeface="微软雅黑"/>
+                <a:cs typeface="微软雅黑"/>
+              </a:rPr>
+              <a:t>鼓励各团队沉淀与复用 Skill</a:t>
+            </a:r>
+          </a:p>
+        </p:txBody>
+      </p:sp>
+      <p:sp>
+        <p:nvSpPr>
+          <p:cNvPr id="26" name="Rectangle 25"/>
+          <p:cNvSpPr/>
+          <p:nvPr/>
+        </p:nvSpPr>
+        <p:spPr>
+          <a:xfrm>
+            <a:off x="4526280" y="4315968"/>
+            <a:ext cx="88900" cy="457200"/>
+          </a:xfrm>
+          <a:prstGeom prst="rect">
+            <a:avLst/>
+          </a:prstGeom>
+          <a:solidFill>
+            <a:srgbClr val="0B2A4A"/>
+          </a:solidFill>
+          <a:ln>
+            <a:noFill/>
+          </a:ln>
+          <a:effectLst/>
+        </p:spPr>
+        <p:style>
+          <a:lnRef idx="1">
+            <a:schemeClr val="accent1"/>
+          </a:lnRef>
+          <a:fillRef idx="3">
+            <a:schemeClr val="accent1"/>
+          </a:fillRef>
+          <a:effectRef idx="2">
+            <a:schemeClr val="accent1"/>
+          </a:effectRef>
+          <a:fontRef idx="minor">
+            <a:schemeClr val="lt1"/>
+          </a:fontRef>
+        </p:style>
+        <p:txBody>
+          <a:bodyPr rtlCol="0" anchor="ctr"/>
+          <a:lstStyle/>
+          <a:p>
+            <a:pPr algn="ctr"/>
+          </a:p>
+        </p:txBody>
+      </p:sp>
+      <p:sp>
+        <p:nvSpPr>
+          <p:cNvPr id="27" name="TextBox 26"/>
+          <p:cNvSpPr txBox="1"/>
+          <p:nvPr/>
+        </p:nvSpPr>
+        <p:spPr>
+          <a:xfrm>
+            <a:off x="4754880" y="4206240"/>
+            <a:ext cx="2926080" cy="822960"/>
+          </a:xfrm>
+          <a:prstGeom prst="rect">
+            <a:avLst/>
+          </a:prstGeom>
+          <a:noFill/>
+        </p:spPr>
+        <p:txBody>
+          <a:bodyPr wrap="square" anchor="ctr" lIns="25400" rIns="25400" tIns="12700" bIns="12700">
+            <a:spAutoFit/>
+          </a:bodyPr>
+          <a:lstStyle/>
+          <a:p>
+            <a:pPr algn="l">
+              <a:lnSpc>
+                <a:spcPct val="115000"/>
+              </a:lnSpc>
+              <a:spcAft>
+                <a:spcPts val="300"/>
+              </a:spcAft>
+            </a:pPr>
+            <a:r>
+              <a:rPr sz="1250" b="0">
+                <a:solidFill>
+                  <a:srgbClr val="1E262E"/>
+                </a:solidFill>
+                <a:latin typeface="微软雅黑"/>
+                <a:ea typeface="微软雅黑"/>
+                <a:cs typeface="微软雅黑"/>
+              </a:rPr>
+              <a:t>建设贡献者社区与贡献规范</a:t>
+            </a:r>
+          </a:p>
+        </p:txBody>
+      </p:sp>
+      <p:sp>
+        <p:nvSpPr>
+          <p:cNvPr id="28" name="Rounded Rectangle 27"/>
+          <p:cNvSpPr/>
+          <p:nvPr/>
+        </p:nvSpPr>
+        <p:spPr>
+          <a:xfrm>
+            <a:off x="8092440" y="1417320"/>
+            <a:ext cx="3611880" cy="4114800"/>
+          </a:xfrm>
+          <a:prstGeom prst="roundRect">
+            <a:avLst/>
+          </a:prstGeom>
+          <a:solidFill>
+            <a:srgbClr val="FFFFFF"/>
+          </a:solidFill>
+          <a:ln w="12700">
+            <a:solidFill>
+              <a:srgbClr val="D6DEE6"/>
+            </a:solidFill>
+          </a:ln>
+          <a:effectLst/>
+        </p:spPr>
+        <p:style>
+          <a:lnRef idx="1">
+            <a:schemeClr val="accent1"/>
+          </a:lnRef>
+          <a:fillRef idx="3">
+            <a:schemeClr val="accent1"/>
+          </a:fillRef>
+          <a:effectRef idx="2">
+            <a:schemeClr val="accent1"/>
+          </a:effectRef>
+          <a:fontRef idx="minor">
+            <a:schemeClr val="lt1"/>
+          </a:fontRef>
+        </p:style>
+        <p:txBody>
+          <a:bodyPr rtlCol="0" anchor="ctr"/>
+          <a:lstStyle/>
+          <a:p>
+            <a:pPr algn="ctr"/>
+          </a:p>
+        </p:txBody>
+      </p:sp>
+      <p:sp>
+        <p:nvSpPr>
+          <p:cNvPr id="29" name="Rounded Rectangle 28"/>
+          <p:cNvSpPr/>
+          <p:nvPr/>
+        </p:nvSpPr>
+        <p:spPr>
+          <a:xfrm>
+            <a:off x="8092440" y="1417320"/>
+            <a:ext cx="3611880" cy="566928"/>
+          </a:xfrm>
+          <a:prstGeom prst="roundRect">
             <a:avLst/>
           </a:prstGeom>
           <a:solidFill>
@@ -6577,152 +9085,20 @@
       </p:sp>
       <p:sp>
         <p:nvSpPr>
-          <p:cNvPr id="16" name="TextBox 15"/>
-          <p:cNvSpPr txBox="1"/>
-          <p:nvPr/>
-        </p:nvSpPr>
-        <p:spPr>
-          <a:xfrm>
-            <a:off x="7744968" y="3218688"/>
-            <a:ext cx="3657600" cy="365760"/>
-          </a:xfrm>
-          <a:prstGeom prst="rect">
-            <a:avLst/>
-          </a:prstGeom>
-          <a:noFill/>
-        </p:spPr>
-        <p:txBody>
-          <a:bodyPr wrap="square" anchor="t" lIns="25400" rIns="25400" tIns="25400" bIns="25400">
-            <a:spAutoFit/>
-          </a:bodyPr>
-          <a:lstStyle/>
-          <a:p>
-            <a:pPr algn="l">
-              <a:lnSpc>
-                <a:spcPct val="100000"/>
-              </a:lnSpc>
-              <a:spcAft>
-                <a:spcPts val="400"/>
-              </a:spcAft>
-            </a:pPr>
-            <a:r>
-              <a:rPr sz="1400" b="1">
-                <a:solidFill>
-                  <a:srgbClr val="0B2A4A"/>
-                </a:solidFill>
-                <a:latin typeface="微软雅黑"/>
-                <a:ea typeface="微软雅黑"/>
-                <a:cs typeface="微软雅黑"/>
-              </a:rPr>
-              <a:t>铺好的路,而非锁死的门</a:t>
-            </a:r>
-          </a:p>
-        </p:txBody>
-      </p:sp>
-      <p:sp>
-        <p:nvSpPr>
-          <p:cNvPr id="17" name="TextBox 16"/>
-          <p:cNvSpPr txBox="1"/>
-          <p:nvPr/>
-        </p:nvSpPr>
-        <p:spPr>
-          <a:xfrm>
-            <a:off x="7744968" y="3566160"/>
-            <a:ext cx="3657600" cy="502920"/>
-          </a:xfrm>
-          <a:prstGeom prst="rect">
-            <a:avLst/>
-          </a:prstGeom>
-          <a:noFill/>
-        </p:spPr>
-        <p:txBody>
-          <a:bodyPr wrap="square" anchor="t" lIns="25400" rIns="25400" tIns="25400" bIns="25400">
-            <a:spAutoFit/>
-          </a:bodyPr>
-          <a:lstStyle/>
-          <a:p>
-            <a:pPr algn="l">
-              <a:lnSpc>
-                <a:spcPct val="110000"/>
-              </a:lnSpc>
-              <a:spcAft>
-                <a:spcPts val="400"/>
-              </a:spcAft>
-            </a:pPr>
-            <a:r>
-              <a:rPr sz="1150" b="0">
-                <a:solidFill>
-                  <a:srgbClr val="5A6672"/>
-                </a:solidFill>
-                <a:latin typeface="微软雅黑"/>
-                <a:ea typeface="微软雅黑"/>
-                <a:cs typeface="微软雅黑"/>
-              </a:rPr>
-              <a:t>中心团队做策展(挑选推荐),不做审批(卡关)——门槛太高,大家就绕过去</a:t>
-            </a:r>
-          </a:p>
-        </p:txBody>
-      </p:sp>
-      <p:sp>
-        <p:nvSpPr>
-          <p:cNvPr id="18" name="TextBox 17"/>
-          <p:cNvSpPr txBox="1"/>
-          <p:nvPr/>
-        </p:nvSpPr>
-        <p:spPr>
-          <a:xfrm>
-            <a:off x="640080" y="4526280"/>
-            <a:ext cx="7315200" cy="320040"/>
-          </a:xfrm>
-          <a:prstGeom prst="rect">
-            <a:avLst/>
-          </a:prstGeom>
-          <a:noFill/>
-        </p:spPr>
-        <p:txBody>
-          <a:bodyPr wrap="square" anchor="t" lIns="25400" rIns="25400" tIns="25400" bIns="25400">
-            <a:spAutoFit/>
-          </a:bodyPr>
-          <a:lstStyle/>
-          <a:p>
-            <a:pPr algn="l">
-              <a:lnSpc>
-                <a:spcPct val="100000"/>
-              </a:lnSpc>
-              <a:spcAft>
-                <a:spcPts val="400"/>
-              </a:spcAft>
-            </a:pPr>
-            <a:r>
-              <a:rPr sz="1500" b="1">
-                <a:solidFill>
-                  <a:srgbClr val="0B2A4A"/>
-                </a:solidFill>
-                <a:latin typeface="微软雅黑"/>
-                <a:ea typeface="微软雅黑"/>
-                <a:cs typeface="微软雅黑"/>
-              </a:rPr>
-              <a:t>成熟度路线  simple → complex</a:t>
-            </a:r>
-          </a:p>
-        </p:txBody>
-      </p:sp>
-      <p:sp>
-        <p:nvSpPr>
-          <p:cNvPr id="19" name="Rounded Rectangle 18"/>
+          <p:cNvPr id="30" name="Rectangle 29"/>
           <p:cNvSpPr/>
           <p:nvPr/>
         </p:nvSpPr>
         <p:spPr>
           <a:xfrm>
-            <a:off x="640080" y="4892040"/>
-            <a:ext cx="3566160" cy="914400"/>
-          </a:xfrm>
-          <a:prstGeom prst="roundRect">
+            <a:off x="8092440" y="1700784"/>
+            <a:ext cx="3611880" cy="283464"/>
+          </a:xfrm>
+          <a:prstGeom prst="rect">
             <a:avLst/>
           </a:prstGeom>
           <a:solidFill>
-            <a:srgbClr val="E3F1F1"/>
+            <a:srgbClr val="D89B2A"/>
           </a:solidFill>
           <a:ln>
             <a:noFill/>
@@ -6753,14 +9129,14 @@
       </p:sp>
       <p:sp>
         <p:nvSpPr>
-          <p:cNvPr id="20" name="TextBox 19"/>
+          <p:cNvPr id="31" name="TextBox 30"/>
           <p:cNvSpPr txBox="1"/>
           <p:nvPr/>
         </p:nvSpPr>
         <p:spPr>
           <a:xfrm>
-            <a:off x="822960" y="4983480"/>
-            <a:ext cx="3200400" cy="292608"/>
+            <a:off x="8092440" y="1417320"/>
+            <a:ext cx="3611880" cy="566928"/>
           </a:xfrm>
           <a:prstGeom prst="rect">
             <a:avLst/>
@@ -6768,104 +9144,49 @@
           <a:noFill/>
         </p:spPr>
         <p:txBody>
-          <a:bodyPr wrap="square" anchor="t" lIns="25400" rIns="25400" tIns="25400" bIns="25400">
+          <a:bodyPr wrap="square" anchor="ctr" lIns="25400" rIns="25400" tIns="12700" bIns="12700">
             <a:spAutoFit/>
           </a:bodyPr>
           <a:lstStyle/>
           <a:p>
-            <a:pPr algn="l">
+            <a:pPr algn="ctr">
               <a:lnSpc>
                 <a:spcPct val="100000"/>
               </a:lnSpc>
               <a:spcAft>
-                <a:spcPts val="400"/>
+                <a:spcPts val="300"/>
               </a:spcAft>
             </a:pPr>
             <a:r>
-              <a:rPr sz="1250" b="1">
-                <a:solidFill>
-                  <a:srgbClr val="108A8A"/>
+              <a:rPr sz="1600" b="1">
+                <a:solidFill>
+                  <a:srgbClr val="0B2A4A"/>
                 </a:solidFill>
                 <a:latin typeface="微软雅黑"/>
                 <a:ea typeface="微软雅黑"/>
                 <a:cs typeface="微软雅黑"/>
               </a:rPr>
-              <a:t>✅  现在   </a:t>
-            </a:r>
-            <a:r>
-              <a:rPr sz="1350" b="1">
-                <a:solidFill>
-                  <a:srgbClr val="0B2A4A"/>
-                </a:solidFill>
-                <a:latin typeface="微软雅黑"/>
-                <a:ea typeface="微软雅黑"/>
-                <a:cs typeface="微软雅黑"/>
-              </a:rPr>
-              <a:t>技能仓(Skills as Code)</a:t>
-            </a:r>
-          </a:p>
-        </p:txBody>
-      </p:sp>
-      <p:sp>
-        <p:nvSpPr>
-          <p:cNvPr id="21" name="TextBox 20"/>
-          <p:cNvSpPr txBox="1"/>
-          <p:nvPr/>
-        </p:nvSpPr>
-        <p:spPr>
-          <a:xfrm>
-            <a:off x="822960" y="5321808"/>
-            <a:ext cx="3200400" cy="411480"/>
-          </a:xfrm>
-          <a:prstGeom prst="rect">
-            <a:avLst/>
-          </a:prstGeom>
-          <a:noFill/>
-        </p:spPr>
-        <p:txBody>
-          <a:bodyPr wrap="square" anchor="t" lIns="25400" rIns="25400" tIns="25400" bIns="25400">
-            <a:spAutoFit/>
-          </a:bodyPr>
-          <a:lstStyle/>
-          <a:p>
-            <a:pPr algn="l">
-              <a:lnSpc>
-                <a:spcPct val="105000"/>
-              </a:lnSpc>
-              <a:spcAft>
-                <a:spcPts val="400"/>
-              </a:spcAft>
-            </a:pPr>
-            <a:r>
-              <a:rPr sz="1150" b="0">
-                <a:solidFill>
-                  <a:srgbClr val="5A6672"/>
-                </a:solidFill>
-                <a:latin typeface="微软雅黑"/>
-                <a:ea typeface="微软雅黑"/>
-                <a:cs typeface="微软雅黑"/>
-              </a:rPr>
-              <a:t>已跑通,可推广</a:t>
-            </a:r>
-          </a:p>
-        </p:txBody>
-      </p:sp>
-      <p:sp>
-        <p:nvSpPr>
-          <p:cNvPr id="22" name="Rounded Rectangle 21"/>
+              <a:t>3  发展 SkillHub</a:t>
+            </a:r>
+          </a:p>
+        </p:txBody>
+      </p:sp>
+      <p:sp>
+        <p:nvSpPr>
+          <p:cNvPr id="32" name="Rectangle 31"/>
           <p:cNvSpPr/>
           <p:nvPr/>
         </p:nvSpPr>
         <p:spPr>
           <a:xfrm>
-            <a:off x="4297680" y="4892040"/>
-            <a:ext cx="3566160" cy="914400"/>
-          </a:xfrm>
-          <a:prstGeom prst="roundRect">
+            <a:off x="8321040" y="2395728"/>
+            <a:ext cx="88900" cy="457200"/>
+          </a:xfrm>
+          <a:prstGeom prst="rect">
             <a:avLst/>
           </a:prstGeom>
           <a:solidFill>
-            <a:srgbClr val="EEF2F6"/>
+            <a:srgbClr val="D89B2A"/>
           </a:solidFill>
           <a:ln>
             <a:noFill/>
@@ -6896,14 +9217,14 @@
       </p:sp>
       <p:sp>
         <p:nvSpPr>
-          <p:cNvPr id="23" name="TextBox 22"/>
+          <p:cNvPr id="33" name="TextBox 32"/>
           <p:cNvSpPr txBox="1"/>
           <p:nvPr/>
         </p:nvSpPr>
         <p:spPr>
           <a:xfrm>
-            <a:off x="4480560" y="4983480"/>
-            <a:ext cx="3200400" cy="292608"/>
+            <a:off x="8549640" y="2286000"/>
+            <a:ext cx="2926080" cy="822960"/>
           </a:xfrm>
           <a:prstGeom prst="rect">
             <a:avLst/>
@@ -6911,104 +9232,49 @@
           <a:noFill/>
         </p:spPr>
         <p:txBody>
-          <a:bodyPr wrap="square" anchor="t" lIns="25400" rIns="25400" tIns="25400" bIns="25400">
+          <a:bodyPr wrap="square" anchor="ctr" lIns="25400" rIns="25400" tIns="12700" bIns="12700">
             <a:spAutoFit/>
           </a:bodyPr>
           <a:lstStyle/>
           <a:p>
             <a:pPr algn="l">
               <a:lnSpc>
-                <a:spcPct val="100000"/>
+                <a:spcPct val="115000"/>
               </a:lnSpc>
               <a:spcAft>
-                <a:spcPts val="400"/>
+                <a:spcPts val="300"/>
               </a:spcAft>
             </a:pPr>
             <a:r>
-              <a:rPr sz="1250" b="1">
-                <a:solidFill>
-                  <a:srgbClr val="5A6672"/>
+              <a:rPr sz="1250" b="0">
+                <a:solidFill>
+                  <a:srgbClr val="1E262E"/>
                 </a:solidFill>
                 <a:latin typeface="微软雅黑"/>
                 <a:ea typeface="微软雅黑"/>
                 <a:cs typeface="微软雅黑"/>
               </a:rPr>
-              <a:t>⬜  下一步   </a:t>
-            </a:r>
-            <a:r>
-              <a:rPr sz="1350" b="1">
-                <a:solidFill>
-                  <a:srgbClr val="0B2A4A"/>
-                </a:solidFill>
-                <a:latin typeface="微软雅黑"/>
-                <a:ea typeface="微软雅黑"/>
-                <a:cs typeface="微软雅黑"/>
-              </a:rPr>
-              <a:t>按需分发</a:t>
-            </a:r>
-          </a:p>
-        </p:txBody>
-      </p:sp>
-      <p:sp>
-        <p:nvSpPr>
-          <p:cNvPr id="24" name="TextBox 23"/>
-          <p:cNvSpPr txBox="1"/>
-          <p:nvPr/>
-        </p:nvSpPr>
-        <p:spPr>
-          <a:xfrm>
-            <a:off x="4480560" y="5321808"/>
-            <a:ext cx="3200400" cy="411480"/>
-          </a:xfrm>
-          <a:prstGeom prst="rect">
-            <a:avLst/>
-          </a:prstGeom>
-          <a:noFill/>
-        </p:spPr>
-        <p:txBody>
-          <a:bodyPr wrap="square" anchor="t" lIns="25400" rIns="25400" tIns="25400" bIns="25400">
-            <a:spAutoFit/>
-          </a:bodyPr>
-          <a:lstStyle/>
-          <a:p>
-            <a:pPr algn="l">
-              <a:lnSpc>
-                <a:spcPct val="105000"/>
-              </a:lnSpc>
-              <a:spcAft>
-                <a:spcPts val="400"/>
-              </a:spcAft>
-            </a:pPr>
-            <a:r>
-              <a:rPr sz="1150" b="0">
-                <a:solidFill>
-                  <a:srgbClr val="5A6672"/>
-                </a:solidFill>
-                <a:latin typeface="微软雅黑"/>
-                <a:ea typeface="微软雅黑"/>
-                <a:cs typeface="微软雅黑"/>
-              </a:rPr>
-              <a:t>灰度通道 · 版本钉定</a:t>
-            </a:r>
-          </a:p>
-        </p:txBody>
-      </p:sp>
-      <p:sp>
-        <p:nvSpPr>
-          <p:cNvPr id="25" name="Rounded Rectangle 24"/>
+              <a:t>巩固 Skills as Code 基线（git + CI）</a:t>
+            </a:r>
+          </a:p>
+        </p:txBody>
+      </p:sp>
+      <p:sp>
+        <p:nvSpPr>
+          <p:cNvPr id="34" name="Rectangle 33"/>
           <p:cNvSpPr/>
           <p:nvPr/>
         </p:nvSpPr>
         <p:spPr>
           <a:xfrm>
-            <a:off x="7955280" y="4892040"/>
-            <a:ext cx="3566160" cy="914400"/>
-          </a:xfrm>
-          <a:prstGeom prst="roundRect">
+            <a:off x="8321040" y="3355848"/>
+            <a:ext cx="88900" cy="457200"/>
+          </a:xfrm>
+          <a:prstGeom prst="rect">
             <a:avLst/>
           </a:prstGeom>
           <a:solidFill>
-            <a:srgbClr val="EEF2F6"/>
+            <a:srgbClr val="D89B2A"/>
           </a:solidFill>
           <a:ln>
             <a:noFill/>
@@ -7039,14 +9305,14 @@
       </p:sp>
       <p:sp>
         <p:nvSpPr>
-          <p:cNvPr id="26" name="TextBox 25"/>
+          <p:cNvPr id="35" name="TextBox 34"/>
           <p:cNvSpPr txBox="1"/>
           <p:nvPr/>
         </p:nvSpPr>
         <p:spPr>
           <a:xfrm>
-            <a:off x="8138160" y="4983480"/>
-            <a:ext cx="3200400" cy="292608"/>
+            <a:off x="8549640" y="3246120"/>
+            <a:ext cx="2926080" cy="822960"/>
           </a:xfrm>
           <a:prstGeom prst="rect">
             <a:avLst/>
@@ -7054,98 +9320,131 @@
           <a:noFill/>
         </p:spPr>
         <p:txBody>
-          <a:bodyPr wrap="square" anchor="t" lIns="25400" rIns="25400" tIns="25400" bIns="25400">
+          <a:bodyPr wrap="square" anchor="ctr" lIns="25400" rIns="25400" tIns="12700" bIns="12700">
             <a:spAutoFit/>
           </a:bodyPr>
           <a:lstStyle/>
           <a:p>
             <a:pPr algn="l">
               <a:lnSpc>
-                <a:spcPct val="100000"/>
+                <a:spcPct val="115000"/>
               </a:lnSpc>
               <a:spcAft>
-                <a:spcPts val="400"/>
+                <a:spcPts val="300"/>
               </a:spcAft>
             </a:pPr>
             <a:r>
-              <a:rPr sz="1250" b="1">
-                <a:solidFill>
-                  <a:srgbClr val="5A6672"/>
+              <a:rPr sz="1250" b="0">
+                <a:solidFill>
+                  <a:srgbClr val="1E262E"/>
                 </a:solidFill>
                 <a:latin typeface="微软雅黑"/>
                 <a:ea typeface="微软雅黑"/>
                 <a:cs typeface="微软雅黑"/>
               </a:rPr>
-              <a:t>⬜  再下一步   </a:t>
-            </a:r>
-            <a:r>
-              <a:rPr sz="1350" b="1">
-                <a:solidFill>
-                  <a:srgbClr val="0B2A4A"/>
+              <a:t>建设按需分发与检索（Client SDK · 通道）</a:t>
+            </a:r>
+          </a:p>
+        </p:txBody>
+      </p:sp>
+      <p:sp>
+        <p:nvSpPr>
+          <p:cNvPr id="36" name="Rectangle 35"/>
+          <p:cNvSpPr/>
+          <p:nvPr/>
+        </p:nvSpPr>
+        <p:spPr>
+          <a:xfrm>
+            <a:off x="8321040" y="4315968"/>
+            <a:ext cx="88900" cy="457200"/>
+          </a:xfrm>
+          <a:prstGeom prst="rect">
+            <a:avLst/>
+          </a:prstGeom>
+          <a:solidFill>
+            <a:srgbClr val="D89B2A"/>
+          </a:solidFill>
+          <a:ln>
+            <a:noFill/>
+          </a:ln>
+          <a:effectLst/>
+        </p:spPr>
+        <p:style>
+          <a:lnRef idx="1">
+            <a:schemeClr val="accent1"/>
+          </a:lnRef>
+          <a:fillRef idx="3">
+            <a:schemeClr val="accent1"/>
+          </a:fillRef>
+          <a:effectRef idx="2">
+            <a:schemeClr val="accent1"/>
+          </a:effectRef>
+          <a:fontRef idx="minor">
+            <a:schemeClr val="lt1"/>
+          </a:fontRef>
+        </p:style>
+        <p:txBody>
+          <a:bodyPr rtlCol="0" anchor="ctr"/>
+          <a:lstStyle/>
+          <a:p>
+            <a:pPr algn="ctr"/>
+          </a:p>
+        </p:txBody>
+      </p:sp>
+      <p:sp>
+        <p:nvSpPr>
+          <p:cNvPr id="37" name="TextBox 36"/>
+          <p:cNvSpPr txBox="1"/>
+          <p:nvPr/>
+        </p:nvSpPr>
+        <p:spPr>
+          <a:xfrm>
+            <a:off x="8549640" y="4206240"/>
+            <a:ext cx="2926080" cy="822960"/>
+          </a:xfrm>
+          <a:prstGeom prst="rect">
+            <a:avLst/>
+          </a:prstGeom>
+          <a:noFill/>
+        </p:spPr>
+        <p:txBody>
+          <a:bodyPr wrap="square" anchor="ctr" lIns="25400" rIns="25400" tIns="12700" bIns="12700">
+            <a:spAutoFit/>
+          </a:bodyPr>
+          <a:lstStyle/>
+          <a:p>
+            <a:pPr algn="l">
+              <a:lnSpc>
+                <a:spcPct val="115000"/>
+              </a:lnSpc>
+              <a:spcAft>
+                <a:spcPts val="300"/>
+              </a:spcAft>
+            </a:pPr>
+            <a:r>
+              <a:rPr sz="1250" b="0">
+                <a:solidFill>
+                  <a:srgbClr val="1E262E"/>
                 </a:solidFill>
                 <a:latin typeface="微软雅黑"/>
                 <a:ea typeface="微软雅黑"/>
                 <a:cs typeface="微软雅黑"/>
               </a:rPr>
-              <a:t>使用遥测 / 审计</a:t>
-            </a:r>
-          </a:p>
-        </p:txBody>
-      </p:sp>
-      <p:sp>
-        <p:nvSpPr>
-          <p:cNvPr id="27" name="TextBox 26"/>
-          <p:cNvSpPr txBox="1"/>
-          <p:nvPr/>
-        </p:nvSpPr>
-        <p:spPr>
-          <a:xfrm>
-            <a:off x="8138160" y="5321808"/>
-            <a:ext cx="3200400" cy="411480"/>
-          </a:xfrm>
-          <a:prstGeom prst="rect">
-            <a:avLst/>
-          </a:prstGeom>
-          <a:noFill/>
-        </p:spPr>
-        <p:txBody>
-          <a:bodyPr wrap="square" anchor="t" lIns="25400" rIns="25400" tIns="25400" bIns="25400">
-            <a:spAutoFit/>
-          </a:bodyPr>
-          <a:lstStyle/>
-          <a:p>
-            <a:pPr algn="l">
-              <a:lnSpc>
-                <a:spcPct val="105000"/>
-              </a:lnSpc>
-              <a:spcAft>
-                <a:spcPts val="400"/>
-              </a:spcAft>
-            </a:pPr>
-            <a:r>
-              <a:rPr sz="1150" b="0">
-                <a:solidFill>
-                  <a:srgbClr val="5A6672"/>
-                </a:solidFill>
-                <a:latin typeface="微软雅黑"/>
-                <a:ea typeface="微软雅黑"/>
-                <a:cs typeface="微软雅黑"/>
-              </a:rPr>
-              <a:t>谁·何时·用了哪个技能,合规可观测</a:t>
-            </a:r>
-          </a:p>
-        </p:txBody>
-      </p:sp>
-      <p:sp>
-        <p:nvSpPr>
-          <p:cNvPr id="28" name="Rectangle 27"/>
+              <a:t>补齐使用遥测与审计（可观测 · 合规）</a:t>
+            </a:r>
+          </a:p>
+        </p:txBody>
+      </p:sp>
+      <p:sp>
+        <p:nvSpPr>
+          <p:cNvPr id="38" name="Rectangle 37"/>
           <p:cNvSpPr/>
           <p:nvPr/>
         </p:nvSpPr>
         <p:spPr>
           <a:xfrm>
-            <a:off x="640080" y="6053328"/>
-            <a:ext cx="10908792" cy="548640"/>
+            <a:off x="0" y="5852160"/>
+            <a:ext cx="12191695" cy="548640"/>
           </a:xfrm>
           <a:prstGeom prst="rect">
             <a:avLst/>
@@ -7182,14 +9481,14 @@
       </p:sp>
       <p:sp>
         <p:nvSpPr>
-          <p:cNvPr id="29" name="TextBox 28"/>
+          <p:cNvPr id="39" name="TextBox 38"/>
           <p:cNvSpPr txBox="1"/>
           <p:nvPr/>
         </p:nvSpPr>
         <p:spPr>
           <a:xfrm>
-            <a:off x="640080" y="6053328"/>
-            <a:ext cx="10908792" cy="548640"/>
+            <a:off x="548640" y="5852160"/>
+            <a:ext cx="11064240" cy="548640"/>
           </a:xfrm>
           <a:prstGeom prst="rect">
             <a:avLst/>
@@ -7197,7 +9496,7 @@
           <a:noFill/>
         </p:spPr>
         <p:txBody>
-          <a:bodyPr wrap="square" anchor="ctr" lIns="25400" rIns="25400" tIns="25400" bIns="25400">
+          <a:bodyPr wrap="square" anchor="ctr" lIns="25400" rIns="25400" tIns="12700" bIns="12700">
             <a:spAutoFit/>
           </a:bodyPr>
           <a:lstStyle/>
@@ -7207,7 +9506,7 @@
                 <a:spcPct val="100000"/>
               </a:lnSpc>
               <a:spcAft>
-                <a:spcPts val="400"/>
+                <a:spcPts val="300"/>
               </a:spcAft>
             </a:pPr>
             <a:r>
@@ -7219,7 +9518,29 @@
                 <a:ea typeface="微软雅黑"/>
                 <a:cs typeface="微软雅黑"/>
               </a:rPr>
-              <a:t>既能放手让全集团沉淀资产,又守得住质量与安全的底线 —— 进得来 · 管得住 · 可演进</a:t>
+              <a:t>目标：让 Skill 成为全公司</a:t>
+            </a:r>
+            <a:r>
+              <a:rPr sz="1400" b="1">
+                <a:solidFill>
+                  <a:srgbClr val="D89B2A"/>
+                </a:solidFill>
+                <a:latin typeface="微软雅黑"/>
+                <a:ea typeface="微软雅黑"/>
+                <a:cs typeface="微软雅黑"/>
+              </a:rPr>
+              <a:t>可复用、可治理、持续增值</a:t>
+            </a:r>
+            <a:r>
+              <a:rPr sz="1400" b="1">
+                <a:solidFill>
+                  <a:srgbClr val="FFFFFF"/>
+                </a:solidFill>
+                <a:latin typeface="微软雅黑"/>
+                <a:ea typeface="微软雅黑"/>
+                <a:cs typeface="微软雅黑"/>
+              </a:rPr>
+              <a:t>的数字资产 —— 从测试场景试点，走向全域规模化</a:t>
             </a:r>
           </a:p>
         </p:txBody>
